--- a/presentation/AfterVisit.pptx
+++ b/presentation/AfterVisit.pptx
@@ -109,6 +109,706 @@
     </a:lvl9pPr>
   </p:defaultTextStyle>
 </p:presentation>
+</file>
+
+<file path=ppt/notesMasters/notesMaster1.xml><?xml version="1.0" encoding="utf-8"?>
+<p:notesMaster xmlns:a="http://schemas.openxmlformats.org/drawingml/2006/main" xmlns:p="http://schemas.openxmlformats.org/presentationml/2006/main" xmlns:r="http://schemas.openxmlformats.org/officeDocument/2006/relationships">
+  <p:cSld>
+    <p:bg>
+      <p:bgRef idx="1001">
+        <a:schemeClr val="bg1"/>
+      </p:bgRef>
+    </p:bg>
+    <p:spTree>
+      <p:nvGrpSpPr>
+        <p:cNvPr id="1" name=""/>
+        <p:cNvGrpSpPr/>
+        <p:nvPr/>
+      </p:nvGrpSpPr>
+      <p:grpSpPr>
+        <a:xfrm>
+          <a:off x="0" y="0"/>
+          <a:ext cx="0" cy="0"/>
+          <a:chOff x="0" y="0"/>
+          <a:chExt cx="0" cy="0"/>
+        </a:xfrm>
+      </p:grpSpPr>
+      <p:sp>
+        <p:nvSpPr>
+          <p:cNvPr id="2" name="Header Placeholder 1"/>
+          <p:cNvSpPr>
+            <a:spLocks noGrp="1"/>
+          </p:cNvSpPr>
+          <p:nvPr>
+            <p:ph type="hdr" sz="quarter"/>
+          </p:nvPr>
+        </p:nvSpPr>
+        <p:spPr>
+          <a:xfrm>
+            <a:off x="0" y="0"/>
+            <a:ext cx="2971800" cy="457200"/>
+          </a:xfrm>
+          <a:prstGeom prst="rect">
+            <a:avLst/>
+          </a:prstGeom>
+        </p:spPr>
+        <p:txBody>
+          <a:bodyPr vert="horz" lIns="91440" tIns="45720" rIns="91440" bIns="45720" rtlCol="0"/>
+          <a:lstStyle>
+            <a:lvl1pPr algn="l">
+              <a:defRPr sz="1200"/>
+            </a:lvl1pPr>
+          </a:lstStyle>
+          <a:p>
+            <a:endParaRPr lang="en-US"/>
+          </a:p>
+        </p:txBody>
+      </p:sp>
+      <p:sp>
+        <p:nvSpPr>
+          <p:cNvPr id="3" name="Date Placeholder 2"/>
+          <p:cNvSpPr>
+            <a:spLocks noGrp="1"/>
+          </p:cNvSpPr>
+          <p:nvPr>
+            <p:ph type="dt" idx="1"/>
+          </p:nvPr>
+        </p:nvSpPr>
+        <p:spPr>
+          <a:xfrm>
+            <a:off x="3884613" y="0"/>
+            <a:ext cx="2971800" cy="457200"/>
+          </a:xfrm>
+          <a:prstGeom prst="rect">
+            <a:avLst/>
+          </a:prstGeom>
+        </p:spPr>
+        <p:txBody>
+          <a:bodyPr vert="horz" lIns="91440" tIns="45720" rIns="91440" bIns="45720" rtlCol="0"/>
+          <a:lstStyle>
+            <a:lvl1pPr algn="r">
+              <a:defRPr sz="1200"/>
+            </a:lvl1pPr>
+          </a:lstStyle>
+          <a:p>
+            <a:fld id="{0F89C1C7-3DCD-1040-A9CF-14679D8B5DDD}" type="datetimeFigureOut">
+              <a:rPr lang="en-US" smtClean="0"/>
+              <a:t>10/17/16</a:t>
+            </a:fld>
+            <a:endParaRPr lang="en-US"/>
+          </a:p>
+        </p:txBody>
+      </p:sp>
+      <p:sp>
+        <p:nvSpPr>
+          <p:cNvPr id="4" name="Slide Image Placeholder 3"/>
+          <p:cNvSpPr>
+            <a:spLocks noGrp="1" noRot="1" noChangeAspect="1"/>
+          </p:cNvSpPr>
+          <p:nvPr>
+            <p:ph type="sldImg" idx="2"/>
+          </p:nvPr>
+        </p:nvSpPr>
+        <p:spPr>
+          <a:xfrm>
+            <a:off x="1143000" y="685800"/>
+            <a:ext cx="4572000" cy="3429000"/>
+          </a:xfrm>
+          <a:prstGeom prst="rect">
+            <a:avLst/>
+          </a:prstGeom>
+          <a:noFill/>
+          <a:ln w="12700">
+            <a:solidFill>
+              <a:prstClr val="black"/>
+            </a:solidFill>
+          </a:ln>
+        </p:spPr>
+        <p:txBody>
+          <a:bodyPr vert="horz" lIns="91440" tIns="45720" rIns="91440" bIns="45720" rtlCol="0" anchor="ctr"/>
+          <a:lstStyle/>
+          <a:p>
+            <a:endParaRPr lang="en-US"/>
+          </a:p>
+        </p:txBody>
+      </p:sp>
+      <p:sp>
+        <p:nvSpPr>
+          <p:cNvPr id="5" name="Notes Placeholder 4"/>
+          <p:cNvSpPr>
+            <a:spLocks noGrp="1"/>
+          </p:cNvSpPr>
+          <p:nvPr>
+            <p:ph type="body" sz="quarter" idx="3"/>
+          </p:nvPr>
+        </p:nvSpPr>
+        <p:spPr>
+          <a:xfrm>
+            <a:off x="685800" y="4343400"/>
+            <a:ext cx="5486400" cy="4114800"/>
+          </a:xfrm>
+          <a:prstGeom prst="rect">
+            <a:avLst/>
+          </a:prstGeom>
+        </p:spPr>
+        <p:txBody>
+          <a:bodyPr vert="horz" lIns="91440" tIns="45720" rIns="91440" bIns="45720" rtlCol="0"/>
+          <a:lstStyle/>
+          <a:p>
+            <a:pPr lvl="0"/>
+            <a:r>
+              <a:rPr lang="en-US" smtClean="0"/>
+              <a:t>Click to edit Master text styles</a:t>
+            </a:r>
+          </a:p>
+          <a:p>
+            <a:pPr lvl="1"/>
+            <a:r>
+              <a:rPr lang="en-US" smtClean="0"/>
+              <a:t>Second level</a:t>
+            </a:r>
+          </a:p>
+          <a:p>
+            <a:pPr lvl="2"/>
+            <a:r>
+              <a:rPr lang="en-US" smtClean="0"/>
+              <a:t>Third level</a:t>
+            </a:r>
+          </a:p>
+          <a:p>
+            <a:pPr lvl="3"/>
+            <a:r>
+              <a:rPr lang="en-US" smtClean="0"/>
+              <a:t>Fourth level</a:t>
+            </a:r>
+          </a:p>
+          <a:p>
+            <a:pPr lvl="4"/>
+            <a:r>
+              <a:rPr lang="en-US" smtClean="0"/>
+              <a:t>Fifth level</a:t>
+            </a:r>
+            <a:endParaRPr lang="en-US"/>
+          </a:p>
+        </p:txBody>
+      </p:sp>
+      <p:sp>
+        <p:nvSpPr>
+          <p:cNvPr id="6" name="Footer Placeholder 5"/>
+          <p:cNvSpPr>
+            <a:spLocks noGrp="1"/>
+          </p:cNvSpPr>
+          <p:nvPr>
+            <p:ph type="ftr" sz="quarter" idx="4"/>
+          </p:nvPr>
+        </p:nvSpPr>
+        <p:spPr>
+          <a:xfrm>
+            <a:off x="0" y="8685213"/>
+            <a:ext cx="2971800" cy="457200"/>
+          </a:xfrm>
+          <a:prstGeom prst="rect">
+            <a:avLst/>
+          </a:prstGeom>
+        </p:spPr>
+        <p:txBody>
+          <a:bodyPr vert="horz" lIns="91440" tIns="45720" rIns="91440" bIns="45720" rtlCol="0" anchor="b"/>
+          <a:lstStyle>
+            <a:lvl1pPr algn="l">
+              <a:defRPr sz="1200"/>
+            </a:lvl1pPr>
+          </a:lstStyle>
+          <a:p>
+            <a:endParaRPr lang="en-US"/>
+          </a:p>
+        </p:txBody>
+      </p:sp>
+      <p:sp>
+        <p:nvSpPr>
+          <p:cNvPr id="7" name="Slide Number Placeholder 6"/>
+          <p:cNvSpPr>
+            <a:spLocks noGrp="1"/>
+          </p:cNvSpPr>
+          <p:nvPr>
+            <p:ph type="sldNum" sz="quarter" idx="5"/>
+          </p:nvPr>
+        </p:nvSpPr>
+        <p:spPr>
+          <a:xfrm>
+            <a:off x="3884613" y="8685213"/>
+            <a:ext cx="2971800" cy="457200"/>
+          </a:xfrm>
+          <a:prstGeom prst="rect">
+            <a:avLst/>
+          </a:prstGeom>
+        </p:spPr>
+        <p:txBody>
+          <a:bodyPr vert="horz" lIns="91440" tIns="45720" rIns="91440" bIns="45720" rtlCol="0" anchor="b"/>
+          <a:lstStyle>
+            <a:lvl1pPr algn="r">
+              <a:defRPr sz="1200"/>
+            </a:lvl1pPr>
+          </a:lstStyle>
+          <a:p>
+            <a:fld id="{BB5E49A5-4136-284D-997B-48E1D791AD67}" type="slidenum">
+              <a:rPr lang="en-US" smtClean="0"/>
+              <a:t>‹#›</a:t>
+            </a:fld>
+            <a:endParaRPr lang="en-US"/>
+          </a:p>
+        </p:txBody>
+      </p:sp>
+    </p:spTree>
+    <p:extLst>
+      <p:ext uri="{BB962C8B-B14F-4D97-AF65-F5344CB8AC3E}">
+        <p14:creationId xmlns:p14="http://schemas.microsoft.com/office/powerpoint/2010/main" val="2623252185"/>
+      </p:ext>
+    </p:extLst>
+  </p:cSld>
+  <p:clrMap bg1="lt1" tx1="dk1" bg2="lt2" tx2="dk2" accent1="accent1" accent2="accent2" accent3="accent3" accent4="accent4" accent5="accent5" accent6="accent6" hlink="hlink" folHlink="folHlink"/>
+  <p:notesStyle>
+    <a:lvl1pPr marL="0" algn="l" defTabSz="457200" rtl="0" eaLnBrk="1" latinLnBrk="0" hangingPunct="1">
+      <a:defRPr sz="1200" kern="1200">
+        <a:solidFill>
+          <a:schemeClr val="tx1"/>
+        </a:solidFill>
+        <a:latin typeface="+mn-lt"/>
+        <a:ea typeface="+mn-ea"/>
+        <a:cs typeface="+mn-cs"/>
+      </a:defRPr>
+    </a:lvl1pPr>
+    <a:lvl2pPr marL="457200" algn="l" defTabSz="457200" rtl="0" eaLnBrk="1" latinLnBrk="0" hangingPunct="1">
+      <a:defRPr sz="1200" kern="1200">
+        <a:solidFill>
+          <a:schemeClr val="tx1"/>
+        </a:solidFill>
+        <a:latin typeface="+mn-lt"/>
+        <a:ea typeface="+mn-ea"/>
+        <a:cs typeface="+mn-cs"/>
+      </a:defRPr>
+    </a:lvl2pPr>
+    <a:lvl3pPr marL="914400" algn="l" defTabSz="457200" rtl="0" eaLnBrk="1" latinLnBrk="0" hangingPunct="1">
+      <a:defRPr sz="1200" kern="1200">
+        <a:solidFill>
+          <a:schemeClr val="tx1"/>
+        </a:solidFill>
+        <a:latin typeface="+mn-lt"/>
+        <a:ea typeface="+mn-ea"/>
+        <a:cs typeface="+mn-cs"/>
+      </a:defRPr>
+    </a:lvl3pPr>
+    <a:lvl4pPr marL="1371600" algn="l" defTabSz="457200" rtl="0" eaLnBrk="1" latinLnBrk="0" hangingPunct="1">
+      <a:defRPr sz="1200" kern="1200">
+        <a:solidFill>
+          <a:schemeClr val="tx1"/>
+        </a:solidFill>
+        <a:latin typeface="+mn-lt"/>
+        <a:ea typeface="+mn-ea"/>
+        <a:cs typeface="+mn-cs"/>
+      </a:defRPr>
+    </a:lvl4pPr>
+    <a:lvl5pPr marL="1828800" algn="l" defTabSz="457200" rtl="0" eaLnBrk="1" latinLnBrk="0" hangingPunct="1">
+      <a:defRPr sz="1200" kern="1200">
+        <a:solidFill>
+          <a:schemeClr val="tx1"/>
+        </a:solidFill>
+        <a:latin typeface="+mn-lt"/>
+        <a:ea typeface="+mn-ea"/>
+        <a:cs typeface="+mn-cs"/>
+      </a:defRPr>
+    </a:lvl5pPr>
+    <a:lvl6pPr marL="2286000" algn="l" defTabSz="457200" rtl="0" eaLnBrk="1" latinLnBrk="0" hangingPunct="1">
+      <a:defRPr sz="1200" kern="1200">
+        <a:solidFill>
+          <a:schemeClr val="tx1"/>
+        </a:solidFill>
+        <a:latin typeface="+mn-lt"/>
+        <a:ea typeface="+mn-ea"/>
+        <a:cs typeface="+mn-cs"/>
+      </a:defRPr>
+    </a:lvl6pPr>
+    <a:lvl7pPr marL="2743200" algn="l" defTabSz="457200" rtl="0" eaLnBrk="1" latinLnBrk="0" hangingPunct="1">
+      <a:defRPr sz="1200" kern="1200">
+        <a:solidFill>
+          <a:schemeClr val="tx1"/>
+        </a:solidFill>
+        <a:latin typeface="+mn-lt"/>
+        <a:ea typeface="+mn-ea"/>
+        <a:cs typeface="+mn-cs"/>
+      </a:defRPr>
+    </a:lvl7pPr>
+    <a:lvl8pPr marL="3200400" algn="l" defTabSz="457200" rtl="0" eaLnBrk="1" latinLnBrk="0" hangingPunct="1">
+      <a:defRPr sz="1200" kern="1200">
+        <a:solidFill>
+          <a:schemeClr val="tx1"/>
+        </a:solidFill>
+        <a:latin typeface="+mn-lt"/>
+        <a:ea typeface="+mn-ea"/>
+        <a:cs typeface="+mn-cs"/>
+      </a:defRPr>
+    </a:lvl8pPr>
+    <a:lvl9pPr marL="3657600" algn="l" defTabSz="457200" rtl="0" eaLnBrk="1" latinLnBrk="0" hangingPunct="1">
+      <a:defRPr sz="1200" kern="1200">
+        <a:solidFill>
+          <a:schemeClr val="tx1"/>
+        </a:solidFill>
+        <a:latin typeface="+mn-lt"/>
+        <a:ea typeface="+mn-ea"/>
+        <a:cs typeface="+mn-cs"/>
+      </a:defRPr>
+    </a:lvl9pPr>
+  </p:notesStyle>
+</p:notesMaster>
+</file>
+
+<file path=ppt/notesSlides/notesSlide1.xml><?xml version="1.0" encoding="utf-8"?>
+<p:notes xmlns:a="http://schemas.openxmlformats.org/drawingml/2006/main" xmlns:p="http://schemas.openxmlformats.org/presentationml/2006/main" xmlns:r="http://schemas.openxmlformats.org/officeDocument/2006/relationships">
+  <p:cSld>
+    <p:spTree>
+      <p:nvGrpSpPr>
+        <p:cNvPr id="1" name=""/>
+        <p:cNvGrpSpPr/>
+        <p:nvPr/>
+      </p:nvGrpSpPr>
+      <p:grpSpPr>
+        <a:xfrm>
+          <a:off x="0" y="0"/>
+          <a:ext cx="0" cy="0"/>
+          <a:chOff x="0" y="0"/>
+          <a:chExt cx="0" cy="0"/>
+        </a:xfrm>
+      </p:grpSpPr>
+      <p:sp>
+        <p:nvSpPr>
+          <p:cNvPr id="2" name="Slide Image Placeholder 1"/>
+          <p:cNvSpPr>
+            <a:spLocks noGrp="1"/>
+          </p:cNvSpPr>
+          <p:nvPr>
+            <p:ph type="sldImg" idx="2"/>
+          </p:nvPr>
+        </p:nvSpPr>
+        <p:spPr/>
+      </p:sp>
+      <p:sp>
+        <p:nvSpPr>
+          <p:cNvPr id="3" name="Notes Placeholder 2"/>
+          <p:cNvSpPr>
+            <a:spLocks noGrp="1"/>
+          </p:cNvSpPr>
+          <p:nvPr>
+            <p:ph type="body" idx="3" sz="quarter"/>
+          </p:nvPr>
+        </p:nvSpPr>
+        <p:spPr/>
+        <p:txBody>
+          <a:bodyPr/>
+          <a:lstStyle/>
+          <a:p>
+            <a:r>
+              <a:t>Open with the elevator pitch: "AfterVisit is a post-meeting assistant for major-gift fundraisers. Bullets in, Salesforce note plus thank-you email out, human approval before anything writes." One sentence on the problem, one on the approach. Move to slide 2.</a:t>
+            </a:r>
+          </a:p>
+        </p:txBody>
+      </p:sp>
+      <p:sp>
+        <p:nvSpPr>
+          <p:cNvPr id="4" name="Slide Number Placeholder 3"/>
+          <p:cNvSpPr>
+            <a:spLocks noGrp="1"/>
+          </p:cNvSpPr>
+          <p:nvPr>
+            <p:ph type="sldNum" idx="5" sz="quarter"/>
+          </p:nvPr>
+        </p:nvSpPr>
+        <p:spPr/>
+      </p:sp>
+    </p:spTree>
+  </p:cSld>
+  <p:clrMapOvr>
+    <a:masterClrMapping/>
+  </p:clrMapOvr>
+</p:notes>
+</file>
+
+<file path=ppt/notesSlides/notesSlide2.xml><?xml version="1.0" encoding="utf-8"?>
+<p:notes xmlns:a="http://schemas.openxmlformats.org/drawingml/2006/main" xmlns:p="http://schemas.openxmlformats.org/presentationml/2006/main" xmlns:r="http://schemas.openxmlformats.org/officeDocument/2006/relationships">
+  <p:cSld>
+    <p:spTree>
+      <p:nvGrpSpPr>
+        <p:cNvPr id="1" name=""/>
+        <p:cNvGrpSpPr/>
+        <p:nvPr/>
+      </p:nvGrpSpPr>
+      <p:grpSpPr>
+        <a:xfrm>
+          <a:off x="0" y="0"/>
+          <a:ext cx="0" cy="0"/>
+          <a:chOff x="0" y="0"/>
+          <a:chExt cx="0" cy="0"/>
+        </a:xfrm>
+      </p:grpSpPr>
+      <p:sp>
+        <p:nvSpPr>
+          <p:cNvPr id="2" name="Slide Image Placeholder 1"/>
+          <p:cNvSpPr>
+            <a:spLocks noGrp="1"/>
+          </p:cNvSpPr>
+          <p:nvPr>
+            <p:ph type="sldImg" idx="2"/>
+          </p:nvPr>
+        </p:nvSpPr>
+        <p:spPr/>
+      </p:sp>
+      <p:sp>
+        <p:nvSpPr>
+          <p:cNvPr id="3" name="Notes Placeholder 2"/>
+          <p:cNvSpPr>
+            <a:spLocks noGrp="1"/>
+          </p:cNvSpPr>
+          <p:nvPr>
+            <p:ph type="body" idx="3" sz="quarter"/>
+          </p:nvPr>
+        </p:nvSpPr>
+        <p:spPr/>
+        <p:txBody>
+          <a:bodyPr/>
+          <a:lstStyle/>
+          <a:p>
+            <a:r>
+              <a:t>Set up the operational pain: 30 minutes per meeting times 10 meetings per week is hours of repetitive work where quality and compliance both suffer. Then introduce the approach in one line: rather than one LLM call doing everything, a decomposed pipeline with the right model for each stage. Move to architecture.</a:t>
+            </a:r>
+          </a:p>
+        </p:txBody>
+      </p:sp>
+      <p:sp>
+        <p:nvSpPr>
+          <p:cNvPr id="4" name="Slide Number Placeholder 3"/>
+          <p:cNvSpPr>
+            <a:spLocks noGrp="1"/>
+          </p:cNvSpPr>
+          <p:nvPr>
+            <p:ph type="sldNum" idx="5" sz="quarter"/>
+          </p:nvPr>
+        </p:nvSpPr>
+        <p:spPr/>
+      </p:sp>
+    </p:spTree>
+  </p:cSld>
+  <p:clrMapOvr>
+    <a:masterClrMapping/>
+  </p:clrMapOvr>
+</p:notes>
+</file>
+
+<file path=ppt/notesSlides/notesSlide3.xml><?xml version="1.0" encoding="utf-8"?>
+<p:notes xmlns:a="http://schemas.openxmlformats.org/drawingml/2006/main" xmlns:p="http://schemas.openxmlformats.org/presentationml/2006/main" xmlns:r="http://schemas.openxmlformats.org/officeDocument/2006/relationships">
+  <p:cSld>
+    <p:spTree>
+      <p:nvGrpSpPr>
+        <p:cNvPr id="1" name=""/>
+        <p:cNvGrpSpPr/>
+        <p:nvPr/>
+      </p:nvGrpSpPr>
+      <p:grpSpPr>
+        <a:xfrm>
+          <a:off x="0" y="0"/>
+          <a:ext cx="0" cy="0"/>
+          <a:chOff x="0" y="0"/>
+          <a:chExt cx="0" cy="0"/>
+        </a:xfrm>
+      </p:grpSpPr>
+      <p:sp>
+        <p:nvSpPr>
+          <p:cNvPr id="2" name="Slide Image Placeholder 1"/>
+          <p:cNvSpPr>
+            <a:spLocks noGrp="1"/>
+          </p:cNvSpPr>
+          <p:nvPr>
+            <p:ph type="sldImg" idx="2"/>
+          </p:nvPr>
+        </p:nvSpPr>
+        <p:spPr/>
+      </p:sp>
+      <p:sp>
+        <p:nvSpPr>
+          <p:cNvPr id="3" name="Notes Placeholder 2"/>
+          <p:cNvSpPr>
+            <a:spLocks noGrp="1"/>
+          </p:cNvSpPr>
+          <p:nvPr>
+            <p:ph type="body" idx="3" sz="quarter"/>
+          </p:nvPr>
+        </p:nvSpPr>
+        <p:spPr/>
+        <p:txBody>
+          <a:bodyPr/>
+          <a:lstStyle/>
+          <a:p>
+            <a:r>
+              <a:t>This is the centerpiece. Walk left to right. Bullets, redact, note (Haiku because it's good at schema-extraction), email (Opus because voice matters), human gate. Mention the email-voice skill is fully portable: a folder of YAML-fronted markdown files. No vector store; at this corpus size, metadata routing is enough.</a:t>
+            </a:r>
+          </a:p>
+        </p:txBody>
+      </p:sp>
+      <p:sp>
+        <p:nvSpPr>
+          <p:cNvPr id="4" name="Slide Number Placeholder 3"/>
+          <p:cNvSpPr>
+            <a:spLocks noGrp="1"/>
+          </p:cNvSpPr>
+          <p:nvPr>
+            <p:ph type="sldNum" idx="5" sz="quarter"/>
+          </p:nvPr>
+        </p:nvSpPr>
+        <p:spPr/>
+      </p:sp>
+    </p:spTree>
+  </p:cSld>
+  <p:clrMapOvr>
+    <a:masterClrMapping/>
+  </p:clrMapOvr>
+</p:notes>
+</file>
+
+<file path=ppt/notesSlides/notesSlide4.xml><?xml version="1.0" encoding="utf-8"?>
+<p:notes xmlns:a="http://schemas.openxmlformats.org/drawingml/2006/main" xmlns:p="http://schemas.openxmlformats.org/presentationml/2006/main" xmlns:r="http://schemas.openxmlformats.org/officeDocument/2006/relationships">
+  <p:cSld>
+    <p:spTree>
+      <p:nvGrpSpPr>
+        <p:cNvPr id="1" name=""/>
+        <p:cNvGrpSpPr/>
+        <p:nvPr/>
+      </p:nvGrpSpPr>
+      <p:grpSpPr>
+        <a:xfrm>
+          <a:off x="0" y="0"/>
+          <a:ext cx="0" cy="0"/>
+          <a:chOff x="0" y="0"/>
+          <a:chExt cx="0" cy="0"/>
+        </a:xfrm>
+      </p:grpSpPr>
+      <p:sp>
+        <p:nvSpPr>
+          <p:cNvPr id="2" name="Slide Image Placeholder 1"/>
+          <p:cNvSpPr>
+            <a:spLocks noGrp="1"/>
+          </p:cNvSpPr>
+          <p:nvPr>
+            <p:ph type="sldImg" idx="2"/>
+          </p:nvPr>
+        </p:nvSpPr>
+        <p:spPr/>
+      </p:sp>
+      <p:sp>
+        <p:nvSpPr>
+          <p:cNvPr id="3" name="Notes Placeholder 2"/>
+          <p:cNvSpPr>
+            <a:spLocks noGrp="1"/>
+          </p:cNvSpPr>
+          <p:nvPr>
+            <p:ph type="body" idx="3" sz="quarter"/>
+          </p:nvPr>
+        </p:nvSpPr>
+        <p:spPr/>
+        <p:txBody>
+          <a:bodyPr/>
+          <a:lstStyle/>
+          <a:p>
+            <a:r>
+              <a:t>Three conditions, fifteen test cases. Baseline A is a single LLM call, no schema, no skill, no redaction. Baseline B is the full pipeline with three fixed exemplars. AfterVisit is the full pipeline with skill routing. LLM judge, validated against hand scores on five cases. Read the table top to bottom.</a:t>
+            </a:r>
+          </a:p>
+        </p:txBody>
+      </p:sp>
+      <p:sp>
+        <p:nvSpPr>
+          <p:cNvPr id="4" name="Slide Number Placeholder 3"/>
+          <p:cNvSpPr>
+            <a:spLocks noGrp="1"/>
+          </p:cNvSpPr>
+          <p:nvPr>
+            <p:ph type="sldNum" idx="5" sz="quarter"/>
+          </p:nvPr>
+        </p:nvSpPr>
+        <p:spPr/>
+      </p:sp>
+    </p:spTree>
+  </p:cSld>
+  <p:clrMapOvr>
+    <a:masterClrMapping/>
+  </p:clrMapOvr>
+</p:notes>
+</file>
+
+<file path=ppt/notesSlides/notesSlide5.xml><?xml version="1.0" encoding="utf-8"?>
+<p:notes xmlns:a="http://schemas.openxmlformats.org/drawingml/2006/main" xmlns:p="http://schemas.openxmlformats.org/presentationml/2006/main" xmlns:r="http://schemas.openxmlformats.org/officeDocument/2006/relationships">
+  <p:cSld>
+    <p:spTree>
+      <p:nvGrpSpPr>
+        <p:cNvPr id="1" name=""/>
+        <p:cNvGrpSpPr/>
+        <p:nvPr/>
+      </p:nvGrpSpPr>
+      <p:grpSpPr>
+        <a:xfrm>
+          <a:off x="0" y="0"/>
+          <a:ext cx="0" cy="0"/>
+          <a:chOff x="0" y="0"/>
+          <a:chExt cx="0" cy="0"/>
+        </a:xfrm>
+      </p:grpSpPr>
+      <p:sp>
+        <p:nvSpPr>
+          <p:cNvPr id="2" name="Slide Image Placeholder 1"/>
+          <p:cNvSpPr>
+            <a:spLocks noGrp="1"/>
+          </p:cNvSpPr>
+          <p:nvPr>
+            <p:ph type="sldImg" idx="2"/>
+          </p:nvPr>
+        </p:nvSpPr>
+        <p:spPr/>
+      </p:sp>
+      <p:sp>
+        <p:nvSpPr>
+          <p:cNvPr id="3" name="Notes Placeholder 2"/>
+          <p:cNvSpPr>
+            <a:spLocks noGrp="1"/>
+          </p:cNvSpPr>
+          <p:nvPr>
+            <p:ph type="body" idx="3" sz="quarter"/>
+          </p:nvPr>
+        </p:nvSpPr>
+        <p:spPr/>
+        <p:txBody>
+          <a:bodyPr/>
+          <a:lstStyle/>
+          <a:p>
+            <a:r>
+              <a:t>Three findings, then limitations, then thank you. (1) Decomposition wins on tool-call reliability, not rubric points: judge missed that 7 of 15 of Baseline A's notes failed real schema. (2) Voice anchoring is the clear win: 1.0 to 2.0 on voice match. (3) Metadata routing ties fixed exemplars at n=15. The pre-registered threshold called this honestly. Limitations: oblique-acknowledgment ceiling on sensitive cases; corpus needs a sensitivity dimension; n=15 is small. Close: "Thank you, happy to take questions."</a:t>
+            </a:r>
+          </a:p>
+        </p:txBody>
+      </p:sp>
+      <p:sp>
+        <p:nvSpPr>
+          <p:cNvPr id="4" name="Slide Number Placeholder 3"/>
+          <p:cNvSpPr>
+            <a:spLocks noGrp="1"/>
+          </p:cNvSpPr>
+          <p:nvPr>
+            <p:ph type="sldNum" idx="5" sz="quarter"/>
+          </p:nvPr>
+        </p:nvSpPr>
+        <p:spPr/>
+      </p:sp>
+    </p:spTree>
+  </p:cSld>
+  <p:clrMapOvr>
+    <a:masterClrMapping/>
+  </p:clrMapOvr>
+</p:notes>
 </file>
 
 <file path=ppt/slideLayouts/slideLayout1.xml><?xml version="1.0" encoding="utf-8"?>
@@ -5396,4 +6096,324 @@
   </a:objectDefaults>
   <a:extraClrSchemeLst/>
 </a:theme>
+</file>
+
+<file path=ppt/theme/theme2.xml><?xml version="1.0" encoding="utf-8"?>
+<a:theme xmlns:a="http://schemas.openxmlformats.org/drawingml/2006/main" name="Office Theme">
+  <a:themeElements>
+    <a:clrScheme name="Office">
+      <a:dk1>
+        <a:sysClr val="windowText" lastClr="000000"/>
+      </a:dk1>
+      <a:lt1>
+        <a:sysClr val="window" lastClr="FFFFFF"/>
+      </a:lt1>
+      <a:dk2>
+        <a:srgbClr val="1F497D"/>
+      </a:dk2>
+      <a:lt2>
+        <a:srgbClr val="EEECE1"/>
+      </a:lt2>
+      <a:accent1>
+        <a:srgbClr val="4F81BD"/>
+      </a:accent1>
+      <a:accent2>
+        <a:srgbClr val="C0504D"/>
+      </a:accent2>
+      <a:accent3>
+        <a:srgbClr val="9BBB59"/>
+      </a:accent3>
+      <a:accent4>
+        <a:srgbClr val="8064A2"/>
+      </a:accent4>
+      <a:accent5>
+        <a:srgbClr val="4BACC6"/>
+      </a:accent5>
+      <a:accent6>
+        <a:srgbClr val="F79646"/>
+      </a:accent6>
+      <a:hlink>
+        <a:srgbClr val="0000FF"/>
+      </a:hlink>
+      <a:folHlink>
+        <a:srgbClr val="800080"/>
+      </a:folHlink>
+    </a:clrScheme>
+    <a:fontScheme name="Office">
+      <a:majorFont>
+        <a:latin typeface="Calibri"/>
+        <a:ea typeface=""/>
+        <a:cs typeface=""/>
+        <a:font script="Jpan" typeface="ＭＳ Ｐゴシック"/>
+        <a:font script="Hang" typeface="맑은 고딕"/>
+        <a:font script="Hans" typeface="宋体"/>
+        <a:font script="Hant" typeface="新細明體"/>
+        <a:font script="Arab" typeface="Times New Roman"/>
+        <a:font script="Hebr" typeface="Times New Roman"/>
+        <a:font script="Thai" typeface="Angsana New"/>
+        <a:font script="Ethi" typeface="Nyala"/>
+        <a:font script="Beng" typeface="Vrinda"/>
+        <a:font script="Gujr" typeface="Shruti"/>
+        <a:font script="Khmr" typeface="MoolBoran"/>
+        <a:font script="Knda" typeface="Tunga"/>
+        <a:font script="Guru" typeface="Raavi"/>
+        <a:font script="Cans" typeface="Euphemia"/>
+        <a:font script="Cher" typeface="Plantagenet Cherokee"/>
+        <a:font script="Yiii" typeface="Microsoft Yi Baiti"/>
+        <a:font script="Tibt" typeface="Microsoft Himalaya"/>
+        <a:font script="Thaa" typeface="MV Boli"/>
+        <a:font script="Deva" typeface="Mangal"/>
+        <a:font script="Telu" typeface="Gautami"/>
+        <a:font script="Taml" typeface="Latha"/>
+        <a:font script="Syrc" typeface="Estrangelo Edessa"/>
+        <a:font script="Orya" typeface="Kalinga"/>
+        <a:font script="Mlym" typeface="Kartika"/>
+        <a:font script="Laoo" typeface="DokChampa"/>
+        <a:font script="Sinh" typeface="Iskoola Pota"/>
+        <a:font script="Mong" typeface="Mongolian Baiti"/>
+        <a:font script="Viet" typeface="Times New Roman"/>
+        <a:font script="Uigh" typeface="Microsoft Uighur"/>
+        <a:font script="Geor" typeface="Sylfaen"/>
+      </a:majorFont>
+      <a:minorFont>
+        <a:latin typeface="Calibri"/>
+        <a:ea typeface=""/>
+        <a:cs typeface=""/>
+        <a:font script="Jpan" typeface="ＭＳ Ｐゴシック"/>
+        <a:font script="Hang" typeface="맑은 고딕"/>
+        <a:font script="Hans" typeface="宋体"/>
+        <a:font script="Hant" typeface="新細明體"/>
+        <a:font script="Arab" typeface="Arial"/>
+        <a:font script="Hebr" typeface="Arial"/>
+        <a:font script="Thai" typeface="Cordia New"/>
+        <a:font script="Ethi" typeface="Nyala"/>
+        <a:font script="Beng" typeface="Vrinda"/>
+        <a:font script="Gujr" typeface="Shruti"/>
+        <a:font script="Khmr" typeface="DaunPenh"/>
+        <a:font script="Knda" typeface="Tunga"/>
+        <a:font script="Guru" typeface="Raavi"/>
+        <a:font script="Cans" typeface="Euphemia"/>
+        <a:font script="Cher" typeface="Plantagenet Cherokee"/>
+        <a:font script="Yiii" typeface="Microsoft Yi Baiti"/>
+        <a:font script="Tibt" typeface="Microsoft Himalaya"/>
+        <a:font script="Thaa" typeface="MV Boli"/>
+        <a:font script="Deva" typeface="Mangal"/>
+        <a:font script="Telu" typeface="Gautami"/>
+        <a:font script="Taml" typeface="Latha"/>
+        <a:font script="Syrc" typeface="Estrangelo Edessa"/>
+        <a:font script="Orya" typeface="Kalinga"/>
+        <a:font script="Mlym" typeface="Kartika"/>
+        <a:font script="Laoo" typeface="DokChampa"/>
+        <a:font script="Sinh" typeface="Iskoola Pota"/>
+        <a:font script="Mong" typeface="Mongolian Baiti"/>
+        <a:font script="Viet" typeface="Arial"/>
+        <a:font script="Uigh" typeface="Microsoft Uighur"/>
+        <a:font script="Geor" typeface="Sylfaen"/>
+      </a:minorFont>
+    </a:fontScheme>
+    <a:fmtScheme name="Office">
+      <a:fillStyleLst>
+        <a:solidFill>
+          <a:schemeClr val="phClr"/>
+        </a:solidFill>
+        <a:gradFill rotWithShape="1">
+          <a:gsLst>
+            <a:gs pos="0">
+              <a:schemeClr val="phClr">
+                <a:tint val="50000"/>
+                <a:satMod val="300000"/>
+              </a:schemeClr>
+            </a:gs>
+            <a:gs pos="35000">
+              <a:schemeClr val="phClr">
+                <a:tint val="37000"/>
+                <a:satMod val="300000"/>
+              </a:schemeClr>
+            </a:gs>
+            <a:gs pos="100000">
+              <a:schemeClr val="phClr">
+                <a:tint val="15000"/>
+                <a:satMod val="350000"/>
+              </a:schemeClr>
+            </a:gs>
+          </a:gsLst>
+          <a:lin ang="16200000" scaled="1"/>
+        </a:gradFill>
+        <a:gradFill rotWithShape="1">
+          <a:gsLst>
+            <a:gs pos="0">
+              <a:schemeClr val="phClr">
+                <a:tint val="100000"/>
+                <a:shade val="100000"/>
+                <a:satMod val="130000"/>
+              </a:schemeClr>
+            </a:gs>
+            <a:gs pos="100000">
+              <a:schemeClr val="phClr">
+                <a:tint val="50000"/>
+                <a:shade val="100000"/>
+                <a:satMod val="350000"/>
+              </a:schemeClr>
+            </a:gs>
+          </a:gsLst>
+          <a:lin ang="16200000" scaled="0"/>
+        </a:gradFill>
+      </a:fillStyleLst>
+      <a:lnStyleLst>
+        <a:ln w="9525" cap="flat" cmpd="sng" algn="ctr">
+          <a:solidFill>
+            <a:schemeClr val="phClr">
+              <a:shade val="95000"/>
+              <a:satMod val="105000"/>
+            </a:schemeClr>
+          </a:solidFill>
+          <a:prstDash val="solid"/>
+        </a:ln>
+        <a:ln w="25400" cap="flat" cmpd="sng" algn="ctr">
+          <a:solidFill>
+            <a:schemeClr val="phClr"/>
+          </a:solidFill>
+          <a:prstDash val="solid"/>
+        </a:ln>
+        <a:ln w="38100" cap="flat" cmpd="sng" algn="ctr">
+          <a:solidFill>
+            <a:schemeClr val="phClr"/>
+          </a:solidFill>
+          <a:prstDash val="solid"/>
+        </a:ln>
+      </a:lnStyleLst>
+      <a:effectStyleLst>
+        <a:effectStyle>
+          <a:effectLst>
+            <a:outerShdw blurRad="40000" dist="20000" dir="5400000" rotWithShape="0">
+              <a:srgbClr val="000000">
+                <a:alpha val="38000"/>
+              </a:srgbClr>
+            </a:outerShdw>
+          </a:effectLst>
+        </a:effectStyle>
+        <a:effectStyle>
+          <a:effectLst>
+            <a:outerShdw blurRad="40000" dist="23000" dir="5400000" rotWithShape="0">
+              <a:srgbClr val="000000">
+                <a:alpha val="35000"/>
+              </a:srgbClr>
+            </a:outerShdw>
+          </a:effectLst>
+        </a:effectStyle>
+        <a:effectStyle>
+          <a:effectLst>
+            <a:outerShdw blurRad="40000" dist="23000" dir="5400000" rotWithShape="0">
+              <a:srgbClr val="000000">
+                <a:alpha val="35000"/>
+              </a:srgbClr>
+            </a:outerShdw>
+          </a:effectLst>
+          <a:scene3d>
+            <a:camera prst="orthographicFront">
+              <a:rot lat="0" lon="0" rev="0"/>
+            </a:camera>
+            <a:lightRig rig="threePt" dir="t">
+              <a:rot lat="0" lon="0" rev="1200000"/>
+            </a:lightRig>
+          </a:scene3d>
+          <a:sp3d>
+            <a:bevelT w="63500" h="25400"/>
+          </a:sp3d>
+        </a:effectStyle>
+      </a:effectStyleLst>
+      <a:bgFillStyleLst>
+        <a:solidFill>
+          <a:schemeClr val="phClr"/>
+        </a:solidFill>
+        <a:gradFill rotWithShape="1">
+          <a:gsLst>
+            <a:gs pos="0">
+              <a:schemeClr val="phClr">
+                <a:tint val="40000"/>
+                <a:satMod val="350000"/>
+              </a:schemeClr>
+            </a:gs>
+            <a:gs pos="40000">
+              <a:schemeClr val="phClr">
+                <a:tint val="45000"/>
+                <a:shade val="99000"/>
+                <a:satMod val="350000"/>
+              </a:schemeClr>
+            </a:gs>
+            <a:gs pos="100000">
+              <a:schemeClr val="phClr">
+                <a:shade val="20000"/>
+                <a:satMod val="255000"/>
+              </a:schemeClr>
+            </a:gs>
+          </a:gsLst>
+          <a:path path="circle">
+            <a:fillToRect l="50000" t="-80000" r="50000" b="180000"/>
+          </a:path>
+        </a:gradFill>
+        <a:gradFill rotWithShape="1">
+          <a:gsLst>
+            <a:gs pos="0">
+              <a:schemeClr val="phClr">
+                <a:tint val="80000"/>
+                <a:satMod val="300000"/>
+              </a:schemeClr>
+            </a:gs>
+            <a:gs pos="100000">
+              <a:schemeClr val="phClr">
+                <a:shade val="30000"/>
+                <a:satMod val="200000"/>
+              </a:schemeClr>
+            </a:gs>
+          </a:gsLst>
+          <a:path path="circle">
+            <a:fillToRect l="50000" t="50000" r="50000" b="50000"/>
+          </a:path>
+        </a:gradFill>
+      </a:bgFillStyleLst>
+    </a:fmtScheme>
+  </a:themeElements>
+  <a:objectDefaults>
+    <a:spDef>
+      <a:spPr/>
+      <a:bodyPr/>
+      <a:lstStyle/>
+      <a:style>
+        <a:lnRef idx="1">
+          <a:schemeClr val="accent1"/>
+        </a:lnRef>
+        <a:fillRef idx="3">
+          <a:schemeClr val="accent1"/>
+        </a:fillRef>
+        <a:effectRef idx="2">
+          <a:schemeClr val="accent1"/>
+        </a:effectRef>
+        <a:fontRef idx="minor">
+          <a:schemeClr val="lt1"/>
+        </a:fontRef>
+      </a:style>
+    </a:spDef>
+    <a:lnDef>
+      <a:spPr/>
+      <a:bodyPr/>
+      <a:lstStyle/>
+      <a:style>
+        <a:lnRef idx="2">
+          <a:schemeClr val="accent1"/>
+        </a:lnRef>
+        <a:fillRef idx="0">
+          <a:schemeClr val="accent1"/>
+        </a:fillRef>
+        <a:effectRef idx="1">
+          <a:schemeClr val="accent1"/>
+        </a:effectRef>
+        <a:fontRef idx="minor">
+          <a:schemeClr val="tx1"/>
+        </a:fontRef>
+      </a:style>
+    </a:lnDef>
+  </a:objectDefaults>
+  <a:extraClrSchemeLst/>
+</a:theme>
 </file>
--- a/presentation/AfterVisit.pptx
+++ b/presentation/AfterVisit.pptx
@@ -10,6 +10,7 @@
     <p:sldId id="258" r:id="rId9"/>
     <p:sldId id="259" r:id="rId10"/>
     <p:sldId id="260" r:id="rId11"/>
+    <p:sldId id="261" r:id="rId12"/>
   </p:sldIdLst>
   <p:sldSz cx="12191695" cy="6858000" type="screen4x3"/>
   <p:notesSz cx="6858000" cy="9144000"/>
@@ -576,7 +577,7 @@
           <a:lstStyle/>
           <a:p>
             <a:r>
-              <a:t>Set up the operational pain: 30 minutes per meeting times 10 meetings per week is hours of repetitive work where quality and compliance both suffer. Then introduce the approach in one line: rather than one LLM call doing everything, a decomposed pipeline with the right model for each stage. Move to architecture.</a:t>
+              <a:t>Set up the operational pain: 30 minutes per meeting times 10 meetings per week is hours of repetitive work where quality and compliance both suffer. Then introduce the approach in one line: rather than one LLM call doing everything, a decomposed pipeline with the right model for each stage. Move to the demo, then we'll dig into how it works inside.</a:t>
             </a:r>
           </a:p>
         </p:txBody>
@@ -716,7 +717,7 @@
           <a:lstStyle/>
           <a:p>
             <a:r>
-              <a:t>Three conditions, fifteen test cases. Baseline A is a single LLM call, no schema, no skill, no redaction. Baseline B is the full pipeline with three fixed exemplars. AfterVisit is the full pipeline with skill routing. LLM judge, validated against hand scores on five cases. Read the table top to bottom.</a:t>
+              <a:t>Quick look at the system in action. Bullets and metadata go in on the left. The note appears as JSON on the left of the output panel, the thank-you email on the right, with the references the skill loaded shown below the email. Human approves with a checkbox, the entry files to mock Salesforce, and the activity log shows the new row. About fifteen seconds on this slide; the architecture and findings are where the substance is.</a:t>
             </a:r>
           </a:p>
         </p:txBody>
@@ -742,6 +743,76 @@
 </file>
 
 <file path=ppt/notesSlides/notesSlide5.xml><?xml version="1.0" encoding="utf-8"?>
+<p:notes xmlns:a="http://schemas.openxmlformats.org/drawingml/2006/main" xmlns:p="http://schemas.openxmlformats.org/presentationml/2006/main" xmlns:r="http://schemas.openxmlformats.org/officeDocument/2006/relationships">
+  <p:cSld>
+    <p:spTree>
+      <p:nvGrpSpPr>
+        <p:cNvPr id="1" name=""/>
+        <p:cNvGrpSpPr/>
+        <p:nvPr/>
+      </p:nvGrpSpPr>
+      <p:grpSpPr>
+        <a:xfrm>
+          <a:off x="0" y="0"/>
+          <a:ext cx="0" cy="0"/>
+          <a:chOff x="0" y="0"/>
+          <a:chExt cx="0" cy="0"/>
+        </a:xfrm>
+      </p:grpSpPr>
+      <p:sp>
+        <p:nvSpPr>
+          <p:cNvPr id="2" name="Slide Image Placeholder 1"/>
+          <p:cNvSpPr>
+            <a:spLocks noGrp="1"/>
+          </p:cNvSpPr>
+          <p:nvPr>
+            <p:ph type="sldImg" idx="2"/>
+          </p:nvPr>
+        </p:nvSpPr>
+        <p:spPr/>
+      </p:sp>
+      <p:sp>
+        <p:nvSpPr>
+          <p:cNvPr id="3" name="Notes Placeholder 2"/>
+          <p:cNvSpPr>
+            <a:spLocks noGrp="1"/>
+          </p:cNvSpPr>
+          <p:nvPr>
+            <p:ph type="body" idx="3" sz="quarter"/>
+          </p:nvPr>
+        </p:nvSpPr>
+        <p:spPr/>
+        <p:txBody>
+          <a:bodyPr/>
+          <a:lstStyle/>
+          <a:p>
+            <a:r>
+              <a:t>Three conditions, fifteen test cases. Baseline A is a single LLM call, no schema, no skill, no redaction. Baseline B is the full pipeline with three fixed exemplars. AfterVisit is the full pipeline with skill routing. LLM judge, validated against hand scores on five cases. Read the table top to bottom.</a:t>
+            </a:r>
+          </a:p>
+        </p:txBody>
+      </p:sp>
+      <p:sp>
+        <p:nvSpPr>
+          <p:cNvPr id="4" name="Slide Number Placeholder 3"/>
+          <p:cNvSpPr>
+            <a:spLocks noGrp="1"/>
+          </p:cNvSpPr>
+          <p:nvPr>
+            <p:ph type="sldNum" idx="5" sz="quarter"/>
+          </p:nvPr>
+        </p:nvSpPr>
+        <p:spPr/>
+      </p:sp>
+    </p:spTree>
+  </p:cSld>
+  <p:clrMapOvr>
+    <a:masterClrMapping/>
+  </p:clrMapOvr>
+</p:notes>
+</file>
+
+<file path=ppt/notesSlides/notesSlide6.xml><?xml version="1.0" encoding="utf-8"?>
 <p:notes xmlns:a="http://schemas.openxmlformats.org/drawingml/2006/main" xmlns:p="http://schemas.openxmlformats.org/presentationml/2006/main" xmlns:r="http://schemas.openxmlformats.org/officeDocument/2006/relationships">
   <p:cSld>
     <p:spTree>
@@ -4049,7 +4120,7 @@
                 </a:solidFill>
                 <a:latin typeface="Calibri"/>
               </a:rPr>
-              <a:t>2 / 5</a:t>
+              <a:t>2 / 6</a:t>
             </a:r>
           </a:p>
         </p:txBody>
@@ -4859,7 +4930,7 @@
                 </a:solidFill>
                 <a:latin typeface="Calibri"/>
               </a:rPr>
-              <a:t>3 / 5</a:t>
+              <a:t>3 / 6</a:t>
             </a:r>
           </a:p>
         </p:txBody>
@@ -4873,6 +4944,271 @@
 </file>
 
 <file path=ppt/slides/slide4.xml><?xml version="1.0" encoding="utf-8"?>
+<p:sld xmlns:a="http://schemas.openxmlformats.org/drawingml/2006/main" xmlns:p="http://schemas.openxmlformats.org/presentationml/2006/main" xmlns:r="http://schemas.openxmlformats.org/officeDocument/2006/relationships">
+  <p:cSld>
+    <p:spTree>
+      <p:nvGrpSpPr>
+        <p:cNvPr id="1" name=""/>
+        <p:cNvGrpSpPr/>
+        <p:nvPr/>
+      </p:nvGrpSpPr>
+      <p:grpSpPr/>
+      <p:sp>
+        <p:nvSpPr>
+          <p:cNvPr id="2" name="TextBox 1"/>
+          <p:cNvSpPr txBox="1"/>
+          <p:nvPr/>
+        </p:nvSpPr>
+        <p:spPr>
+          <a:xfrm>
+            <a:off x="640080" y="411480"/>
+            <a:ext cx="10911535" cy="640080"/>
+          </a:xfrm>
+          <a:prstGeom prst="rect">
+            <a:avLst/>
+          </a:prstGeom>
+          <a:noFill/>
+        </p:spPr>
+        <p:txBody>
+          <a:bodyPr wrap="square" lIns="0" rIns="0" tIns="0" bIns="0" anchor="t">
+            <a:spAutoFit/>
+          </a:bodyPr>
+          <a:lstStyle/>
+          <a:p>
+            <a:pPr algn="l"/>
+            <a:r>
+              <a:rPr sz="3400" b="1">
+                <a:solidFill>
+                  <a:srgbClr val="1F3A5F"/>
+                </a:solidFill>
+                <a:latin typeface="Calibri"/>
+              </a:rPr>
+              <a:t>The system in action</a:t>
+            </a:r>
+          </a:p>
+        </p:txBody>
+      </p:sp>
+      <p:pic>
+        <p:nvPicPr>
+          <p:cNvPr id="3" name="Picture 2" descr="01_form.png"/>
+          <p:cNvPicPr>
+            <a:picLocks noChangeAspect="1"/>
+          </p:cNvPicPr>
+          <p:nvPr/>
+        </p:nvPicPr>
+        <p:blipFill>
+          <a:blip r:embed="rId2"/>
+          <a:stretch>
+            <a:fillRect/>
+          </a:stretch>
+        </p:blipFill>
+        <p:spPr>
+          <a:xfrm>
+            <a:off x="335127" y="1554480"/>
+            <a:ext cx="3657600" cy="1898056"/>
+          </a:xfrm>
+          <a:prstGeom prst="rect">
+            <a:avLst/>
+          </a:prstGeom>
+        </p:spPr>
+      </p:pic>
+      <p:sp>
+        <p:nvSpPr>
+          <p:cNvPr id="4" name="TextBox 3"/>
+          <p:cNvSpPr txBox="1"/>
+          <p:nvPr/>
+        </p:nvSpPr>
+        <p:spPr>
+          <a:xfrm>
+            <a:off x="335127" y="3657600"/>
+            <a:ext cx="3657600" cy="548640"/>
+          </a:xfrm>
+          <a:prstGeom prst="rect">
+            <a:avLst/>
+          </a:prstGeom>
+          <a:noFill/>
+        </p:spPr>
+        <p:txBody>
+          <a:bodyPr wrap="square" lIns="0" rIns="0" tIns="0" bIns="0" anchor="t">
+            <a:spAutoFit/>
+          </a:bodyPr>
+          <a:lstStyle/>
+          <a:p>
+            <a:pPr algn="ctr"/>
+            <a:r>
+              <a:rPr sz="1100" b="0">
+                <a:solidFill>
+                  <a:srgbClr val="475569"/>
+                </a:solidFill>
+                <a:latin typeface="Calibri"/>
+              </a:rPr>
+              <a:t>Form: bullets, donor segment, meeting type</a:t>
+            </a:r>
+          </a:p>
+        </p:txBody>
+      </p:sp>
+      <p:pic>
+        <p:nvPicPr>
+          <p:cNvPr id="5" name="Picture 4" descr="02_outputs.png"/>
+          <p:cNvPicPr>
+            <a:picLocks noChangeAspect="1"/>
+          </p:cNvPicPr>
+          <p:nvPr/>
+        </p:nvPicPr>
+        <p:blipFill>
+          <a:blip r:embed="rId3"/>
+          <a:stretch>
+            <a:fillRect/>
+          </a:stretch>
+        </p:blipFill>
+        <p:spPr>
+          <a:xfrm>
+            <a:off x="4267047" y="1554480"/>
+            <a:ext cx="3657600" cy="1317219"/>
+          </a:xfrm>
+          <a:prstGeom prst="rect">
+            <a:avLst/>
+          </a:prstGeom>
+        </p:spPr>
+      </p:pic>
+      <p:sp>
+        <p:nvSpPr>
+          <p:cNvPr id="6" name="TextBox 5"/>
+          <p:cNvSpPr txBox="1"/>
+          <p:nvPr/>
+        </p:nvSpPr>
+        <p:spPr>
+          <a:xfrm>
+            <a:off x="4267047" y="3657600"/>
+            <a:ext cx="3657600" cy="548640"/>
+          </a:xfrm>
+          <a:prstGeom prst="rect">
+            <a:avLst/>
+          </a:prstGeom>
+          <a:noFill/>
+        </p:spPr>
+        <p:txBody>
+          <a:bodyPr wrap="square" lIns="0" rIns="0" tIns="0" bIns="0" anchor="t">
+            <a:spAutoFit/>
+          </a:bodyPr>
+          <a:lstStyle/>
+          <a:p>
+            <a:pPr algn="ctr"/>
+            <a:r>
+              <a:rPr sz="1100" b="0">
+                <a:solidFill>
+                  <a:srgbClr val="475569"/>
+                </a:solidFill>
+                <a:latin typeface="Calibri"/>
+              </a:rPr>
+              <a:t>Outputs: schema-valid note + voice-anchored email + refs used</a:t>
+            </a:r>
+          </a:p>
+        </p:txBody>
+      </p:sp>
+      <p:pic>
+        <p:nvPicPr>
+          <p:cNvPr id="7" name="Picture 6" descr="03_filed.png"/>
+          <p:cNvPicPr>
+            <a:picLocks noChangeAspect="1"/>
+          </p:cNvPicPr>
+          <p:nvPr/>
+        </p:nvPicPr>
+        <p:blipFill>
+          <a:blip r:embed="rId4"/>
+          <a:stretch>
+            <a:fillRect/>
+          </a:stretch>
+        </p:blipFill>
+        <p:spPr>
+          <a:xfrm>
+            <a:off x="8198967" y="1554480"/>
+            <a:ext cx="3657600" cy="1719573"/>
+          </a:xfrm>
+          <a:prstGeom prst="rect">
+            <a:avLst/>
+          </a:prstGeom>
+        </p:spPr>
+      </p:pic>
+      <p:sp>
+        <p:nvSpPr>
+          <p:cNvPr id="8" name="TextBox 7"/>
+          <p:cNvSpPr txBox="1"/>
+          <p:nvPr/>
+        </p:nvSpPr>
+        <p:spPr>
+          <a:xfrm>
+            <a:off x="8198967" y="3657600"/>
+            <a:ext cx="3657600" cy="548640"/>
+          </a:xfrm>
+          <a:prstGeom prst="rect">
+            <a:avLst/>
+          </a:prstGeom>
+          <a:noFill/>
+        </p:spPr>
+        <p:txBody>
+          <a:bodyPr wrap="square" lIns="0" rIns="0" tIns="0" bIns="0" anchor="t">
+            <a:spAutoFit/>
+          </a:bodyPr>
+          <a:lstStyle/>
+          <a:p>
+            <a:pPr algn="ctr"/>
+            <a:r>
+              <a:rPr sz="1100" b="0">
+                <a:solidFill>
+                  <a:srgbClr val="475569"/>
+                </a:solidFill>
+                <a:latin typeface="Calibri"/>
+              </a:rPr>
+              <a:t>Filed: approved entry in the mock Salesforce log</a:t>
+            </a:r>
+          </a:p>
+        </p:txBody>
+      </p:sp>
+      <p:sp>
+        <p:nvSpPr>
+          <p:cNvPr id="9" name="TextBox 8"/>
+          <p:cNvSpPr txBox="1"/>
+          <p:nvPr/>
+        </p:nvSpPr>
+        <p:spPr>
+          <a:xfrm>
+            <a:off x="11094415" y="6446520"/>
+            <a:ext cx="914400" cy="274320"/>
+          </a:xfrm>
+          <a:prstGeom prst="rect">
+            <a:avLst/>
+          </a:prstGeom>
+          <a:noFill/>
+        </p:spPr>
+        <p:txBody>
+          <a:bodyPr wrap="square" lIns="0" rIns="0" tIns="0" bIns="0" anchor="t">
+            <a:spAutoFit/>
+          </a:bodyPr>
+          <a:lstStyle/>
+          <a:p>
+            <a:pPr algn="r"/>
+            <a:r>
+              <a:rPr sz="1000" b="0">
+                <a:solidFill>
+                  <a:srgbClr val="475569"/>
+                </a:solidFill>
+                <a:latin typeface="Calibri"/>
+              </a:rPr>
+              <a:t>4 / 6</a:t>
+            </a:r>
+          </a:p>
+        </p:txBody>
+      </p:sp>
+    </p:spTree>
+  </p:cSld>
+  <p:clrMapOvr>
+    <a:masterClrMapping/>
+  </p:clrMapOvr>
+</p:sld>
+</file>
+
+<file path=ppt/slides/slide5.xml><?xml version="1.0" encoding="utf-8"?>
 <p:sld xmlns:a="http://schemas.openxmlformats.org/drawingml/2006/main" xmlns:p="http://schemas.openxmlformats.org/presentationml/2006/main" xmlns:r="http://schemas.openxmlformats.org/officeDocument/2006/relationships">
   <p:cSld>
     <p:spTree>
@@ -5513,7 +5849,7 @@
                 </a:solidFill>
                 <a:latin typeface="Calibri"/>
               </a:rPr>
-              <a:t>4 / 5</a:t>
+              <a:t>5 / 6</a:t>
             </a:r>
           </a:p>
         </p:txBody>
@@ -5526,7 +5862,7 @@
 </p:sld>
 </file>
 
-<file path=ppt/slides/slide5.xml><?xml version="1.0" encoding="utf-8"?>
+<file path=ppt/slides/slide6.xml><?xml version="1.0" encoding="utf-8"?>
 <p:sld xmlns:a="http://schemas.openxmlformats.org/drawingml/2006/main" xmlns:p="http://schemas.openxmlformats.org/presentationml/2006/main" xmlns:r="http://schemas.openxmlformats.org/officeDocument/2006/relationships">
   <p:cSld>
     <p:spTree>
@@ -5765,7 +6101,7 @@
                 </a:solidFill>
                 <a:latin typeface="Calibri"/>
               </a:rPr>
-              <a:t>5 / 5</a:t>
+              <a:t>6 / 6</a:t>
             </a:r>
           </a:p>
         </p:txBody>

--- a/presentation/AfterVisit.pptx
+++ b/presentation/AfterVisit.pptx
@@ -4988,30 +4988,6 @@
           </a:p>
         </p:txBody>
       </p:sp>
-      <p:pic>
-        <p:nvPicPr>
-          <p:cNvPr id="3" name="Picture 2" descr="01_form.png"/>
-          <p:cNvPicPr>
-            <a:picLocks noChangeAspect="1"/>
-          </p:cNvPicPr>
-          <p:nvPr/>
-        </p:nvPicPr>
-        <p:blipFill>
-          <a:blip r:embed="rId2"/>
-          <a:stretch>
-            <a:fillRect/>
-          </a:stretch>
-        </p:blipFill>
-        <p:spPr>
-          <a:xfrm>
-            <a:off x="335127" y="1554480"/>
-            <a:ext cx="3657600" cy="1898056"/>
-          </a:xfrm>
-          <a:prstGeom prst="rect">
-            <a:avLst/>
-          </a:prstGeom>
-        </p:spPr>
-      </p:pic>
       <p:sp>
         <p:nvSpPr>
           <p:cNvPr id="4" name="TextBox 3"/>
@@ -5047,30 +5023,6 @@
           </a:p>
         </p:txBody>
       </p:sp>
-      <p:pic>
-        <p:nvPicPr>
-          <p:cNvPr id="5" name="Picture 4" descr="02_outputs.png"/>
-          <p:cNvPicPr>
-            <a:picLocks noChangeAspect="1"/>
-          </p:cNvPicPr>
-          <p:nvPr/>
-        </p:nvPicPr>
-        <p:blipFill>
-          <a:blip r:embed="rId3"/>
-          <a:stretch>
-            <a:fillRect/>
-          </a:stretch>
-        </p:blipFill>
-        <p:spPr>
-          <a:xfrm>
-            <a:off x="4267047" y="1554480"/>
-            <a:ext cx="3657600" cy="1317219"/>
-          </a:xfrm>
-          <a:prstGeom prst="rect">
-            <a:avLst/>
-          </a:prstGeom>
-        </p:spPr>
-      </p:pic>
       <p:sp>
         <p:nvSpPr>
           <p:cNvPr id="6" name="TextBox 5"/>
@@ -5106,30 +5058,6 @@
           </a:p>
         </p:txBody>
       </p:sp>
-      <p:pic>
-        <p:nvPicPr>
-          <p:cNvPr id="7" name="Picture 6" descr="03_filed.png"/>
-          <p:cNvPicPr>
-            <a:picLocks noChangeAspect="1"/>
-          </p:cNvPicPr>
-          <p:nvPr/>
-        </p:nvPicPr>
-        <p:blipFill>
-          <a:blip r:embed="rId4"/>
-          <a:stretch>
-            <a:fillRect/>
-          </a:stretch>
-        </p:blipFill>
-        <p:spPr>
-          <a:xfrm>
-            <a:off x="8198967" y="1554480"/>
-            <a:ext cx="3657600" cy="1719573"/>
-          </a:xfrm>
-          <a:prstGeom prst="rect">
-            <a:avLst/>
-          </a:prstGeom>
-        </p:spPr>
-      </p:pic>
       <p:sp>
         <p:nvSpPr>
           <p:cNvPr id="8" name="TextBox 7"/>
@@ -5200,6 +5128,78 @@
           </a:p>
         </p:txBody>
       </p:sp>
+      <p:pic>
+        <p:nvPicPr>
+          <p:cNvPr id="10" name="Picture 9" descr="01_form.png"/>
+          <p:cNvPicPr>
+            <a:picLocks noChangeAspect="1"/>
+          </p:cNvPicPr>
+          <p:nvPr/>
+        </p:nvPicPr>
+        <p:blipFill>
+          <a:blip r:embed="rId6"/>
+          <a:stretch>
+            <a:fillRect/>
+          </a:stretch>
+        </p:blipFill>
+        <p:spPr>
+          <a:xfrm>
+            <a:off x="335127" y="1554480"/>
+            <a:ext cx="3657600" cy="1941963"/>
+          </a:xfrm>
+          <a:prstGeom prst="rect">
+            <a:avLst/>
+          </a:prstGeom>
+        </p:spPr>
+      </p:pic>
+      <p:pic>
+        <p:nvPicPr>
+          <p:cNvPr id="11" name="Picture 10" descr="02_outputs.png"/>
+          <p:cNvPicPr>
+            <a:picLocks noChangeAspect="1"/>
+          </p:cNvPicPr>
+          <p:nvPr/>
+        </p:nvPicPr>
+        <p:blipFill>
+          <a:blip r:embed="rId7"/>
+          <a:stretch>
+            <a:fillRect/>
+          </a:stretch>
+        </p:blipFill>
+        <p:spPr>
+          <a:xfrm>
+            <a:off x="4267047" y="1554480"/>
+            <a:ext cx="3657600" cy="2025630"/>
+          </a:xfrm>
+          <a:prstGeom prst="rect">
+            <a:avLst/>
+          </a:prstGeom>
+        </p:spPr>
+      </p:pic>
+      <p:pic>
+        <p:nvPicPr>
+          <p:cNvPr id="12" name="Picture 11" descr="03_filed.png"/>
+          <p:cNvPicPr>
+            <a:picLocks noChangeAspect="1"/>
+          </p:cNvPicPr>
+          <p:nvPr/>
+        </p:nvPicPr>
+        <p:blipFill>
+          <a:blip r:embed="rId8"/>
+          <a:stretch>
+            <a:fillRect/>
+          </a:stretch>
+        </p:blipFill>
+        <p:spPr>
+          <a:xfrm>
+            <a:off x="8198967" y="1554480"/>
+            <a:ext cx="3657600" cy="850382"/>
+          </a:xfrm>
+          <a:prstGeom prst="rect">
+            <a:avLst/>
+          </a:prstGeom>
+        </p:spPr>
+      </p:pic>
     </p:spTree>
   </p:cSld>
   <p:clrMapOvr>

--- a/presentation/AfterVisit.pptx
+++ b/presentation/AfterVisit.pptx
@@ -3865,41 +3865,6 @@
       <p:grpSpPr/>
       <p:sp>
         <p:nvSpPr>
-          <p:cNvPr id="2" name="TextBox 1"/>
-          <p:cNvSpPr txBox="1"/>
-          <p:nvPr/>
-        </p:nvSpPr>
-        <p:spPr>
-          <a:xfrm>
-            <a:off x="640080" y="2377440"/>
-            <a:ext cx="10911535" cy="1280160"/>
-          </a:xfrm>
-          <a:prstGeom prst="rect">
-            <a:avLst/>
-          </a:prstGeom>
-          <a:noFill/>
-        </p:spPr>
-        <p:txBody>
-          <a:bodyPr wrap="square" lIns="0" rIns="0" tIns="0" bIns="0" anchor="t">
-            <a:spAutoFit/>
-          </a:bodyPr>
-          <a:lstStyle/>
-          <a:p>
-            <a:pPr algn="l"/>
-            <a:r>
-              <a:rPr sz="7200" b="1">
-                <a:solidFill>
-                  <a:srgbClr val="1F3A5F"/>
-                </a:solidFill>
-                <a:latin typeface="Calibri"/>
-              </a:rPr>
-              <a:t>AfterVisit</a:t>
-            </a:r>
-          </a:p>
-        </p:txBody>
-      </p:sp>
-      <p:sp>
-        <p:nvSpPr>
           <p:cNvPr id="3" name="TextBox 2"/>
           <p:cNvSpPr txBox="1"/>
           <p:nvPr/>
@@ -3968,6 +3933,30 @@
           </a:p>
         </p:txBody>
       </p:sp>
+      <p:pic>
+        <p:nvPicPr>
+          <p:cNvPr id="5" name="Picture 4" descr="logo.png"/>
+          <p:cNvPicPr>
+            <a:picLocks noChangeAspect="1"/>
+          </p:cNvPicPr>
+          <p:nvPr/>
+        </p:nvPicPr>
+        <p:blipFill>
+          <a:blip r:embed="rId3"/>
+          <a:stretch>
+            <a:fillRect/>
+          </a:stretch>
+        </p:blipFill>
+        <p:spPr>
+          <a:xfrm>
+            <a:off x="3809847" y="2377440"/>
+            <a:ext cx="4572000" cy="1192696"/>
+          </a:xfrm>
+          <a:prstGeom prst="rect">
+            <a:avLst/>
+          </a:prstGeom>
+        </p:spPr>
+      </p:pic>
     </p:spTree>
   </p:cSld>
   <p:clrMapOvr>

--- a/presentation/AfterVisit.pptx
+++ b/presentation/AfterVisit.pptx
@@ -4,15 +4,20 @@
   <p:sldMasterIdLst>
     <p:sldMasterId id="2147483648" r:id="rId1"/>
   </p:sldMasterIdLst>
+  <p:notesMasterIdLst>
+    <p:notesMasterId r:id="rId10"/>
+  </p:notesMasterIdLst>
   <p:sldIdLst>
-    <p:sldId id="256" r:id="rId7"/>
-    <p:sldId id="257" r:id="rId8"/>
-    <p:sldId id="258" r:id="rId9"/>
-    <p:sldId id="259" r:id="rId10"/>
-    <p:sldId id="260" r:id="rId11"/>
-    <p:sldId id="261" r:id="rId12"/>
+    <p:sldId id="256" r:id="rId2"/>
+    <p:sldId id="257" r:id="rId3"/>
+    <p:sldId id="258" r:id="rId4"/>
+    <p:sldId id="259" r:id="rId5"/>
+    <p:sldId id="262" r:id="rId6"/>
+    <p:sldId id="263" r:id="rId7"/>
+    <p:sldId id="260" r:id="rId8"/>
+    <p:sldId id="261" r:id="rId9"/>
   </p:sldIdLst>
-  <p:sldSz cx="12191695" cy="6858000" type="screen4x3"/>
+  <p:sldSz cx="12192000" cy="6858000"/>
   <p:notesSz cx="6858000" cy="9144000"/>
   <p:defaultTextStyle>
     <a:defPPr>
@@ -109,11 +114,27 @@
       </a:defRPr>
     </a:lvl9pPr>
   </p:defaultTextStyle>
+  <p:extLst>
+    <p:ext uri="{EFAFB233-063F-42B5-8137-9DF3F51BA10A}">
+      <p15:sldGuideLst xmlns:p15="http://schemas.microsoft.com/office/powerpoint/2012/main">
+        <p15:guide id="1" orient="horz" pos="2160">
+          <p15:clr>
+            <a:srgbClr val="A4A3A4"/>
+          </p15:clr>
+        </p15:guide>
+        <p15:guide id="2" pos="2880">
+          <p15:clr>
+            <a:srgbClr val="A4A3A4"/>
+          </p15:clr>
+        </p15:guide>
+      </p15:sldGuideLst>
+    </p:ext>
+  </p:extLst>
 </p:presentation>
 </file>
 
 <file path=ppt/notesMasters/notesMaster1.xml><?xml version="1.0" encoding="utf-8"?>
-<p:notesMaster xmlns:a="http://schemas.openxmlformats.org/drawingml/2006/main" xmlns:p="http://schemas.openxmlformats.org/presentationml/2006/main" xmlns:r="http://schemas.openxmlformats.org/officeDocument/2006/relationships">
+<p:notesMaster xmlns:a="http://schemas.openxmlformats.org/drawingml/2006/main" xmlns:r="http://schemas.openxmlformats.org/officeDocument/2006/relationships" xmlns:p="http://schemas.openxmlformats.org/presentationml/2006/main">
   <p:cSld>
     <p:bg>
       <p:bgRef idx="1001">
@@ -134,241 +155,16 @@
           <a:chExt cx="0" cy="0"/>
         </a:xfrm>
       </p:grpSpPr>
-      <p:sp>
-        <p:nvSpPr>
-          <p:cNvPr id="2" name="Header Placeholder 1"/>
-          <p:cNvSpPr>
-            <a:spLocks noGrp="1"/>
-          </p:cNvSpPr>
-          <p:nvPr>
-            <p:ph type="hdr" sz="quarter"/>
-          </p:nvPr>
-        </p:nvSpPr>
-        <p:spPr>
-          <a:xfrm>
-            <a:off x="0" y="0"/>
-            <a:ext cx="2971800" cy="457200"/>
-          </a:xfrm>
-          <a:prstGeom prst="rect">
-            <a:avLst/>
-          </a:prstGeom>
-        </p:spPr>
-        <p:txBody>
-          <a:bodyPr vert="horz" lIns="91440" tIns="45720" rIns="91440" bIns="45720" rtlCol="0"/>
-          <a:lstStyle>
-            <a:lvl1pPr algn="l">
-              <a:defRPr sz="1200"/>
-            </a:lvl1pPr>
-          </a:lstStyle>
-          <a:p>
-            <a:endParaRPr lang="en-US"/>
-          </a:p>
-        </p:txBody>
-      </p:sp>
-      <p:sp>
-        <p:nvSpPr>
-          <p:cNvPr id="3" name="Date Placeholder 2"/>
-          <p:cNvSpPr>
-            <a:spLocks noGrp="1"/>
-          </p:cNvSpPr>
-          <p:nvPr>
-            <p:ph type="dt" idx="1"/>
-          </p:nvPr>
-        </p:nvSpPr>
-        <p:spPr>
-          <a:xfrm>
-            <a:off x="3884613" y="0"/>
-            <a:ext cx="2971800" cy="457200"/>
-          </a:xfrm>
-          <a:prstGeom prst="rect">
-            <a:avLst/>
-          </a:prstGeom>
-        </p:spPr>
-        <p:txBody>
-          <a:bodyPr vert="horz" lIns="91440" tIns="45720" rIns="91440" bIns="45720" rtlCol="0"/>
-          <a:lstStyle>
-            <a:lvl1pPr algn="r">
-              <a:defRPr sz="1200"/>
-            </a:lvl1pPr>
-          </a:lstStyle>
-          <a:p>
-            <a:fld id="{0F89C1C7-3DCD-1040-A9CF-14679D8B5DDD}" type="datetimeFigureOut">
-              <a:rPr lang="en-US" smtClean="0"/>
-              <a:t>10/17/16</a:t>
-            </a:fld>
-            <a:endParaRPr lang="en-US"/>
-          </a:p>
-        </p:txBody>
-      </p:sp>
-      <p:sp>
-        <p:nvSpPr>
-          <p:cNvPr id="4" name="Slide Image Placeholder 3"/>
-          <p:cNvSpPr>
-            <a:spLocks noGrp="1" noRot="1" noChangeAspect="1"/>
-          </p:cNvSpPr>
-          <p:nvPr>
-            <p:ph type="sldImg" idx="2"/>
-          </p:nvPr>
-        </p:nvSpPr>
-        <p:spPr>
-          <a:xfrm>
-            <a:off x="1143000" y="685800"/>
-            <a:ext cx="4572000" cy="3429000"/>
-          </a:xfrm>
-          <a:prstGeom prst="rect">
-            <a:avLst/>
-          </a:prstGeom>
-          <a:noFill/>
-          <a:ln w="12700">
-            <a:solidFill>
-              <a:prstClr val="black"/>
-            </a:solidFill>
-          </a:ln>
-        </p:spPr>
-        <p:txBody>
-          <a:bodyPr vert="horz" lIns="91440" tIns="45720" rIns="91440" bIns="45720" rtlCol="0" anchor="ctr"/>
-          <a:lstStyle/>
-          <a:p>
-            <a:endParaRPr lang="en-US"/>
-          </a:p>
-        </p:txBody>
-      </p:sp>
-      <p:sp>
-        <p:nvSpPr>
-          <p:cNvPr id="5" name="Notes Placeholder 4"/>
-          <p:cNvSpPr>
-            <a:spLocks noGrp="1"/>
-          </p:cNvSpPr>
-          <p:nvPr>
-            <p:ph type="body" sz="quarter" idx="3"/>
-          </p:nvPr>
-        </p:nvSpPr>
-        <p:spPr>
-          <a:xfrm>
-            <a:off x="685800" y="4343400"/>
-            <a:ext cx="5486400" cy="4114800"/>
-          </a:xfrm>
-          <a:prstGeom prst="rect">
-            <a:avLst/>
-          </a:prstGeom>
-        </p:spPr>
-        <p:txBody>
-          <a:bodyPr vert="horz" lIns="91440" tIns="45720" rIns="91440" bIns="45720" rtlCol="0"/>
-          <a:lstStyle/>
-          <a:p>
-            <a:pPr lvl="0"/>
-            <a:r>
-              <a:rPr lang="en-US" smtClean="0"/>
-              <a:t>Click to edit Master text styles</a:t>
-            </a:r>
-          </a:p>
-          <a:p>
-            <a:pPr lvl="1"/>
-            <a:r>
-              <a:rPr lang="en-US" smtClean="0"/>
-              <a:t>Second level</a:t>
-            </a:r>
-          </a:p>
-          <a:p>
-            <a:pPr lvl="2"/>
-            <a:r>
-              <a:rPr lang="en-US" smtClean="0"/>
-              <a:t>Third level</a:t>
-            </a:r>
-          </a:p>
-          <a:p>
-            <a:pPr lvl="3"/>
-            <a:r>
-              <a:rPr lang="en-US" smtClean="0"/>
-              <a:t>Fourth level</a:t>
-            </a:r>
-          </a:p>
-          <a:p>
-            <a:pPr lvl="4"/>
-            <a:r>
-              <a:rPr lang="en-US" smtClean="0"/>
-              <a:t>Fifth level</a:t>
-            </a:r>
-            <a:endParaRPr lang="en-US"/>
-          </a:p>
-        </p:txBody>
-      </p:sp>
-      <p:sp>
-        <p:nvSpPr>
-          <p:cNvPr id="6" name="Footer Placeholder 5"/>
-          <p:cNvSpPr>
-            <a:spLocks noGrp="1"/>
-          </p:cNvSpPr>
-          <p:nvPr>
-            <p:ph type="ftr" sz="quarter" idx="4"/>
-          </p:nvPr>
-        </p:nvSpPr>
-        <p:spPr>
-          <a:xfrm>
-            <a:off x="0" y="8685213"/>
-            <a:ext cx="2971800" cy="457200"/>
-          </a:xfrm>
-          <a:prstGeom prst="rect">
-            <a:avLst/>
-          </a:prstGeom>
-        </p:spPr>
-        <p:txBody>
-          <a:bodyPr vert="horz" lIns="91440" tIns="45720" rIns="91440" bIns="45720" rtlCol="0" anchor="b"/>
-          <a:lstStyle>
-            <a:lvl1pPr algn="l">
-              <a:defRPr sz="1200"/>
-            </a:lvl1pPr>
-          </a:lstStyle>
-          <a:p>
-            <a:endParaRPr lang="en-US"/>
-          </a:p>
-        </p:txBody>
-      </p:sp>
-      <p:sp>
-        <p:nvSpPr>
-          <p:cNvPr id="7" name="Slide Number Placeholder 6"/>
-          <p:cNvSpPr>
-            <a:spLocks noGrp="1"/>
-          </p:cNvSpPr>
-          <p:nvPr>
-            <p:ph type="sldNum" sz="quarter" idx="5"/>
-          </p:nvPr>
-        </p:nvSpPr>
-        <p:spPr>
-          <a:xfrm>
-            <a:off x="3884613" y="8685213"/>
-            <a:ext cx="2971800" cy="457200"/>
-          </a:xfrm>
-          <a:prstGeom prst="rect">
-            <a:avLst/>
-          </a:prstGeom>
-        </p:spPr>
-        <p:txBody>
-          <a:bodyPr vert="horz" lIns="91440" tIns="45720" rIns="91440" bIns="45720" rtlCol="0" anchor="b"/>
-          <a:lstStyle>
-            <a:lvl1pPr algn="r">
-              <a:defRPr sz="1200"/>
-            </a:lvl1pPr>
-          </a:lstStyle>
-          <a:p>
-            <a:fld id="{BB5E49A5-4136-284D-997B-48E1D791AD67}" type="slidenum">
-              <a:rPr lang="en-US" smtClean="0"/>
-              <a:t>‹#›</a:t>
-            </a:fld>
-            <a:endParaRPr lang="en-US"/>
-          </a:p>
-        </p:txBody>
-      </p:sp>
     </p:spTree>
     <p:extLst>
       <p:ext uri="{BB962C8B-B14F-4D97-AF65-F5344CB8AC3E}">
-        <p14:creationId xmlns:p14="http://schemas.microsoft.com/office/powerpoint/2010/main" val="2623252185"/>
+        <p14:creationId xmlns:p14="http://schemas.microsoft.com/office/powerpoint/2010/main" val="620841760"/>
       </p:ext>
     </p:extLst>
   </p:cSld>
   <p:clrMap bg1="lt1" tx1="dk1" bg2="lt2" tx2="dk2" accent1="accent1" accent2="accent2" accent3="accent3" accent4="accent4" accent5="accent5" accent6="accent6" hlink="hlink" folHlink="folHlink"/>
   <p:notesStyle>
-    <a:lvl1pPr marL="0" algn="l" defTabSz="457200" rtl="0" eaLnBrk="1" latinLnBrk="0" hangingPunct="1">
+    <a:lvl1pPr marL="0" algn="l" defTabSz="914400" rtl="0" eaLnBrk="1" latinLnBrk="0" hangingPunct="1">
       <a:defRPr sz="1200" kern="1200">
         <a:solidFill>
           <a:schemeClr val="tx1"/>
@@ -378,7 +174,7 @@
         <a:cs typeface="+mn-cs"/>
       </a:defRPr>
     </a:lvl1pPr>
-    <a:lvl2pPr marL="457200" algn="l" defTabSz="457200" rtl="0" eaLnBrk="1" latinLnBrk="0" hangingPunct="1">
+    <a:lvl2pPr marL="457200" algn="l" defTabSz="914400" rtl="0" eaLnBrk="1" latinLnBrk="0" hangingPunct="1">
       <a:defRPr sz="1200" kern="1200">
         <a:solidFill>
           <a:schemeClr val="tx1"/>
@@ -388,7 +184,7 @@
         <a:cs typeface="+mn-cs"/>
       </a:defRPr>
     </a:lvl2pPr>
-    <a:lvl3pPr marL="914400" algn="l" defTabSz="457200" rtl="0" eaLnBrk="1" latinLnBrk="0" hangingPunct="1">
+    <a:lvl3pPr marL="914400" algn="l" defTabSz="914400" rtl="0" eaLnBrk="1" latinLnBrk="0" hangingPunct="1">
       <a:defRPr sz="1200" kern="1200">
         <a:solidFill>
           <a:schemeClr val="tx1"/>
@@ -398,7 +194,7 @@
         <a:cs typeface="+mn-cs"/>
       </a:defRPr>
     </a:lvl3pPr>
-    <a:lvl4pPr marL="1371600" algn="l" defTabSz="457200" rtl="0" eaLnBrk="1" latinLnBrk="0" hangingPunct="1">
+    <a:lvl4pPr marL="1371600" algn="l" defTabSz="914400" rtl="0" eaLnBrk="1" latinLnBrk="0" hangingPunct="1">
       <a:defRPr sz="1200" kern="1200">
         <a:solidFill>
           <a:schemeClr val="tx1"/>
@@ -408,7 +204,7 @@
         <a:cs typeface="+mn-cs"/>
       </a:defRPr>
     </a:lvl4pPr>
-    <a:lvl5pPr marL="1828800" algn="l" defTabSz="457200" rtl="0" eaLnBrk="1" latinLnBrk="0" hangingPunct="1">
+    <a:lvl5pPr marL="1828800" algn="l" defTabSz="914400" rtl="0" eaLnBrk="1" latinLnBrk="0" hangingPunct="1">
       <a:defRPr sz="1200" kern="1200">
         <a:solidFill>
           <a:schemeClr val="tx1"/>
@@ -418,7 +214,7 @@
         <a:cs typeface="+mn-cs"/>
       </a:defRPr>
     </a:lvl5pPr>
-    <a:lvl6pPr marL="2286000" algn="l" defTabSz="457200" rtl="0" eaLnBrk="1" latinLnBrk="0" hangingPunct="1">
+    <a:lvl6pPr marL="2286000" algn="l" defTabSz="914400" rtl="0" eaLnBrk="1" latinLnBrk="0" hangingPunct="1">
       <a:defRPr sz="1200" kern="1200">
         <a:solidFill>
           <a:schemeClr val="tx1"/>
@@ -428,7 +224,7 @@
         <a:cs typeface="+mn-cs"/>
       </a:defRPr>
     </a:lvl6pPr>
-    <a:lvl7pPr marL="2743200" algn="l" defTabSz="457200" rtl="0" eaLnBrk="1" latinLnBrk="0" hangingPunct="1">
+    <a:lvl7pPr marL="2743200" algn="l" defTabSz="914400" rtl="0" eaLnBrk="1" latinLnBrk="0" hangingPunct="1">
       <a:defRPr sz="1200" kern="1200">
         <a:solidFill>
           <a:schemeClr val="tx1"/>
@@ -438,7 +234,7 @@
         <a:cs typeface="+mn-cs"/>
       </a:defRPr>
     </a:lvl7pPr>
-    <a:lvl8pPr marL="3200400" algn="l" defTabSz="457200" rtl="0" eaLnBrk="1" latinLnBrk="0" hangingPunct="1">
+    <a:lvl8pPr marL="3200400" algn="l" defTabSz="914400" rtl="0" eaLnBrk="1" latinLnBrk="0" hangingPunct="1">
       <a:defRPr sz="1200" kern="1200">
         <a:solidFill>
           <a:schemeClr val="tx1"/>
@@ -448,7 +244,7 @@
         <a:cs typeface="+mn-cs"/>
       </a:defRPr>
     </a:lvl8pPr>
-    <a:lvl9pPr marL="3657600" algn="l" defTabSz="457200" rtl="0" eaLnBrk="1" latinLnBrk="0" hangingPunct="1">
+    <a:lvl9pPr marL="3657600" algn="l" defTabSz="914400" rtl="0" eaLnBrk="1" latinLnBrk="0" hangingPunct="1">
       <a:defRPr sz="1200" kern="1200">
         <a:solidFill>
           <a:schemeClr val="tx1"/>
@@ -463,7 +259,7 @@
 </file>
 
 <file path=ppt/notesSlides/notesSlide1.xml><?xml version="1.0" encoding="utf-8"?>
-<p:notes xmlns:a="http://schemas.openxmlformats.org/drawingml/2006/main" xmlns:p="http://schemas.openxmlformats.org/presentationml/2006/main" xmlns:r="http://schemas.openxmlformats.org/officeDocument/2006/relationships">
+<p:notes xmlns:a="http://schemas.openxmlformats.org/drawingml/2006/main" xmlns:r="http://schemas.openxmlformats.org/officeDocument/2006/relationships" xmlns:p="http://schemas.openxmlformats.org/presentationml/2006/main">
   <p:cSld>
     <p:spTree>
       <p:nvGrpSpPr>
@@ -483,7 +279,7 @@
         <p:nvSpPr>
           <p:cNvPr id="2" name="Slide Image Placeholder 1"/>
           <p:cNvSpPr>
-            <a:spLocks noGrp="1"/>
+            <a:spLocks noGrp="1" noRot="1" noChangeAspect="1"/>
           </p:cNvSpPr>
           <p:nvPr>
             <p:ph type="sldImg" idx="2"/>
@@ -498,7 +294,7 @@
             <a:spLocks noGrp="1"/>
           </p:cNvSpPr>
           <p:nvPr>
-            <p:ph type="body" idx="3" sz="quarter"/>
+            <p:ph type="body" sz="quarter" idx="3"/>
           </p:nvPr>
         </p:nvSpPr>
         <p:spPr/>
@@ -507,8 +303,18 @@
           <a:lstStyle/>
           <a:p>
             <a:r>
-              <a:t>Open with the elevator pitch: "AfterVisit is a post-meeting assistant for major-gift fundraisers. Bullets in, Salesforce note plus thank-you email out, human approval before anything writes." One sentence on the problem, one on the approach. Move to slide 2.</a:t>
-            </a:r>
+              <a:rPr dirty="0" err="1"/>
+              <a:t>AfterVisit</a:t>
+            </a:r>
+            <a:r>
+              <a:rPr dirty="0"/>
+              <a:t> is a post-meeting assistant for major-gift fundraisers. Bullets in, Salesforce note plus thank-you email out, human approval before anything writes</a:t>
+            </a:r>
+            <a:r>
+              <a:rPr lang="en-US" dirty="0"/>
+              <a:t>.</a:t>
+            </a:r>
+            <a:endParaRPr dirty="0"/>
           </a:p>
         </p:txBody>
       </p:sp>
@@ -519,7 +325,7 @@
             <a:spLocks noGrp="1"/>
           </p:cNvSpPr>
           <p:nvPr>
-            <p:ph type="sldNum" idx="5" sz="quarter"/>
+            <p:ph type="sldNum" sz="quarter" idx="5"/>
           </p:nvPr>
         </p:nvSpPr>
         <p:spPr/>
@@ -533,7 +339,7 @@
 </file>
 
 <file path=ppt/notesSlides/notesSlide2.xml><?xml version="1.0" encoding="utf-8"?>
-<p:notes xmlns:a="http://schemas.openxmlformats.org/drawingml/2006/main" xmlns:p="http://schemas.openxmlformats.org/presentationml/2006/main" xmlns:r="http://schemas.openxmlformats.org/officeDocument/2006/relationships">
+<p:notes xmlns:a="http://schemas.openxmlformats.org/drawingml/2006/main" xmlns:r="http://schemas.openxmlformats.org/officeDocument/2006/relationships" xmlns:p="http://schemas.openxmlformats.org/presentationml/2006/main">
   <p:cSld>
     <p:spTree>
       <p:nvGrpSpPr>
@@ -553,7 +359,7 @@
         <p:nvSpPr>
           <p:cNvPr id="2" name="Slide Image Placeholder 1"/>
           <p:cNvSpPr>
-            <a:spLocks noGrp="1"/>
+            <a:spLocks noGrp="1" noRot="1" noChangeAspect="1"/>
           </p:cNvSpPr>
           <p:nvPr>
             <p:ph type="sldImg" idx="2"/>
@@ -568,7 +374,7 @@
             <a:spLocks noGrp="1"/>
           </p:cNvSpPr>
           <p:nvPr>
-            <p:ph type="body" idx="3" sz="quarter"/>
+            <p:ph type="body" sz="quarter" idx="3"/>
           </p:nvPr>
         </p:nvSpPr>
         <p:spPr/>
@@ -577,7 +383,16 @@
           <a:lstStyle/>
           <a:p>
             <a:r>
-              <a:t>Set up the operational pain: 30 minutes per meeting times 10 meetings per week is hours of repetitive work where quality and compliance both suffer. Then introduce the approach in one line: rather than one LLM call doing everything, a decomposed pipeline with the right model for each stage. Move to the demo, then we'll dig into how it works inside.</a:t>
+              <a:rPr dirty="0"/>
+              <a:t>30 minutes per meeting times 10 meetings per week is hours of repetitive work where quality and compliance both suffer. </a:t>
+            </a:r>
+            <a:r>
+              <a:rPr lang="en-US" dirty="0"/>
+              <a:t>Rather </a:t>
+            </a:r>
+            <a:r>
+              <a:rPr dirty="0"/>
+              <a:t>than one LLM call doing everything, a decomposed pipeline with the right model for each stage. </a:t>
             </a:r>
           </a:p>
         </p:txBody>
@@ -589,7 +404,7 @@
             <a:spLocks noGrp="1"/>
           </p:cNvSpPr>
           <p:nvPr>
-            <p:ph type="sldNum" idx="5" sz="quarter"/>
+            <p:ph type="sldNum" sz="quarter" idx="5"/>
           </p:nvPr>
         </p:nvSpPr>
         <p:spPr/>
@@ -603,7 +418,7 @@
 </file>
 
 <file path=ppt/notesSlides/notesSlide3.xml><?xml version="1.0" encoding="utf-8"?>
-<p:notes xmlns:a="http://schemas.openxmlformats.org/drawingml/2006/main" xmlns:p="http://schemas.openxmlformats.org/presentationml/2006/main" xmlns:r="http://schemas.openxmlformats.org/officeDocument/2006/relationships">
+<p:notes xmlns:a="http://schemas.openxmlformats.org/drawingml/2006/main" xmlns:r="http://schemas.openxmlformats.org/officeDocument/2006/relationships" xmlns:p="http://schemas.openxmlformats.org/presentationml/2006/main">
   <p:cSld>
     <p:spTree>
       <p:nvGrpSpPr>
@@ -623,7 +438,7 @@
         <p:nvSpPr>
           <p:cNvPr id="2" name="Slide Image Placeholder 1"/>
           <p:cNvSpPr>
-            <a:spLocks noGrp="1"/>
+            <a:spLocks noGrp="1" noRot="1" noChangeAspect="1"/>
           </p:cNvSpPr>
           <p:nvPr>
             <p:ph type="sldImg" idx="2"/>
@@ -638,7 +453,7 @@
             <a:spLocks noGrp="1"/>
           </p:cNvSpPr>
           <p:nvPr>
-            <p:ph type="body" idx="3" sz="quarter"/>
+            <p:ph type="body" sz="quarter" idx="3"/>
           </p:nvPr>
         </p:nvSpPr>
         <p:spPr/>
@@ -647,7 +462,16 @@
           <a:lstStyle/>
           <a:p>
             <a:r>
-              <a:t>This is the centerpiece. Walk left to right. Bullets, redact, note (Haiku because it's good at schema-extraction), email (Opus because voice matters), human gate. Mention the email-voice skill is fully portable: a folder of YAML-fronted markdown files. No vector store; at this corpus size, metadata routing is enough.</a:t>
+              <a:rPr dirty="0"/>
+              <a:t>Bullets, redact, note (Haiku because it's good at schema-extraction), email (Opus because voice matters), human gate. </a:t>
+            </a:r>
+            <a:r>
+              <a:rPr lang="en-US" dirty="0"/>
+              <a:t>T</a:t>
+            </a:r>
+            <a:r>
+              <a:rPr dirty="0"/>
+              <a:t>he email-voice skill is fully portable: a folder of YAML-fronted markdown files. No vector store; at this corpus size, metadata routing is enough.</a:t>
             </a:r>
           </a:p>
         </p:txBody>
@@ -659,7 +483,7 @@
             <a:spLocks noGrp="1"/>
           </p:cNvSpPr>
           <p:nvPr>
-            <p:ph type="sldNum" idx="5" sz="quarter"/>
+            <p:ph type="sldNum" sz="quarter" idx="5"/>
           </p:nvPr>
         </p:nvSpPr>
         <p:spPr/>
@@ -673,7 +497,7 @@
 </file>
 
 <file path=ppt/notesSlides/notesSlide4.xml><?xml version="1.0" encoding="utf-8"?>
-<p:notes xmlns:a="http://schemas.openxmlformats.org/drawingml/2006/main" xmlns:p="http://schemas.openxmlformats.org/presentationml/2006/main" xmlns:r="http://schemas.openxmlformats.org/officeDocument/2006/relationships">
+<p:notes xmlns:a="http://schemas.openxmlformats.org/drawingml/2006/main" xmlns:r="http://schemas.openxmlformats.org/officeDocument/2006/relationships" xmlns:p="http://schemas.openxmlformats.org/presentationml/2006/main">
   <p:cSld>
     <p:spTree>
       <p:nvGrpSpPr>
@@ -693,7 +517,7 @@
         <p:nvSpPr>
           <p:cNvPr id="2" name="Slide Image Placeholder 1"/>
           <p:cNvSpPr>
-            <a:spLocks noGrp="1"/>
+            <a:spLocks noGrp="1" noRot="1" noChangeAspect="1"/>
           </p:cNvSpPr>
           <p:nvPr>
             <p:ph type="sldImg" idx="2"/>
@@ -708,7 +532,7 @@
             <a:spLocks noGrp="1"/>
           </p:cNvSpPr>
           <p:nvPr>
-            <p:ph type="body" idx="3" sz="quarter"/>
+            <p:ph type="body" sz="quarter" idx="3"/>
           </p:nvPr>
         </p:nvSpPr>
         <p:spPr/>
@@ -717,7 +541,8 @@
           <a:lstStyle/>
           <a:p>
             <a:r>
-              <a:t>Quick look at the system in action. Bullets and metadata go in on the left. The note appears as JSON on the left of the output panel, the thank-you email on the right, with the references the skill loaded shown below the email. Human approves with a checkbox, the entry files to mock Salesforce, and the activity log shows the new row. About fifteen seconds on this slide; the architecture and findings are where the substance is.</a:t>
+              <a:rPr dirty="0"/>
+              <a:t>Quick look at the system in action. Bullets and metadata go in on the left.</a:t>
             </a:r>
           </a:p>
         </p:txBody>
@@ -729,7 +554,7 @@
             <a:spLocks noGrp="1"/>
           </p:cNvSpPr>
           <p:nvPr>
-            <p:ph type="sldNum" idx="5" sz="quarter"/>
+            <p:ph type="sldNum" sz="quarter" idx="5"/>
           </p:nvPr>
         </p:nvSpPr>
         <p:spPr/>
@@ -743,7 +568,212 @@
 </file>
 
 <file path=ppt/notesSlides/notesSlide5.xml><?xml version="1.0" encoding="utf-8"?>
-<p:notes xmlns:a="http://schemas.openxmlformats.org/drawingml/2006/main" xmlns:p="http://schemas.openxmlformats.org/presentationml/2006/main" xmlns:r="http://schemas.openxmlformats.org/officeDocument/2006/relationships">
+<p:notes xmlns:a="http://schemas.openxmlformats.org/drawingml/2006/main" xmlns:r="http://schemas.openxmlformats.org/officeDocument/2006/relationships" xmlns:p="http://schemas.openxmlformats.org/presentationml/2006/main">
+  <p:cSld>
+    <p:spTree>
+      <p:nvGrpSpPr>
+        <p:cNvPr id="1" name="">
+          <a:extLst>
+            <a:ext uri="{FF2B5EF4-FFF2-40B4-BE49-F238E27FC236}">
+              <a16:creationId xmlns:a16="http://schemas.microsoft.com/office/drawing/2014/main" id="{276BE2B3-47B5-6820-A269-71E7B61EE402}"/>
+            </a:ext>
+          </a:extLst>
+        </p:cNvPr>
+        <p:cNvGrpSpPr/>
+        <p:nvPr/>
+      </p:nvGrpSpPr>
+      <p:grpSpPr>
+        <a:xfrm>
+          <a:off x="0" y="0"/>
+          <a:ext cx="0" cy="0"/>
+          <a:chOff x="0" y="0"/>
+          <a:chExt cx="0" cy="0"/>
+        </a:xfrm>
+      </p:grpSpPr>
+      <p:sp>
+        <p:nvSpPr>
+          <p:cNvPr id="2" name="Slide Image Placeholder 1">
+            <a:extLst>
+              <a:ext uri="{FF2B5EF4-FFF2-40B4-BE49-F238E27FC236}">
+                <a16:creationId xmlns:a16="http://schemas.microsoft.com/office/drawing/2014/main" id="{023B33B9-706A-124E-1607-FE8F36AB478F}"/>
+              </a:ext>
+            </a:extLst>
+          </p:cNvPr>
+          <p:cNvSpPr>
+            <a:spLocks noGrp="1" noRot="1" noChangeAspect="1"/>
+          </p:cNvSpPr>
+          <p:nvPr>
+            <p:ph type="sldImg" idx="2"/>
+          </p:nvPr>
+        </p:nvSpPr>
+        <p:spPr/>
+      </p:sp>
+      <p:sp>
+        <p:nvSpPr>
+          <p:cNvPr id="3" name="Notes Placeholder 2">
+            <a:extLst>
+              <a:ext uri="{FF2B5EF4-FFF2-40B4-BE49-F238E27FC236}">
+                <a16:creationId xmlns:a16="http://schemas.microsoft.com/office/drawing/2014/main" id="{5599A385-0056-FDED-0F53-76E759B4266F}"/>
+              </a:ext>
+            </a:extLst>
+          </p:cNvPr>
+          <p:cNvSpPr>
+            <a:spLocks noGrp="1"/>
+          </p:cNvSpPr>
+          <p:nvPr>
+            <p:ph type="body" sz="quarter" idx="3"/>
+          </p:nvPr>
+        </p:nvSpPr>
+        <p:spPr/>
+        <p:txBody>
+          <a:bodyPr/>
+          <a:lstStyle/>
+          <a:p>
+            <a:r>
+              <a:rPr dirty="0"/>
+              <a:t>The note appears as JSON on the left of the output panel, the thank-you email on the right, with the references the skill loaded shown below the email. </a:t>
+            </a:r>
+            <a:r>
+              <a:rPr lang="en-US" dirty="0"/>
+              <a:t>It also flags sensitivity issues, and denotes whether the email passed cleanly or took a repeat pass.</a:t>
+            </a:r>
+            <a:endParaRPr dirty="0"/>
+          </a:p>
+        </p:txBody>
+      </p:sp>
+      <p:sp>
+        <p:nvSpPr>
+          <p:cNvPr id="4" name="Slide Number Placeholder 3">
+            <a:extLst>
+              <a:ext uri="{FF2B5EF4-FFF2-40B4-BE49-F238E27FC236}">
+                <a16:creationId xmlns:a16="http://schemas.microsoft.com/office/drawing/2014/main" id="{3772FCFB-FA18-B9B4-04E2-730F17B9A419}"/>
+              </a:ext>
+            </a:extLst>
+          </p:cNvPr>
+          <p:cNvSpPr>
+            <a:spLocks noGrp="1"/>
+          </p:cNvSpPr>
+          <p:nvPr>
+            <p:ph type="sldNum" sz="quarter" idx="5"/>
+          </p:nvPr>
+        </p:nvSpPr>
+        <p:spPr/>
+      </p:sp>
+    </p:spTree>
+    <p:extLst>
+      <p:ext uri="{BB962C8B-B14F-4D97-AF65-F5344CB8AC3E}">
+        <p14:creationId xmlns:p14="http://schemas.microsoft.com/office/powerpoint/2010/main" val="2390247897"/>
+      </p:ext>
+    </p:extLst>
+  </p:cSld>
+  <p:clrMapOvr>
+    <a:masterClrMapping/>
+  </p:clrMapOvr>
+</p:notes>
+</file>
+
+<file path=ppt/notesSlides/notesSlide6.xml><?xml version="1.0" encoding="utf-8"?>
+<p:notes xmlns:a="http://schemas.openxmlformats.org/drawingml/2006/main" xmlns:r="http://schemas.openxmlformats.org/officeDocument/2006/relationships" xmlns:p="http://schemas.openxmlformats.org/presentationml/2006/main">
+  <p:cSld>
+    <p:spTree>
+      <p:nvGrpSpPr>
+        <p:cNvPr id="1" name="">
+          <a:extLst>
+            <a:ext uri="{FF2B5EF4-FFF2-40B4-BE49-F238E27FC236}">
+              <a16:creationId xmlns:a16="http://schemas.microsoft.com/office/drawing/2014/main" id="{F8650644-E24D-A019-C7CC-B3D9EA299C31}"/>
+            </a:ext>
+          </a:extLst>
+        </p:cNvPr>
+        <p:cNvGrpSpPr/>
+        <p:nvPr/>
+      </p:nvGrpSpPr>
+      <p:grpSpPr>
+        <a:xfrm>
+          <a:off x="0" y="0"/>
+          <a:ext cx="0" cy="0"/>
+          <a:chOff x="0" y="0"/>
+          <a:chExt cx="0" cy="0"/>
+        </a:xfrm>
+      </p:grpSpPr>
+      <p:sp>
+        <p:nvSpPr>
+          <p:cNvPr id="2" name="Slide Image Placeholder 1">
+            <a:extLst>
+              <a:ext uri="{FF2B5EF4-FFF2-40B4-BE49-F238E27FC236}">
+                <a16:creationId xmlns:a16="http://schemas.microsoft.com/office/drawing/2014/main" id="{8B4647D1-282B-85A7-2D24-E5F402BC80F3}"/>
+              </a:ext>
+            </a:extLst>
+          </p:cNvPr>
+          <p:cNvSpPr>
+            <a:spLocks noGrp="1" noRot="1" noChangeAspect="1"/>
+          </p:cNvSpPr>
+          <p:nvPr>
+            <p:ph type="sldImg" idx="2"/>
+          </p:nvPr>
+        </p:nvSpPr>
+        <p:spPr/>
+      </p:sp>
+      <p:sp>
+        <p:nvSpPr>
+          <p:cNvPr id="3" name="Notes Placeholder 2">
+            <a:extLst>
+              <a:ext uri="{FF2B5EF4-FFF2-40B4-BE49-F238E27FC236}">
+                <a16:creationId xmlns:a16="http://schemas.microsoft.com/office/drawing/2014/main" id="{D0793C56-0FFB-8983-D1BF-BE7AF79B5189}"/>
+              </a:ext>
+            </a:extLst>
+          </p:cNvPr>
+          <p:cNvSpPr>
+            <a:spLocks noGrp="1"/>
+          </p:cNvSpPr>
+          <p:nvPr>
+            <p:ph type="body" sz="quarter" idx="3"/>
+          </p:nvPr>
+        </p:nvSpPr>
+        <p:spPr/>
+        <p:txBody>
+          <a:bodyPr/>
+          <a:lstStyle/>
+          <a:p>
+            <a:r>
+              <a:rPr dirty="0"/>
+              <a:t>Human approves with a checkbox, the entry files to mock Salesforce, and the activity log shows the new row.</a:t>
+            </a:r>
+          </a:p>
+        </p:txBody>
+      </p:sp>
+      <p:sp>
+        <p:nvSpPr>
+          <p:cNvPr id="4" name="Slide Number Placeholder 3">
+            <a:extLst>
+              <a:ext uri="{FF2B5EF4-FFF2-40B4-BE49-F238E27FC236}">
+                <a16:creationId xmlns:a16="http://schemas.microsoft.com/office/drawing/2014/main" id="{211F10AD-843B-7748-085F-E8FC0E36AC7D}"/>
+              </a:ext>
+            </a:extLst>
+          </p:cNvPr>
+          <p:cNvSpPr>
+            <a:spLocks noGrp="1"/>
+          </p:cNvSpPr>
+          <p:nvPr>
+            <p:ph type="sldNum" sz="quarter" idx="5"/>
+          </p:nvPr>
+        </p:nvSpPr>
+        <p:spPr/>
+      </p:sp>
+    </p:spTree>
+    <p:extLst>
+      <p:ext uri="{BB962C8B-B14F-4D97-AF65-F5344CB8AC3E}">
+        <p14:creationId xmlns:p14="http://schemas.microsoft.com/office/powerpoint/2010/main" val="3760788014"/>
+      </p:ext>
+    </p:extLst>
+  </p:cSld>
+  <p:clrMapOvr>
+    <a:masterClrMapping/>
+  </p:clrMapOvr>
+</p:notes>
+</file>
+
+<file path=ppt/notesSlides/notesSlide7.xml><?xml version="1.0" encoding="utf-8"?>
+<p:notes xmlns:a="http://schemas.openxmlformats.org/drawingml/2006/main" xmlns:r="http://schemas.openxmlformats.org/officeDocument/2006/relationships" xmlns:p="http://schemas.openxmlformats.org/presentationml/2006/main">
   <p:cSld>
     <p:spTree>
       <p:nvGrpSpPr>
@@ -763,7 +793,7 @@
         <p:nvSpPr>
           <p:cNvPr id="2" name="Slide Image Placeholder 1"/>
           <p:cNvSpPr>
-            <a:spLocks noGrp="1"/>
+            <a:spLocks noGrp="1" noRot="1" noChangeAspect="1"/>
           </p:cNvSpPr>
           <p:nvPr>
             <p:ph type="sldImg" idx="2"/>
@@ -778,7 +808,7 @@
             <a:spLocks noGrp="1"/>
           </p:cNvSpPr>
           <p:nvPr>
-            <p:ph type="body" idx="3" sz="quarter"/>
+            <p:ph type="body" sz="quarter" idx="3"/>
           </p:nvPr>
         </p:nvSpPr>
         <p:spPr/>
@@ -787,7 +817,16 @@
           <a:lstStyle/>
           <a:p>
             <a:r>
-              <a:t>Three conditions, fifteen test cases. Baseline A is a single LLM call, no schema, no skill, no redaction. Baseline B is the full pipeline with three fixed exemplars. AfterVisit is the full pipeline with skill routing. LLM judge, validated against hand scores on five cases. Read the table top to bottom.</a:t>
+              <a:rPr dirty="0"/>
+              <a:t>Three conditions, fifteen test cases. Baseline A is a single LLM call, no schema, no skill, no redaction. Baseline B is the full pipeline with three fixed exemplars. </a:t>
+            </a:r>
+            <a:r>
+              <a:rPr dirty="0" err="1"/>
+              <a:t>AfterVisit</a:t>
+            </a:r>
+            <a:r>
+              <a:rPr dirty="0"/>
+              <a:t> is the full pipeline with skill routing. LLM judge, validated against hand scores on five cases. Read the table top to bottom.</a:t>
             </a:r>
           </a:p>
         </p:txBody>
@@ -799,7 +838,7 @@
             <a:spLocks noGrp="1"/>
           </p:cNvSpPr>
           <p:nvPr>
-            <p:ph type="sldNum" idx="5" sz="quarter"/>
+            <p:ph type="sldNum" sz="quarter" idx="5"/>
           </p:nvPr>
         </p:nvSpPr>
         <p:spPr/>
@@ -812,8 +851,8 @@
 </p:notes>
 </file>
 
-<file path=ppt/notesSlides/notesSlide6.xml><?xml version="1.0" encoding="utf-8"?>
-<p:notes xmlns:a="http://schemas.openxmlformats.org/drawingml/2006/main" xmlns:p="http://schemas.openxmlformats.org/presentationml/2006/main" xmlns:r="http://schemas.openxmlformats.org/officeDocument/2006/relationships">
+<file path=ppt/notesSlides/notesSlide8.xml><?xml version="1.0" encoding="utf-8"?>
+<p:notes xmlns:a="http://schemas.openxmlformats.org/drawingml/2006/main" xmlns:r="http://schemas.openxmlformats.org/officeDocument/2006/relationships" xmlns:p="http://schemas.openxmlformats.org/presentationml/2006/main">
   <p:cSld>
     <p:spTree>
       <p:nvGrpSpPr>
@@ -833,7 +872,7 @@
         <p:nvSpPr>
           <p:cNvPr id="2" name="Slide Image Placeholder 1"/>
           <p:cNvSpPr>
-            <a:spLocks noGrp="1"/>
+            <a:spLocks noGrp="1" noRot="1" noChangeAspect="1"/>
           </p:cNvSpPr>
           <p:nvPr>
             <p:ph type="sldImg" idx="2"/>
@@ -848,7 +887,7 @@
             <a:spLocks noGrp="1"/>
           </p:cNvSpPr>
           <p:nvPr>
-            <p:ph type="body" idx="3" sz="quarter"/>
+            <p:ph type="body" sz="quarter" idx="3"/>
           </p:nvPr>
         </p:nvSpPr>
         <p:spPr/>
@@ -857,8 +896,17 @@
           <a:lstStyle/>
           <a:p>
             <a:r>
-              <a:t>Three findings, then limitations, then thank you. (1) Decomposition wins on tool-call reliability, not rubric points: judge missed that 7 of 15 of Baseline A's notes failed real schema. (2) Voice anchoring is the clear win: 1.0 to 2.0 on voice match. (3) Metadata routing ties fixed exemplars at n=15. The pre-registered threshold called this honestly. Limitations: oblique-acknowledgment ceiling on sensitive cases; corpus needs a sensitivity dimension; n=15 is small. Close: "Thank you, happy to take questions."</a:t>
-            </a:r>
+              <a:rPr dirty="0"/>
+              <a:t>(1) Decomposition wins on tool-call reliability, not rubric points: judge missed that 7 of 15 of Baseline A's notes failed real schema. (2) Voice anchoring is the clear win: 1.0 to 2.0 on voice match. (3) Metadata routing ties fixed exemplars at n=15. The pre-registered threshold called this honestly. Limitations: oblique-acknowledgment ceiling on sensitive cases; corpus needs a sensitivity dimension; n=15 is small. </a:t>
+            </a:r>
+            <a:r>
+              <a:t>Thank you</a:t>
+            </a:r>
+            <a:r>
+              <a:rPr lang="en-US"/>
+              <a:t>.</a:t>
+            </a:r>
+            <a:endParaRPr dirty="0"/>
           </a:p>
         </p:txBody>
       </p:sp>
@@ -869,7 +917,7 @@
             <a:spLocks noGrp="1"/>
           </p:cNvSpPr>
           <p:nvPr>
-            <p:ph type="sldNum" idx="5" sz="quarter"/>
+            <p:ph type="sldNum" sz="quarter" idx="5"/>
           </p:nvPr>
         </p:nvSpPr>
         <p:spPr/>
@@ -920,10 +968,9 @@
           <a:lstStyle/>
           <a:p>
             <a:r>
-              <a:rPr lang="en-US" smtClean="0"/>
+              <a:rPr lang="en-US"/>
               <a:t>Click to edit Master title style</a:t>
             </a:r>
-            <a:endParaRPr lang="en-US"/>
           </a:p>
         </p:txBody>
       </p:sp>
@@ -1039,10 +1086,9 @@
           </a:lstStyle>
           <a:p>
             <a:r>
-              <a:rPr lang="en-US" smtClean="0"/>
+              <a:rPr lang="en-US"/>
               <a:t>Click to edit Master subtitle style</a:t>
             </a:r>
-            <a:endParaRPr lang="en-US"/>
           </a:p>
         </p:txBody>
       </p:sp>
@@ -1063,7 +1109,7 @@
           <a:p>
             <a:fld id="{5BCAD085-E8A6-8845-BD4E-CB4CCA059FC4}" type="datetimeFigureOut">
               <a:rPr lang="en-US" smtClean="0"/>
-              <a:t>1/27/13</a:t>
+              <a:t>5/12/2026</a:t>
             </a:fld>
             <a:endParaRPr lang="en-US"/>
           </a:p>
@@ -1157,10 +1203,9 @@
           <a:lstStyle/>
           <a:p>
             <a:r>
-              <a:rPr lang="en-US" smtClean="0"/>
+              <a:rPr lang="en-US"/>
               <a:t>Click to edit Master title style</a:t>
             </a:r>
-            <a:endParaRPr lang="en-US"/>
           </a:p>
         </p:txBody>
       </p:sp>
@@ -1181,38 +1226,37 @@
           <a:p>
             <a:pPr lvl="0"/>
             <a:r>
-              <a:rPr lang="en-US" smtClean="0"/>
+              <a:rPr lang="en-US"/>
               <a:t>Click to edit Master text styles</a:t>
             </a:r>
           </a:p>
           <a:p>
             <a:pPr lvl="1"/>
             <a:r>
-              <a:rPr lang="en-US" smtClean="0"/>
+              <a:rPr lang="en-US"/>
               <a:t>Second level</a:t>
             </a:r>
           </a:p>
           <a:p>
             <a:pPr lvl="2"/>
             <a:r>
-              <a:rPr lang="en-US" smtClean="0"/>
+              <a:rPr lang="en-US"/>
               <a:t>Third level</a:t>
             </a:r>
           </a:p>
           <a:p>
             <a:pPr lvl="3"/>
             <a:r>
-              <a:rPr lang="en-US" smtClean="0"/>
+              <a:rPr lang="en-US"/>
               <a:t>Fourth level</a:t>
             </a:r>
           </a:p>
           <a:p>
             <a:pPr lvl="4"/>
             <a:r>
-              <a:rPr lang="en-US" smtClean="0"/>
+              <a:rPr lang="en-US"/>
               <a:t>Fifth level</a:t>
             </a:r>
-            <a:endParaRPr lang="en-US"/>
           </a:p>
         </p:txBody>
       </p:sp>
@@ -1233,7 +1277,7 @@
           <a:p>
             <a:fld id="{5BCAD085-E8A6-8845-BD4E-CB4CCA059FC4}" type="datetimeFigureOut">
               <a:rPr lang="en-US" smtClean="0"/>
-              <a:t>1/27/13</a:t>
+              <a:t>5/12/2026</a:t>
             </a:fld>
             <a:endParaRPr lang="en-US"/>
           </a:p>
@@ -1332,10 +1376,9 @@
           <a:lstStyle/>
           <a:p>
             <a:r>
-              <a:rPr lang="en-US" smtClean="0"/>
+              <a:rPr lang="en-US"/>
               <a:t>Click to edit Master title style</a:t>
             </a:r>
-            <a:endParaRPr lang="en-US"/>
           </a:p>
         </p:txBody>
       </p:sp>
@@ -1361,38 +1404,37 @@
           <a:p>
             <a:pPr lvl="0"/>
             <a:r>
-              <a:rPr lang="en-US" smtClean="0"/>
+              <a:rPr lang="en-US"/>
               <a:t>Click to edit Master text styles</a:t>
             </a:r>
           </a:p>
           <a:p>
             <a:pPr lvl="1"/>
             <a:r>
-              <a:rPr lang="en-US" smtClean="0"/>
+              <a:rPr lang="en-US"/>
               <a:t>Second level</a:t>
             </a:r>
           </a:p>
           <a:p>
             <a:pPr lvl="2"/>
             <a:r>
-              <a:rPr lang="en-US" smtClean="0"/>
+              <a:rPr lang="en-US"/>
               <a:t>Third level</a:t>
             </a:r>
           </a:p>
           <a:p>
             <a:pPr lvl="3"/>
             <a:r>
-              <a:rPr lang="en-US" smtClean="0"/>
+              <a:rPr lang="en-US"/>
               <a:t>Fourth level</a:t>
             </a:r>
           </a:p>
           <a:p>
             <a:pPr lvl="4"/>
             <a:r>
-              <a:rPr lang="en-US" smtClean="0"/>
+              <a:rPr lang="en-US"/>
               <a:t>Fifth level</a:t>
             </a:r>
-            <a:endParaRPr lang="en-US"/>
           </a:p>
         </p:txBody>
       </p:sp>
@@ -1413,7 +1455,7 @@
           <a:p>
             <a:fld id="{5BCAD085-E8A6-8845-BD4E-CB4CCA059FC4}" type="datetimeFigureOut">
               <a:rPr lang="en-US" smtClean="0"/>
-              <a:t>1/27/13</a:t>
+              <a:t>5/12/2026</a:t>
             </a:fld>
             <a:endParaRPr lang="en-US"/>
           </a:p>
@@ -1507,10 +1549,9 @@
           <a:lstStyle/>
           <a:p>
             <a:r>
-              <a:rPr lang="en-US" smtClean="0"/>
+              <a:rPr lang="en-US"/>
               <a:t>Click to edit Master title style</a:t>
             </a:r>
-            <a:endParaRPr lang="en-US"/>
           </a:p>
         </p:txBody>
       </p:sp>
@@ -1531,38 +1572,37 @@
           <a:p>
             <a:pPr lvl="0"/>
             <a:r>
-              <a:rPr lang="en-US" smtClean="0"/>
+              <a:rPr lang="en-US"/>
               <a:t>Click to edit Master text styles</a:t>
             </a:r>
           </a:p>
           <a:p>
             <a:pPr lvl="1"/>
             <a:r>
-              <a:rPr lang="en-US" smtClean="0"/>
+              <a:rPr lang="en-US"/>
               <a:t>Second level</a:t>
             </a:r>
           </a:p>
           <a:p>
             <a:pPr lvl="2"/>
             <a:r>
-              <a:rPr lang="en-US" smtClean="0"/>
+              <a:rPr lang="en-US"/>
               <a:t>Third level</a:t>
             </a:r>
           </a:p>
           <a:p>
             <a:pPr lvl="3"/>
             <a:r>
-              <a:rPr lang="en-US" smtClean="0"/>
+              <a:rPr lang="en-US"/>
               <a:t>Fourth level</a:t>
             </a:r>
           </a:p>
           <a:p>
             <a:pPr lvl="4"/>
             <a:r>
-              <a:rPr lang="en-US" smtClean="0"/>
+              <a:rPr lang="en-US"/>
               <a:t>Fifth level</a:t>
             </a:r>
-            <a:endParaRPr lang="en-US"/>
           </a:p>
         </p:txBody>
       </p:sp>
@@ -1583,7 +1623,7 @@
           <a:p>
             <a:fld id="{5BCAD085-E8A6-8845-BD4E-CB4CCA059FC4}" type="datetimeFigureOut">
               <a:rPr lang="en-US" smtClean="0"/>
-              <a:t>1/27/13</a:t>
+              <a:t>5/12/2026</a:t>
             </a:fld>
             <a:endParaRPr lang="en-US"/>
           </a:p>
@@ -1686,10 +1726,9 @@
           </a:lstStyle>
           <a:p>
             <a:r>
-              <a:rPr lang="en-US" smtClean="0"/>
+              <a:rPr lang="en-US"/>
               <a:t>Click to edit Master title style</a:t>
             </a:r>
-            <a:endParaRPr lang="en-US"/>
           </a:p>
         </p:txBody>
       </p:sp>
@@ -1806,7 +1845,7 @@
           <a:p>
             <a:pPr lvl="0"/>
             <a:r>
-              <a:rPr lang="en-US" smtClean="0"/>
+              <a:rPr lang="en-US"/>
               <a:t>Click to edit Master text styles</a:t>
             </a:r>
           </a:p>
@@ -1829,7 +1868,7 @@
           <a:p>
             <a:fld id="{5BCAD085-E8A6-8845-BD4E-CB4CCA059FC4}" type="datetimeFigureOut">
               <a:rPr lang="en-US" smtClean="0"/>
-              <a:t>1/27/13</a:t>
+              <a:t>5/12/2026</a:t>
             </a:fld>
             <a:endParaRPr lang="en-US"/>
           </a:p>
@@ -1923,10 +1962,9 @@
           <a:lstStyle/>
           <a:p>
             <a:r>
-              <a:rPr lang="en-US" smtClean="0"/>
+              <a:rPr lang="en-US"/>
               <a:t>Click to edit Master title style</a:t>
             </a:r>
-            <a:endParaRPr lang="en-US"/>
           </a:p>
         </p:txBody>
       </p:sp>
@@ -1980,38 +2018,37 @@
           <a:p>
             <a:pPr lvl="0"/>
             <a:r>
-              <a:rPr lang="en-US" smtClean="0"/>
+              <a:rPr lang="en-US"/>
               <a:t>Click to edit Master text styles</a:t>
             </a:r>
           </a:p>
           <a:p>
             <a:pPr lvl="1"/>
             <a:r>
-              <a:rPr lang="en-US" smtClean="0"/>
+              <a:rPr lang="en-US"/>
               <a:t>Second level</a:t>
             </a:r>
           </a:p>
           <a:p>
             <a:pPr lvl="2"/>
             <a:r>
-              <a:rPr lang="en-US" smtClean="0"/>
+              <a:rPr lang="en-US"/>
               <a:t>Third level</a:t>
             </a:r>
           </a:p>
           <a:p>
             <a:pPr lvl="3"/>
             <a:r>
-              <a:rPr lang="en-US" smtClean="0"/>
+              <a:rPr lang="en-US"/>
               <a:t>Fourth level</a:t>
             </a:r>
           </a:p>
           <a:p>
             <a:pPr lvl="4"/>
             <a:r>
-              <a:rPr lang="en-US" smtClean="0"/>
+              <a:rPr lang="en-US"/>
               <a:t>Fifth level</a:t>
             </a:r>
-            <a:endParaRPr lang="en-US"/>
           </a:p>
         </p:txBody>
       </p:sp>
@@ -2065,38 +2102,37 @@
           <a:p>
             <a:pPr lvl="0"/>
             <a:r>
-              <a:rPr lang="en-US" smtClean="0"/>
+              <a:rPr lang="en-US"/>
               <a:t>Click to edit Master text styles</a:t>
             </a:r>
           </a:p>
           <a:p>
             <a:pPr lvl="1"/>
             <a:r>
-              <a:rPr lang="en-US" smtClean="0"/>
+              <a:rPr lang="en-US"/>
               <a:t>Second level</a:t>
             </a:r>
           </a:p>
           <a:p>
             <a:pPr lvl="2"/>
             <a:r>
-              <a:rPr lang="en-US" smtClean="0"/>
+              <a:rPr lang="en-US"/>
               <a:t>Third level</a:t>
             </a:r>
           </a:p>
           <a:p>
             <a:pPr lvl="3"/>
             <a:r>
-              <a:rPr lang="en-US" smtClean="0"/>
+              <a:rPr lang="en-US"/>
               <a:t>Fourth level</a:t>
             </a:r>
           </a:p>
           <a:p>
             <a:pPr lvl="4"/>
             <a:r>
-              <a:rPr lang="en-US" smtClean="0"/>
+              <a:rPr lang="en-US"/>
               <a:t>Fifth level</a:t>
             </a:r>
-            <a:endParaRPr lang="en-US"/>
           </a:p>
         </p:txBody>
       </p:sp>
@@ -2117,7 +2153,7 @@
           <a:p>
             <a:fld id="{5BCAD085-E8A6-8845-BD4E-CB4CCA059FC4}" type="datetimeFigureOut">
               <a:rPr lang="en-US" smtClean="0"/>
-              <a:t>1/27/13</a:t>
+              <a:t>5/12/2026</a:t>
             </a:fld>
             <a:endParaRPr lang="en-US"/>
           </a:p>
@@ -2215,10 +2251,9 @@
           </a:lstStyle>
           <a:p>
             <a:r>
-              <a:rPr lang="en-US" smtClean="0"/>
+              <a:rPr lang="en-US"/>
               <a:t>Click to edit Master title style</a:t>
             </a:r>
-            <a:endParaRPr lang="en-US"/>
           </a:p>
         </p:txBody>
       </p:sp>
@@ -2281,7 +2316,7 @@
           <a:p>
             <a:pPr lvl="0"/>
             <a:r>
-              <a:rPr lang="en-US" smtClean="0"/>
+              <a:rPr lang="en-US"/>
               <a:t>Click to edit Master text styles</a:t>
             </a:r>
           </a:p>
@@ -2337,38 +2372,37 @@
           <a:p>
             <a:pPr lvl="0"/>
             <a:r>
-              <a:rPr lang="en-US" smtClean="0"/>
+              <a:rPr lang="en-US"/>
               <a:t>Click to edit Master text styles</a:t>
             </a:r>
           </a:p>
           <a:p>
             <a:pPr lvl="1"/>
             <a:r>
-              <a:rPr lang="en-US" smtClean="0"/>
+              <a:rPr lang="en-US"/>
               <a:t>Second level</a:t>
             </a:r>
           </a:p>
           <a:p>
             <a:pPr lvl="2"/>
             <a:r>
-              <a:rPr lang="en-US" smtClean="0"/>
+              <a:rPr lang="en-US"/>
               <a:t>Third level</a:t>
             </a:r>
           </a:p>
           <a:p>
             <a:pPr lvl="3"/>
             <a:r>
-              <a:rPr lang="en-US" smtClean="0"/>
+              <a:rPr lang="en-US"/>
               <a:t>Fourth level</a:t>
             </a:r>
           </a:p>
           <a:p>
             <a:pPr lvl="4"/>
             <a:r>
-              <a:rPr lang="en-US" smtClean="0"/>
+              <a:rPr lang="en-US"/>
               <a:t>Fifth level</a:t>
             </a:r>
-            <a:endParaRPr lang="en-US"/>
           </a:p>
         </p:txBody>
       </p:sp>
@@ -2431,7 +2465,7 @@
           <a:p>
             <a:pPr lvl="0"/>
             <a:r>
-              <a:rPr lang="en-US" smtClean="0"/>
+              <a:rPr lang="en-US"/>
               <a:t>Click to edit Master text styles</a:t>
             </a:r>
           </a:p>
@@ -2487,38 +2521,37 @@
           <a:p>
             <a:pPr lvl="0"/>
             <a:r>
-              <a:rPr lang="en-US" smtClean="0"/>
+              <a:rPr lang="en-US"/>
               <a:t>Click to edit Master text styles</a:t>
             </a:r>
           </a:p>
           <a:p>
             <a:pPr lvl="1"/>
             <a:r>
-              <a:rPr lang="en-US" smtClean="0"/>
+              <a:rPr lang="en-US"/>
               <a:t>Second level</a:t>
             </a:r>
           </a:p>
           <a:p>
             <a:pPr lvl="2"/>
             <a:r>
-              <a:rPr lang="en-US" smtClean="0"/>
+              <a:rPr lang="en-US"/>
               <a:t>Third level</a:t>
             </a:r>
           </a:p>
           <a:p>
             <a:pPr lvl="3"/>
             <a:r>
-              <a:rPr lang="en-US" smtClean="0"/>
+              <a:rPr lang="en-US"/>
               <a:t>Fourth level</a:t>
             </a:r>
           </a:p>
           <a:p>
             <a:pPr lvl="4"/>
             <a:r>
-              <a:rPr lang="en-US" smtClean="0"/>
+              <a:rPr lang="en-US"/>
               <a:t>Fifth level</a:t>
             </a:r>
-            <a:endParaRPr lang="en-US"/>
           </a:p>
         </p:txBody>
       </p:sp>
@@ -2539,7 +2572,7 @@
           <a:p>
             <a:fld id="{5BCAD085-E8A6-8845-BD4E-CB4CCA059FC4}" type="datetimeFigureOut">
               <a:rPr lang="en-US" smtClean="0"/>
-              <a:t>1/27/13</a:t>
+              <a:t>5/12/2026</a:t>
             </a:fld>
             <a:endParaRPr lang="en-US"/>
           </a:p>
@@ -2633,10 +2666,9 @@
           <a:lstStyle/>
           <a:p>
             <a:r>
-              <a:rPr lang="en-US" smtClean="0"/>
+              <a:rPr lang="en-US"/>
               <a:t>Click to edit Master title style</a:t>
             </a:r>
-            <a:endParaRPr lang="en-US"/>
           </a:p>
         </p:txBody>
       </p:sp>
@@ -2657,7 +2689,7 @@
           <a:p>
             <a:fld id="{5BCAD085-E8A6-8845-BD4E-CB4CCA059FC4}" type="datetimeFigureOut">
               <a:rPr lang="en-US" smtClean="0"/>
-              <a:t>1/27/13</a:t>
+              <a:t>5/12/2026</a:t>
             </a:fld>
             <a:endParaRPr lang="en-US"/>
           </a:p>
@@ -2752,7 +2784,7 @@
           <a:p>
             <a:fld id="{5BCAD085-E8A6-8845-BD4E-CB4CCA059FC4}" type="datetimeFigureOut">
               <a:rPr lang="en-US" smtClean="0"/>
-              <a:t>1/27/13</a:t>
+              <a:t>5/12/2026</a:t>
             </a:fld>
             <a:endParaRPr lang="en-US"/>
           </a:p>
@@ -2855,10 +2887,9 @@
           </a:lstStyle>
           <a:p>
             <a:r>
-              <a:rPr lang="en-US" smtClean="0"/>
+              <a:rPr lang="en-US"/>
               <a:t>Click to edit Master title style</a:t>
             </a:r>
-            <a:endParaRPr lang="en-US"/>
           </a:p>
         </p:txBody>
       </p:sp>
@@ -2912,38 +2943,37 @@
           <a:p>
             <a:pPr lvl="0"/>
             <a:r>
-              <a:rPr lang="en-US" smtClean="0"/>
+              <a:rPr lang="en-US"/>
               <a:t>Click to edit Master text styles</a:t>
             </a:r>
           </a:p>
           <a:p>
             <a:pPr lvl="1"/>
             <a:r>
-              <a:rPr lang="en-US" smtClean="0"/>
+              <a:rPr lang="en-US"/>
               <a:t>Second level</a:t>
             </a:r>
           </a:p>
           <a:p>
             <a:pPr lvl="2"/>
             <a:r>
-              <a:rPr lang="en-US" smtClean="0"/>
+              <a:rPr lang="en-US"/>
               <a:t>Third level</a:t>
             </a:r>
           </a:p>
           <a:p>
             <a:pPr lvl="3"/>
             <a:r>
-              <a:rPr lang="en-US" smtClean="0"/>
+              <a:rPr lang="en-US"/>
               <a:t>Fourth level</a:t>
             </a:r>
           </a:p>
           <a:p>
             <a:pPr lvl="4"/>
             <a:r>
-              <a:rPr lang="en-US" smtClean="0"/>
+              <a:rPr lang="en-US"/>
               <a:t>Fifth level</a:t>
             </a:r>
-            <a:endParaRPr lang="en-US"/>
           </a:p>
         </p:txBody>
       </p:sp>
@@ -3006,7 +3036,7 @@
           <a:p>
             <a:pPr lvl="0"/>
             <a:r>
-              <a:rPr lang="en-US" smtClean="0"/>
+              <a:rPr lang="en-US"/>
               <a:t>Click to edit Master text styles</a:t>
             </a:r>
           </a:p>
@@ -3029,7 +3059,7 @@
           <a:p>
             <a:fld id="{5BCAD085-E8A6-8845-BD4E-CB4CCA059FC4}" type="datetimeFigureOut">
               <a:rPr lang="en-US" smtClean="0"/>
-              <a:t>1/27/13</a:t>
+              <a:t>5/12/2026</a:t>
             </a:fld>
             <a:endParaRPr lang="en-US"/>
           </a:p>
@@ -3132,10 +3162,9 @@
           </a:lstStyle>
           <a:p>
             <a:r>
-              <a:rPr lang="en-US" smtClean="0"/>
+              <a:rPr lang="en-US"/>
               <a:t>Click to edit Master title style</a:t>
             </a:r>
-            <a:endParaRPr lang="en-US"/>
           </a:p>
         </p:txBody>
       </p:sp>
@@ -3259,7 +3288,7 @@
           <a:p>
             <a:pPr lvl="0"/>
             <a:r>
-              <a:rPr lang="en-US" smtClean="0"/>
+              <a:rPr lang="en-US"/>
               <a:t>Click to edit Master text styles</a:t>
             </a:r>
           </a:p>
@@ -3282,7 +3311,7 @@
           <a:p>
             <a:fld id="{5BCAD085-E8A6-8845-BD4E-CB4CCA059FC4}" type="datetimeFigureOut">
               <a:rPr lang="en-US" smtClean="0"/>
-              <a:t>1/27/13</a:t>
+              <a:t>5/12/2026</a:t>
             </a:fld>
             <a:endParaRPr lang="en-US"/>
           </a:p>
@@ -3391,10 +3420,9 @@
           <a:lstStyle/>
           <a:p>
             <a:r>
-              <a:rPr lang="en-US" smtClean="0"/>
+              <a:rPr lang="en-US"/>
               <a:t>Click to edit Master title style</a:t>
             </a:r>
-            <a:endParaRPr lang="en-US"/>
           </a:p>
         </p:txBody>
       </p:sp>
@@ -3425,38 +3453,37 @@
           <a:p>
             <a:pPr lvl="0"/>
             <a:r>
-              <a:rPr lang="en-US" smtClean="0"/>
+              <a:rPr lang="en-US"/>
               <a:t>Click to edit Master text styles</a:t>
             </a:r>
           </a:p>
           <a:p>
             <a:pPr lvl="1"/>
             <a:r>
-              <a:rPr lang="en-US" smtClean="0"/>
+              <a:rPr lang="en-US"/>
               <a:t>Second level</a:t>
             </a:r>
           </a:p>
           <a:p>
             <a:pPr lvl="2"/>
             <a:r>
-              <a:rPr lang="en-US" smtClean="0"/>
+              <a:rPr lang="en-US"/>
               <a:t>Third level</a:t>
             </a:r>
           </a:p>
           <a:p>
             <a:pPr lvl="3"/>
             <a:r>
-              <a:rPr lang="en-US" smtClean="0"/>
+              <a:rPr lang="en-US"/>
               <a:t>Fourth level</a:t>
             </a:r>
           </a:p>
           <a:p>
             <a:pPr lvl="4"/>
             <a:r>
-              <a:rPr lang="en-US" smtClean="0"/>
+              <a:rPr lang="en-US"/>
               <a:t>Fifth level</a:t>
             </a:r>
-            <a:endParaRPr lang="en-US"/>
           </a:p>
         </p:txBody>
       </p:sp>
@@ -3495,7 +3522,7 @@
           <a:p>
             <a:fld id="{5BCAD085-E8A6-8845-BD4E-CB4CCA059FC4}" type="datetimeFigureOut">
               <a:rPr lang="en-US" smtClean="0"/>
-              <a:t>1/27/13</a:t>
+              <a:t>5/12/2026</a:t>
             </a:fld>
             <a:endParaRPr lang="en-US"/>
           </a:p>
@@ -3854,7 +3881,7 @@
 </file>
 
 <file path=ppt/slides/slide1.xml><?xml version="1.0" encoding="utf-8"?>
-<p:sld xmlns:a="http://schemas.openxmlformats.org/drawingml/2006/main" xmlns:p="http://schemas.openxmlformats.org/presentationml/2006/main" xmlns:r="http://schemas.openxmlformats.org/officeDocument/2006/relationships">
+<p:sld xmlns:a="http://schemas.openxmlformats.org/drawingml/2006/main" xmlns:r="http://schemas.openxmlformats.org/officeDocument/2006/relationships" xmlns:p="http://schemas.openxmlformats.org/presentationml/2006/main">
   <p:cSld>
     <p:spTree>
       <p:nvGrpSpPr>
@@ -3862,7 +3889,14 @@
         <p:cNvGrpSpPr/>
         <p:nvPr/>
       </p:nvGrpSpPr>
-      <p:grpSpPr/>
+      <p:grpSpPr>
+        <a:xfrm>
+          <a:off x="0" y="0"/>
+          <a:ext cx="0" cy="0"/>
+          <a:chOff x="0" y="0"/>
+          <a:chExt cx="0" cy="0"/>
+        </a:xfrm>
+      </p:grpSpPr>
       <p:sp>
         <p:nvSpPr>
           <p:cNvPr id="3" name="TextBox 2"/>
@@ -3871,8 +3905,8 @@
         </p:nvSpPr>
         <p:spPr>
           <a:xfrm>
-            <a:off x="640080" y="3794760"/>
-            <a:ext cx="10911535" cy="731520"/>
+            <a:off x="2442601" y="3790406"/>
+            <a:ext cx="7306491" cy="338554"/>
           </a:xfrm>
           <a:prstGeom prst="rect">
             <a:avLst/>
@@ -3880,14 +3914,14 @@
           <a:noFill/>
         </p:spPr>
         <p:txBody>
-          <a:bodyPr wrap="square" lIns="0" rIns="0" tIns="0" bIns="0" anchor="t">
+          <a:bodyPr wrap="square" lIns="0" tIns="0" rIns="0" bIns="0" anchor="t">
             <a:spAutoFit/>
           </a:bodyPr>
           <a:lstStyle/>
           <a:p>
             <a:pPr algn="l"/>
             <a:r>
-              <a:rPr sz="2200" b="0">
+              <a:rPr sz="2200" b="0" dirty="0">
                 <a:solidFill>
                   <a:srgbClr val="475569"/>
                 </a:solidFill>
@@ -3915,7 +3949,7 @@
           <a:noFill/>
         </p:spPr>
         <p:txBody>
-          <a:bodyPr wrap="square" lIns="0" rIns="0" tIns="0" bIns="0" anchor="t">
+          <a:bodyPr wrap="square" lIns="0" tIns="0" rIns="0" bIns="0" anchor="t">
             <a:spAutoFit/>
           </a:bodyPr>
           <a:lstStyle/>
@@ -3966,7 +4000,7 @@
 </file>
 
 <file path=ppt/slides/slide2.xml><?xml version="1.0" encoding="utf-8"?>
-<p:sld xmlns:a="http://schemas.openxmlformats.org/drawingml/2006/main" xmlns:p="http://schemas.openxmlformats.org/presentationml/2006/main" xmlns:r="http://schemas.openxmlformats.org/officeDocument/2006/relationships">
+<p:sld xmlns:a="http://schemas.openxmlformats.org/drawingml/2006/main" xmlns:r="http://schemas.openxmlformats.org/officeDocument/2006/relationships" xmlns:p="http://schemas.openxmlformats.org/presentationml/2006/main">
   <p:cSld>
     <p:spTree>
       <p:nvGrpSpPr>
@@ -3974,7 +4008,14 @@
         <p:cNvGrpSpPr/>
         <p:nvPr/>
       </p:nvGrpSpPr>
-      <p:grpSpPr/>
+      <p:grpSpPr>
+        <a:xfrm>
+          <a:off x="0" y="0"/>
+          <a:ext cx="0" cy="0"/>
+          <a:chOff x="0" y="0"/>
+          <a:chExt cx="0" cy="0"/>
+        </a:xfrm>
+      </p:grpSpPr>
       <p:sp>
         <p:nvSpPr>
           <p:cNvPr id="2" name="TextBox 1"/>
@@ -3992,7 +4033,7 @@
           <a:noFill/>
         </p:spPr>
         <p:txBody>
-          <a:bodyPr wrap="square" lIns="0" rIns="0" tIns="0" bIns="0" anchor="t">
+          <a:bodyPr wrap="square" lIns="0" tIns="0" rIns="0" bIns="0" anchor="t">
             <a:spAutoFit/>
           </a:bodyPr>
           <a:lstStyle/>
@@ -4027,7 +4068,7 @@
           <a:noFill/>
         </p:spPr>
         <p:txBody>
-          <a:bodyPr wrap="square" lIns="0" rIns="0" tIns="0" bIns="0">
+          <a:bodyPr wrap="square" lIns="0" tIns="0" rIns="0" bIns="0">
             <a:spAutoFit/>
           </a:bodyPr>
           <a:lstStyle/>
@@ -4096,7 +4137,7 @@
           <a:noFill/>
         </p:spPr>
         <p:txBody>
-          <a:bodyPr wrap="square" lIns="0" rIns="0" tIns="0" bIns="0" anchor="t">
+          <a:bodyPr wrap="square" lIns="0" tIns="0" rIns="0" bIns="0" anchor="t">
             <a:spAutoFit/>
           </a:bodyPr>
           <a:lstStyle/>
@@ -4114,6 +4155,36 @@
           </a:p>
         </p:txBody>
       </p:sp>
+      <p:pic>
+        <p:nvPicPr>
+          <p:cNvPr id="5" name="Picture 4" descr="logo.png">
+            <a:extLst>
+              <a:ext uri="{FF2B5EF4-FFF2-40B4-BE49-F238E27FC236}">
+                <a16:creationId xmlns:a16="http://schemas.microsoft.com/office/drawing/2014/main" id="{27D44C28-8072-AABE-179E-4864F815D4BA}"/>
+              </a:ext>
+            </a:extLst>
+          </p:cNvPr>
+          <p:cNvPicPr>
+            <a:picLocks noChangeAspect="1"/>
+          </p:cNvPicPr>
+          <p:nvPr/>
+        </p:nvPicPr>
+        <p:blipFill>
+          <a:blip r:embed="rId3"/>
+          <a:stretch>
+            <a:fillRect/>
+          </a:stretch>
+        </p:blipFill>
+        <p:spPr>
+          <a:xfrm>
+            <a:off x="640080" y="6126480"/>
+            <a:ext cx="1927859" cy="502920"/>
+          </a:xfrm>
+          <a:prstGeom prst="rect">
+            <a:avLst/>
+          </a:prstGeom>
+        </p:spPr>
+      </p:pic>
     </p:spTree>
   </p:cSld>
   <p:clrMapOvr>
@@ -4123,7 +4194,7 @@
 </file>
 
 <file path=ppt/slides/slide3.xml><?xml version="1.0" encoding="utf-8"?>
-<p:sld xmlns:a="http://schemas.openxmlformats.org/drawingml/2006/main" xmlns:p="http://schemas.openxmlformats.org/presentationml/2006/main" xmlns:r="http://schemas.openxmlformats.org/officeDocument/2006/relationships">
+<p:sld xmlns:a="http://schemas.openxmlformats.org/drawingml/2006/main" xmlns:r="http://schemas.openxmlformats.org/officeDocument/2006/relationships" xmlns:p="http://schemas.openxmlformats.org/presentationml/2006/main">
   <p:cSld>
     <p:spTree>
       <p:nvGrpSpPr>
@@ -4131,7 +4202,14 @@
         <p:cNvGrpSpPr/>
         <p:nvPr/>
       </p:nvGrpSpPr>
-      <p:grpSpPr/>
+      <p:grpSpPr>
+        <a:xfrm>
+          <a:off x="0" y="0"/>
+          <a:ext cx="0" cy="0"/>
+          <a:chOff x="0" y="0"/>
+          <a:chExt cx="0" cy="0"/>
+        </a:xfrm>
+      </p:grpSpPr>
       <p:sp>
         <p:nvSpPr>
           <p:cNvPr id="2" name="TextBox 1"/>
@@ -4149,7 +4227,7 @@
           <a:noFill/>
         </p:spPr>
         <p:txBody>
-          <a:bodyPr wrap="square" lIns="0" rIns="0" tIns="0" bIns="0" anchor="t">
+          <a:bodyPr wrap="square" lIns="0" tIns="0" rIns="0" bIns="0" anchor="t">
             <a:spAutoFit/>
           </a:bodyPr>
           <a:lstStyle/>
@@ -4207,7 +4285,7 @@
           </a:fontRef>
         </p:style>
         <p:txBody>
-          <a:bodyPr rtlCol="0" anchor="ctr" wrap="square" tIns="73152" bIns="73152"/>
+          <a:bodyPr wrap="square" tIns="73152" bIns="73152" rtlCol="0" anchor="ctr"/>
           <a:lstStyle/>
           <a:p>
             <a:pPr algn="ctr"/>
@@ -4263,6 +4341,7 @@
           <a:lstStyle/>
           <a:p>
             <a:pPr algn="ctr"/>
+            <a:endParaRPr/>
           </a:p>
         </p:txBody>
       </p:sp>
@@ -4306,7 +4385,7 @@
           </a:fontRef>
         </p:style>
         <p:txBody>
-          <a:bodyPr rtlCol="0" anchor="ctr" wrap="square" tIns="73152" bIns="73152"/>
+          <a:bodyPr wrap="square" tIns="73152" bIns="73152" rtlCol="0" anchor="ctr"/>
           <a:lstStyle/>
           <a:p>
             <a:pPr algn="ctr"/>
@@ -4362,6 +4441,7 @@
           <a:lstStyle/>
           <a:p>
             <a:pPr algn="ctr"/>
+            <a:endParaRPr/>
           </a:p>
         </p:txBody>
       </p:sp>
@@ -4405,7 +4485,7 @@
           </a:fontRef>
         </p:style>
         <p:txBody>
-          <a:bodyPr rtlCol="0" anchor="ctr" wrap="square" tIns="73152" bIns="73152"/>
+          <a:bodyPr wrap="square" tIns="73152" bIns="73152" rtlCol="0" anchor="ctr"/>
           <a:lstStyle/>
           <a:p>
             <a:pPr algn="ctr"/>
@@ -4473,6 +4553,7 @@
           <a:lstStyle/>
           <a:p>
             <a:pPr algn="ctr"/>
+            <a:endParaRPr/>
           </a:p>
         </p:txBody>
       </p:sp>
@@ -4516,7 +4597,7 @@
           </a:fontRef>
         </p:style>
         <p:txBody>
-          <a:bodyPr rtlCol="0" anchor="ctr" wrap="square" tIns="73152" bIns="73152"/>
+          <a:bodyPr wrap="square" tIns="73152" bIns="73152" rtlCol="0" anchor="ctr"/>
           <a:lstStyle/>
           <a:p>
             <a:pPr algn="ctr"/>
@@ -4584,6 +4665,7 @@
           <a:lstStyle/>
           <a:p>
             <a:pPr algn="ctr"/>
+            <a:endParaRPr/>
           </a:p>
         </p:txBody>
       </p:sp>
@@ -4627,7 +4709,7 @@
           </a:fontRef>
         </p:style>
         <p:txBody>
-          <a:bodyPr rtlCol="0" anchor="ctr" wrap="square" tIns="73152" bIns="73152"/>
+          <a:bodyPr wrap="square" tIns="73152" bIns="73152" rtlCol="0" anchor="ctr"/>
           <a:lstStyle/>
           <a:p>
             <a:pPr algn="ctr"/>
@@ -4695,6 +4777,7 @@
           <a:lstStyle/>
           <a:p>
             <a:pPr algn="ctr"/>
+            <a:endParaRPr/>
           </a:p>
         </p:txBody>
       </p:sp>
@@ -4706,7 +4789,7 @@
         </p:nvSpPr>
         <p:spPr>
           <a:xfrm>
-            <a:off x="960120" y="4023360"/>
+            <a:off x="960120" y="4119590"/>
             <a:ext cx="10591495" cy="411480"/>
           </a:xfrm>
           <a:prstGeom prst="rect">
@@ -4715,14 +4798,14 @@
           <a:noFill/>
         </p:spPr>
         <p:txBody>
-          <a:bodyPr wrap="square" lIns="0" rIns="0" tIns="0" bIns="0" anchor="t">
+          <a:bodyPr wrap="square" lIns="0" tIns="0" rIns="0" bIns="0" anchor="t">
             <a:spAutoFit/>
           </a:bodyPr>
           <a:lstStyle/>
           <a:p>
             <a:pPr algn="l"/>
             <a:r>
-              <a:rPr sz="1400" b="0">
+              <a:rPr sz="1400" b="0" dirty="0">
                 <a:solidFill>
                   <a:srgbClr val="475569"/>
                 </a:solidFill>
@@ -4773,6 +4856,7 @@
           <a:lstStyle/>
           <a:p>
             <a:pPr algn="ctr"/>
+            <a:endParaRPr/>
           </a:p>
         </p:txBody>
       </p:sp>
@@ -4784,7 +4868,7 @@
         </p:nvSpPr>
         <p:spPr>
           <a:xfrm>
-            <a:off x="960120" y="4617720"/>
+            <a:off x="960120" y="4713950"/>
             <a:ext cx="10591495" cy="411480"/>
           </a:xfrm>
           <a:prstGeom prst="rect">
@@ -4793,14 +4877,14 @@
           <a:noFill/>
         </p:spPr>
         <p:txBody>
-          <a:bodyPr wrap="square" lIns="0" rIns="0" tIns="0" bIns="0" anchor="t">
+          <a:bodyPr wrap="square" lIns="0" tIns="0" rIns="0" bIns="0" anchor="t">
             <a:spAutoFit/>
           </a:bodyPr>
           <a:lstStyle/>
           <a:p>
             <a:pPr algn="l"/>
             <a:r>
-              <a:rPr sz="1400" b="0">
+              <a:rPr sz="1400" b="0" dirty="0">
                 <a:solidFill>
                   <a:srgbClr val="475569"/>
                 </a:solidFill>
@@ -4851,6 +4935,7 @@
           <a:lstStyle/>
           <a:p>
             <a:pPr algn="ctr"/>
+            <a:endParaRPr/>
           </a:p>
         </p:txBody>
       </p:sp>
@@ -4862,7 +4947,7 @@
         </p:nvSpPr>
         <p:spPr>
           <a:xfrm>
-            <a:off x="960120" y="5212080"/>
+            <a:off x="960120" y="5298730"/>
             <a:ext cx="10591495" cy="411480"/>
           </a:xfrm>
           <a:prstGeom prst="rect">
@@ -4871,7 +4956,7 @@
           <a:noFill/>
         </p:spPr>
         <p:txBody>
-          <a:bodyPr wrap="square" lIns="0" rIns="0" tIns="0" bIns="0" anchor="t">
+          <a:bodyPr wrap="square" lIns="0" tIns="0" rIns="0" bIns="0" anchor="t">
             <a:spAutoFit/>
           </a:bodyPr>
           <a:lstStyle/>
@@ -4906,7 +4991,7 @@
           <a:noFill/>
         </p:spPr>
         <p:txBody>
-          <a:bodyPr wrap="square" lIns="0" rIns="0" tIns="0" bIns="0" anchor="t">
+          <a:bodyPr wrap="square" lIns="0" tIns="0" rIns="0" bIns="0" anchor="t">
             <a:spAutoFit/>
           </a:bodyPr>
           <a:lstStyle/>
@@ -4924,6 +5009,36 @@
           </a:p>
         </p:txBody>
       </p:sp>
+      <p:pic>
+        <p:nvPicPr>
+          <p:cNvPr id="19" name="Picture 18" descr="logo.png">
+            <a:extLst>
+              <a:ext uri="{FF2B5EF4-FFF2-40B4-BE49-F238E27FC236}">
+                <a16:creationId xmlns:a16="http://schemas.microsoft.com/office/drawing/2014/main" id="{2A4B8918-46C6-182D-51DB-CFDA001120C8}"/>
+              </a:ext>
+            </a:extLst>
+          </p:cNvPr>
+          <p:cNvPicPr>
+            <a:picLocks noChangeAspect="1"/>
+          </p:cNvPicPr>
+          <p:nvPr/>
+        </p:nvPicPr>
+        <p:blipFill>
+          <a:blip r:embed="rId3"/>
+          <a:stretch>
+            <a:fillRect/>
+          </a:stretch>
+        </p:blipFill>
+        <p:spPr>
+          <a:xfrm>
+            <a:off x="640080" y="6126480"/>
+            <a:ext cx="1927859" cy="502920"/>
+          </a:xfrm>
+          <a:prstGeom prst="rect">
+            <a:avLst/>
+          </a:prstGeom>
+        </p:spPr>
+      </p:pic>
     </p:spTree>
   </p:cSld>
   <p:clrMapOvr>
@@ -4933,7 +5048,7 @@
 </file>
 
 <file path=ppt/slides/slide4.xml><?xml version="1.0" encoding="utf-8"?>
-<p:sld xmlns:a="http://schemas.openxmlformats.org/drawingml/2006/main" xmlns:p="http://schemas.openxmlformats.org/presentationml/2006/main" xmlns:r="http://schemas.openxmlformats.org/officeDocument/2006/relationships">
+<p:sld xmlns:a="http://schemas.openxmlformats.org/drawingml/2006/main" xmlns:r="http://schemas.openxmlformats.org/officeDocument/2006/relationships" xmlns:p="http://schemas.openxmlformats.org/presentationml/2006/main">
   <p:cSld>
     <p:spTree>
       <p:nvGrpSpPr>
@@ -4941,7 +5056,14 @@
         <p:cNvGrpSpPr/>
         <p:nvPr/>
       </p:nvGrpSpPr>
-      <p:grpSpPr/>
+      <p:grpSpPr>
+        <a:xfrm>
+          <a:off x="0" y="0"/>
+          <a:ext cx="0" cy="0"/>
+          <a:chOff x="0" y="0"/>
+          <a:chExt cx="0" cy="0"/>
+        </a:xfrm>
+      </p:grpSpPr>
       <p:sp>
         <p:nvSpPr>
           <p:cNvPr id="2" name="TextBox 1"/>
@@ -4959,7 +5081,7 @@
           <a:noFill/>
         </p:spPr>
         <p:txBody>
-          <a:bodyPr wrap="square" lIns="0" rIns="0" tIns="0" bIns="0" anchor="t">
+          <a:bodyPr wrap="square" lIns="0" tIns="0" rIns="0" bIns="0" anchor="t">
             <a:spAutoFit/>
           </a:bodyPr>
           <a:lstStyle/>
@@ -4985,7 +5107,7 @@
         </p:nvSpPr>
         <p:spPr>
           <a:xfrm>
-            <a:off x="335127" y="3657600"/>
+            <a:off x="7715641" y="6035040"/>
             <a:ext cx="3657600" cy="548640"/>
           </a:xfrm>
           <a:prstGeom prst="rect">
@@ -4994,90 +5116,20 @@
           <a:noFill/>
         </p:spPr>
         <p:txBody>
-          <a:bodyPr wrap="square" lIns="0" rIns="0" tIns="0" bIns="0" anchor="t">
+          <a:bodyPr wrap="square" lIns="0" tIns="0" rIns="0" bIns="0" anchor="t">
             <a:spAutoFit/>
           </a:bodyPr>
           <a:lstStyle/>
           <a:p>
             <a:pPr algn="ctr"/>
             <a:r>
-              <a:rPr sz="1100" b="0">
+              <a:rPr sz="1100" b="0" dirty="0">
                 <a:solidFill>
                   <a:srgbClr val="475569"/>
                 </a:solidFill>
                 <a:latin typeface="Calibri"/>
               </a:rPr>
               <a:t>Form: bullets, donor segment, meeting type</a:t>
-            </a:r>
-          </a:p>
-        </p:txBody>
-      </p:sp>
-      <p:sp>
-        <p:nvSpPr>
-          <p:cNvPr id="6" name="TextBox 5"/>
-          <p:cNvSpPr txBox="1"/>
-          <p:nvPr/>
-        </p:nvSpPr>
-        <p:spPr>
-          <a:xfrm>
-            <a:off x="4267047" y="3657600"/>
-            <a:ext cx="3657600" cy="548640"/>
-          </a:xfrm>
-          <a:prstGeom prst="rect">
-            <a:avLst/>
-          </a:prstGeom>
-          <a:noFill/>
-        </p:spPr>
-        <p:txBody>
-          <a:bodyPr wrap="square" lIns="0" rIns="0" tIns="0" bIns="0" anchor="t">
-            <a:spAutoFit/>
-          </a:bodyPr>
-          <a:lstStyle/>
-          <a:p>
-            <a:pPr algn="ctr"/>
-            <a:r>
-              <a:rPr sz="1100" b="0">
-                <a:solidFill>
-                  <a:srgbClr val="475569"/>
-                </a:solidFill>
-                <a:latin typeface="Calibri"/>
-              </a:rPr>
-              <a:t>Outputs: schema-valid note + voice-anchored email + refs used</a:t>
-            </a:r>
-          </a:p>
-        </p:txBody>
-      </p:sp>
-      <p:sp>
-        <p:nvSpPr>
-          <p:cNvPr id="8" name="TextBox 7"/>
-          <p:cNvSpPr txBox="1"/>
-          <p:nvPr/>
-        </p:nvSpPr>
-        <p:spPr>
-          <a:xfrm>
-            <a:off x="8198967" y="3657600"/>
-            <a:ext cx="3657600" cy="548640"/>
-          </a:xfrm>
-          <a:prstGeom prst="rect">
-            <a:avLst/>
-          </a:prstGeom>
-          <a:noFill/>
-        </p:spPr>
-        <p:txBody>
-          <a:bodyPr wrap="square" lIns="0" rIns="0" tIns="0" bIns="0" anchor="t">
-            <a:spAutoFit/>
-          </a:bodyPr>
-          <a:lstStyle/>
-          <a:p>
-            <a:pPr algn="ctr"/>
-            <a:r>
-              <a:rPr sz="1100" b="0">
-                <a:solidFill>
-                  <a:srgbClr val="475569"/>
-                </a:solidFill>
-                <a:latin typeface="Calibri"/>
-              </a:rPr>
-              <a:t>Filed: approved entry in the mock Salesforce log</a:t>
             </a:r>
           </a:p>
         </p:txBody>
@@ -5099,7 +5151,7 @@
           <a:noFill/>
         </p:spPr>
         <p:txBody>
-          <a:bodyPr wrap="square" lIns="0" rIns="0" tIns="0" bIns="0" anchor="t">
+          <a:bodyPr wrap="square" lIns="0" tIns="0" rIns="0" bIns="0" anchor="t">
             <a:spAutoFit/>
           </a:bodyPr>
           <a:lstStyle/>
@@ -5126,15 +5178,15 @@
           <p:nvPr/>
         </p:nvPicPr>
         <p:blipFill>
-          <a:blip r:embed="rId6"/>
+          <a:blip r:embed="rId3"/>
           <a:stretch>
             <a:fillRect/>
           </a:stretch>
         </p:blipFill>
         <p:spPr>
           <a:xfrm>
-            <a:off x="335127" y="1554480"/>
-            <a:ext cx="3657600" cy="1941963"/>
+            <a:off x="1402939" y="914584"/>
+            <a:ext cx="9385815" cy="4983296"/>
           </a:xfrm>
           <a:prstGeom prst="rect">
             <a:avLst/>
@@ -5143,46 +5195,28 @@
       </p:pic>
       <p:pic>
         <p:nvPicPr>
-          <p:cNvPr id="11" name="Picture 10" descr="02_outputs.png"/>
+          <p:cNvPr id="3" name="Picture 2" descr="logo.png">
+            <a:extLst>
+              <a:ext uri="{FF2B5EF4-FFF2-40B4-BE49-F238E27FC236}">
+                <a16:creationId xmlns:a16="http://schemas.microsoft.com/office/drawing/2014/main" id="{33CD55DE-570E-F113-1948-175F13D42E0B}"/>
+              </a:ext>
+            </a:extLst>
+          </p:cNvPr>
           <p:cNvPicPr>
             <a:picLocks noChangeAspect="1"/>
           </p:cNvPicPr>
           <p:nvPr/>
         </p:nvPicPr>
         <p:blipFill>
-          <a:blip r:embed="rId7"/>
+          <a:blip r:embed="rId4"/>
           <a:stretch>
             <a:fillRect/>
           </a:stretch>
         </p:blipFill>
         <p:spPr>
           <a:xfrm>
-            <a:off x="4267047" y="1554480"/>
-            <a:ext cx="3657600" cy="2025630"/>
-          </a:xfrm>
-          <a:prstGeom prst="rect">
-            <a:avLst/>
-          </a:prstGeom>
-        </p:spPr>
-      </p:pic>
-      <p:pic>
-        <p:nvPicPr>
-          <p:cNvPr id="12" name="Picture 11" descr="03_filed.png"/>
-          <p:cNvPicPr>
-            <a:picLocks noChangeAspect="1"/>
-          </p:cNvPicPr>
-          <p:nvPr/>
-        </p:nvPicPr>
-        <p:blipFill>
-          <a:blip r:embed="rId8"/>
-          <a:stretch>
-            <a:fillRect/>
-          </a:stretch>
-        </p:blipFill>
-        <p:spPr>
-          <a:xfrm>
-            <a:off x="8198967" y="1554480"/>
-            <a:ext cx="3657600" cy="850382"/>
+            <a:off x="640080" y="6126480"/>
+            <a:ext cx="1927859" cy="502920"/>
           </a:xfrm>
           <a:prstGeom prst="rect">
             <a:avLst/>
@@ -5198,18 +5232,37 @@
 </file>
 
 <file path=ppt/slides/slide5.xml><?xml version="1.0" encoding="utf-8"?>
-<p:sld xmlns:a="http://schemas.openxmlformats.org/drawingml/2006/main" xmlns:p="http://schemas.openxmlformats.org/presentationml/2006/main" xmlns:r="http://schemas.openxmlformats.org/officeDocument/2006/relationships">
+<p:sld xmlns:a="http://schemas.openxmlformats.org/drawingml/2006/main" xmlns:r="http://schemas.openxmlformats.org/officeDocument/2006/relationships" xmlns:p="http://schemas.openxmlformats.org/presentationml/2006/main">
   <p:cSld>
     <p:spTree>
       <p:nvGrpSpPr>
-        <p:cNvPr id="1" name=""/>
+        <p:cNvPr id="1" name="">
+          <a:extLst>
+            <a:ext uri="{FF2B5EF4-FFF2-40B4-BE49-F238E27FC236}">
+              <a16:creationId xmlns:a16="http://schemas.microsoft.com/office/drawing/2014/main" id="{929414A4-9209-BF5B-F447-CFEA9A050169}"/>
+            </a:ext>
+          </a:extLst>
+        </p:cNvPr>
         <p:cNvGrpSpPr/>
         <p:nvPr/>
       </p:nvGrpSpPr>
-      <p:grpSpPr/>
-      <p:sp>
-        <p:nvSpPr>
-          <p:cNvPr id="2" name="TextBox 1"/>
+      <p:grpSpPr>
+        <a:xfrm>
+          <a:off x="0" y="0"/>
+          <a:ext cx="0" cy="0"/>
+          <a:chOff x="0" y="0"/>
+          <a:chExt cx="0" cy="0"/>
+        </a:xfrm>
+      </p:grpSpPr>
+      <p:sp>
+        <p:nvSpPr>
+          <p:cNvPr id="2" name="TextBox 1">
+            <a:extLst>
+              <a:ext uri="{FF2B5EF4-FFF2-40B4-BE49-F238E27FC236}">
+                <a16:creationId xmlns:a16="http://schemas.microsoft.com/office/drawing/2014/main" id="{0224752D-B23E-34F3-82D6-427746FDB722}"/>
+              </a:ext>
+            </a:extLst>
+          </p:cNvPr>
           <p:cNvSpPr txBox="1"/>
           <p:nvPr/>
         </p:nvSpPr>
@@ -5224,7 +5277,433 @@
           <a:noFill/>
         </p:spPr>
         <p:txBody>
-          <a:bodyPr wrap="square" lIns="0" rIns="0" tIns="0" bIns="0" anchor="t">
+          <a:bodyPr wrap="square" lIns="0" tIns="0" rIns="0" bIns="0" anchor="t">
+            <a:spAutoFit/>
+          </a:bodyPr>
+          <a:lstStyle/>
+          <a:p>
+            <a:pPr algn="l"/>
+            <a:r>
+              <a:rPr sz="3400" b="1">
+                <a:solidFill>
+                  <a:srgbClr val="1F3A5F"/>
+                </a:solidFill>
+                <a:latin typeface="Calibri"/>
+              </a:rPr>
+              <a:t>The system in action</a:t>
+            </a:r>
+          </a:p>
+        </p:txBody>
+      </p:sp>
+      <p:sp>
+        <p:nvSpPr>
+          <p:cNvPr id="6" name="TextBox 5">
+            <a:extLst>
+              <a:ext uri="{FF2B5EF4-FFF2-40B4-BE49-F238E27FC236}">
+                <a16:creationId xmlns:a16="http://schemas.microsoft.com/office/drawing/2014/main" id="{0314374A-D972-9196-993A-FE74A3F9555A}"/>
+              </a:ext>
+            </a:extLst>
+          </p:cNvPr>
+          <p:cNvSpPr txBox="1"/>
+          <p:nvPr/>
+        </p:nvSpPr>
+        <p:spPr>
+          <a:xfrm>
+            <a:off x="6515024" y="5715000"/>
+            <a:ext cx="3657600" cy="548640"/>
+          </a:xfrm>
+          <a:prstGeom prst="rect">
+            <a:avLst/>
+          </a:prstGeom>
+          <a:noFill/>
+        </p:spPr>
+        <p:txBody>
+          <a:bodyPr wrap="square" lIns="0" tIns="0" rIns="0" bIns="0" anchor="t">
+            <a:spAutoFit/>
+          </a:bodyPr>
+          <a:lstStyle/>
+          <a:p>
+            <a:pPr algn="ctr"/>
+            <a:r>
+              <a:rPr sz="1100" b="0" dirty="0">
+                <a:solidFill>
+                  <a:srgbClr val="475569"/>
+                </a:solidFill>
+                <a:latin typeface="Calibri"/>
+              </a:rPr>
+              <a:t>Outputs: schema-valid note + voice-anchored email + refs used</a:t>
+            </a:r>
+          </a:p>
+        </p:txBody>
+      </p:sp>
+      <p:sp>
+        <p:nvSpPr>
+          <p:cNvPr id="9" name="TextBox 8">
+            <a:extLst>
+              <a:ext uri="{FF2B5EF4-FFF2-40B4-BE49-F238E27FC236}">
+                <a16:creationId xmlns:a16="http://schemas.microsoft.com/office/drawing/2014/main" id="{631AFB38-E438-FC75-3068-2BCF978D5307}"/>
+              </a:ext>
+            </a:extLst>
+          </p:cNvPr>
+          <p:cNvSpPr txBox="1"/>
+          <p:nvPr/>
+        </p:nvSpPr>
+        <p:spPr>
+          <a:xfrm>
+            <a:off x="11094415" y="6446520"/>
+            <a:ext cx="914400" cy="274320"/>
+          </a:xfrm>
+          <a:prstGeom prst="rect">
+            <a:avLst/>
+          </a:prstGeom>
+          <a:noFill/>
+        </p:spPr>
+        <p:txBody>
+          <a:bodyPr wrap="square" lIns="0" tIns="0" rIns="0" bIns="0" anchor="t">
+            <a:spAutoFit/>
+          </a:bodyPr>
+          <a:lstStyle/>
+          <a:p>
+            <a:pPr algn="r"/>
+            <a:r>
+              <a:rPr sz="1000" b="0">
+                <a:solidFill>
+                  <a:srgbClr val="475569"/>
+                </a:solidFill>
+                <a:latin typeface="Calibri"/>
+              </a:rPr>
+              <a:t>4 / 6</a:t>
+            </a:r>
+          </a:p>
+        </p:txBody>
+      </p:sp>
+      <p:pic>
+        <p:nvPicPr>
+          <p:cNvPr id="11" name="Picture 10" descr="02_outputs.png">
+            <a:extLst>
+              <a:ext uri="{FF2B5EF4-FFF2-40B4-BE49-F238E27FC236}">
+                <a16:creationId xmlns:a16="http://schemas.microsoft.com/office/drawing/2014/main" id="{18A41678-9641-35A8-0EEC-82185D84262B}"/>
+              </a:ext>
+            </a:extLst>
+          </p:cNvPr>
+          <p:cNvPicPr>
+            <a:picLocks noChangeAspect="1"/>
+          </p:cNvPicPr>
+          <p:nvPr/>
+        </p:nvPicPr>
+        <p:blipFill>
+          <a:blip r:embed="rId3"/>
+          <a:stretch>
+            <a:fillRect/>
+          </a:stretch>
+        </p:blipFill>
+        <p:spPr>
+          <a:xfrm>
+            <a:off x="2019070" y="1125504"/>
+            <a:ext cx="8153554" cy="4515552"/>
+          </a:xfrm>
+          <a:prstGeom prst="rect">
+            <a:avLst/>
+          </a:prstGeom>
+        </p:spPr>
+      </p:pic>
+      <p:pic>
+        <p:nvPicPr>
+          <p:cNvPr id="3" name="Picture 2" descr="logo.png">
+            <a:extLst>
+              <a:ext uri="{FF2B5EF4-FFF2-40B4-BE49-F238E27FC236}">
+                <a16:creationId xmlns:a16="http://schemas.microsoft.com/office/drawing/2014/main" id="{67917F3B-8009-79E0-58D1-3FBBEF5AB371}"/>
+              </a:ext>
+            </a:extLst>
+          </p:cNvPr>
+          <p:cNvPicPr>
+            <a:picLocks noChangeAspect="1"/>
+          </p:cNvPicPr>
+          <p:nvPr/>
+        </p:nvPicPr>
+        <p:blipFill>
+          <a:blip r:embed="rId4"/>
+          <a:stretch>
+            <a:fillRect/>
+          </a:stretch>
+        </p:blipFill>
+        <p:spPr>
+          <a:xfrm>
+            <a:off x="640080" y="6126480"/>
+            <a:ext cx="1927859" cy="502920"/>
+          </a:xfrm>
+          <a:prstGeom prst="rect">
+            <a:avLst/>
+          </a:prstGeom>
+        </p:spPr>
+      </p:pic>
+    </p:spTree>
+    <p:extLst>
+      <p:ext uri="{BB962C8B-B14F-4D97-AF65-F5344CB8AC3E}">
+        <p14:creationId xmlns:p14="http://schemas.microsoft.com/office/powerpoint/2010/main" val="2896136473"/>
+      </p:ext>
+    </p:extLst>
+  </p:cSld>
+  <p:clrMapOvr>
+    <a:masterClrMapping/>
+  </p:clrMapOvr>
+</p:sld>
+</file>
+
+<file path=ppt/slides/slide6.xml><?xml version="1.0" encoding="utf-8"?>
+<p:sld xmlns:a="http://schemas.openxmlformats.org/drawingml/2006/main" xmlns:r="http://schemas.openxmlformats.org/officeDocument/2006/relationships" xmlns:p="http://schemas.openxmlformats.org/presentationml/2006/main">
+  <p:cSld>
+    <p:spTree>
+      <p:nvGrpSpPr>
+        <p:cNvPr id="1" name="">
+          <a:extLst>
+            <a:ext uri="{FF2B5EF4-FFF2-40B4-BE49-F238E27FC236}">
+              <a16:creationId xmlns:a16="http://schemas.microsoft.com/office/drawing/2014/main" id="{D3BEA718-5554-0A1A-2357-8278069D8B04}"/>
+            </a:ext>
+          </a:extLst>
+        </p:cNvPr>
+        <p:cNvGrpSpPr/>
+        <p:nvPr/>
+      </p:nvGrpSpPr>
+      <p:grpSpPr>
+        <a:xfrm>
+          <a:off x="0" y="0"/>
+          <a:ext cx="0" cy="0"/>
+          <a:chOff x="0" y="0"/>
+          <a:chExt cx="0" cy="0"/>
+        </a:xfrm>
+      </p:grpSpPr>
+      <p:sp>
+        <p:nvSpPr>
+          <p:cNvPr id="2" name="TextBox 1">
+            <a:extLst>
+              <a:ext uri="{FF2B5EF4-FFF2-40B4-BE49-F238E27FC236}">
+                <a16:creationId xmlns:a16="http://schemas.microsoft.com/office/drawing/2014/main" id="{737D7A9D-315F-68DC-FB19-3650E2B8847D}"/>
+              </a:ext>
+            </a:extLst>
+          </p:cNvPr>
+          <p:cNvSpPr txBox="1"/>
+          <p:nvPr/>
+        </p:nvSpPr>
+        <p:spPr>
+          <a:xfrm>
+            <a:off x="640080" y="411480"/>
+            <a:ext cx="10911535" cy="640080"/>
+          </a:xfrm>
+          <a:prstGeom prst="rect">
+            <a:avLst/>
+          </a:prstGeom>
+          <a:noFill/>
+        </p:spPr>
+        <p:txBody>
+          <a:bodyPr wrap="square" lIns="0" tIns="0" rIns="0" bIns="0" anchor="t">
+            <a:spAutoFit/>
+          </a:bodyPr>
+          <a:lstStyle/>
+          <a:p>
+            <a:pPr algn="l"/>
+            <a:r>
+              <a:rPr sz="3400" b="1">
+                <a:solidFill>
+                  <a:srgbClr val="1F3A5F"/>
+                </a:solidFill>
+                <a:latin typeface="Calibri"/>
+              </a:rPr>
+              <a:t>The system in action</a:t>
+            </a:r>
+          </a:p>
+        </p:txBody>
+      </p:sp>
+      <p:sp>
+        <p:nvSpPr>
+          <p:cNvPr id="8" name="TextBox 7">
+            <a:extLst>
+              <a:ext uri="{FF2B5EF4-FFF2-40B4-BE49-F238E27FC236}">
+                <a16:creationId xmlns:a16="http://schemas.microsoft.com/office/drawing/2014/main" id="{CAB35E17-3903-177D-3DA7-981E60F5974D}"/>
+              </a:ext>
+            </a:extLst>
+          </p:cNvPr>
+          <p:cNvSpPr txBox="1"/>
+          <p:nvPr/>
+        </p:nvSpPr>
+        <p:spPr>
+          <a:xfrm>
+            <a:off x="8133500" y="3951127"/>
+            <a:ext cx="3657600" cy="548640"/>
+          </a:xfrm>
+          <a:prstGeom prst="rect">
+            <a:avLst/>
+          </a:prstGeom>
+          <a:noFill/>
+        </p:spPr>
+        <p:txBody>
+          <a:bodyPr wrap="square" lIns="0" tIns="0" rIns="0" bIns="0" anchor="t">
+            <a:spAutoFit/>
+          </a:bodyPr>
+          <a:lstStyle/>
+          <a:p>
+            <a:pPr algn="ctr"/>
+            <a:r>
+              <a:rPr sz="1100" b="0" dirty="0">
+                <a:solidFill>
+                  <a:srgbClr val="475569"/>
+                </a:solidFill>
+                <a:latin typeface="Calibri"/>
+              </a:rPr>
+              <a:t>Filed: approved entry in the mock Salesforce log</a:t>
+            </a:r>
+          </a:p>
+        </p:txBody>
+      </p:sp>
+      <p:sp>
+        <p:nvSpPr>
+          <p:cNvPr id="9" name="TextBox 8">
+            <a:extLst>
+              <a:ext uri="{FF2B5EF4-FFF2-40B4-BE49-F238E27FC236}">
+                <a16:creationId xmlns:a16="http://schemas.microsoft.com/office/drawing/2014/main" id="{51B3B816-0F38-6902-E1D9-6642C149D80A}"/>
+              </a:ext>
+            </a:extLst>
+          </p:cNvPr>
+          <p:cNvSpPr txBox="1"/>
+          <p:nvPr/>
+        </p:nvSpPr>
+        <p:spPr>
+          <a:xfrm>
+            <a:off x="11094415" y="6446520"/>
+            <a:ext cx="914400" cy="274320"/>
+          </a:xfrm>
+          <a:prstGeom prst="rect">
+            <a:avLst/>
+          </a:prstGeom>
+          <a:noFill/>
+        </p:spPr>
+        <p:txBody>
+          <a:bodyPr wrap="square" lIns="0" tIns="0" rIns="0" bIns="0" anchor="t">
+            <a:spAutoFit/>
+          </a:bodyPr>
+          <a:lstStyle/>
+          <a:p>
+            <a:pPr algn="r"/>
+            <a:r>
+              <a:rPr sz="1000" b="0">
+                <a:solidFill>
+                  <a:srgbClr val="475569"/>
+                </a:solidFill>
+                <a:latin typeface="Calibri"/>
+              </a:rPr>
+              <a:t>4 / 6</a:t>
+            </a:r>
+          </a:p>
+        </p:txBody>
+      </p:sp>
+      <p:pic>
+        <p:nvPicPr>
+          <p:cNvPr id="12" name="Picture 11" descr="03_filed.png">
+            <a:extLst>
+              <a:ext uri="{FF2B5EF4-FFF2-40B4-BE49-F238E27FC236}">
+                <a16:creationId xmlns:a16="http://schemas.microsoft.com/office/drawing/2014/main" id="{89DEB19B-D931-C989-3132-E0FB170FA174}"/>
+              </a:ext>
+            </a:extLst>
+          </p:cNvPr>
+          <p:cNvPicPr>
+            <a:picLocks noChangeAspect="1"/>
+          </p:cNvPicPr>
+          <p:nvPr/>
+        </p:nvPicPr>
+        <p:blipFill>
+          <a:blip r:embed="rId3"/>
+          <a:stretch>
+            <a:fillRect/>
+          </a:stretch>
+        </p:blipFill>
+        <p:spPr>
+          <a:xfrm>
+            <a:off x="837035" y="1349441"/>
+            <a:ext cx="10517624" cy="2445319"/>
+          </a:xfrm>
+          <a:prstGeom prst="rect">
+            <a:avLst/>
+          </a:prstGeom>
+        </p:spPr>
+      </p:pic>
+      <p:pic>
+        <p:nvPicPr>
+          <p:cNvPr id="3" name="Picture 2" descr="logo.png">
+            <a:extLst>
+              <a:ext uri="{FF2B5EF4-FFF2-40B4-BE49-F238E27FC236}">
+                <a16:creationId xmlns:a16="http://schemas.microsoft.com/office/drawing/2014/main" id="{752F66E1-8732-601B-47B8-646D7A8D932B}"/>
+              </a:ext>
+            </a:extLst>
+          </p:cNvPr>
+          <p:cNvPicPr>
+            <a:picLocks noChangeAspect="1"/>
+          </p:cNvPicPr>
+          <p:nvPr/>
+        </p:nvPicPr>
+        <p:blipFill>
+          <a:blip r:embed="rId4"/>
+          <a:stretch>
+            <a:fillRect/>
+          </a:stretch>
+        </p:blipFill>
+        <p:spPr>
+          <a:xfrm>
+            <a:off x="640080" y="6126480"/>
+            <a:ext cx="1927859" cy="502920"/>
+          </a:xfrm>
+          <a:prstGeom prst="rect">
+            <a:avLst/>
+          </a:prstGeom>
+        </p:spPr>
+      </p:pic>
+    </p:spTree>
+    <p:extLst>
+      <p:ext uri="{BB962C8B-B14F-4D97-AF65-F5344CB8AC3E}">
+        <p14:creationId xmlns:p14="http://schemas.microsoft.com/office/powerpoint/2010/main" val="907536372"/>
+      </p:ext>
+    </p:extLst>
+  </p:cSld>
+  <p:clrMapOvr>
+    <a:masterClrMapping/>
+  </p:clrMapOvr>
+</p:sld>
+</file>
+
+<file path=ppt/slides/slide7.xml><?xml version="1.0" encoding="utf-8"?>
+<p:sld xmlns:a="http://schemas.openxmlformats.org/drawingml/2006/main" xmlns:r="http://schemas.openxmlformats.org/officeDocument/2006/relationships" xmlns:p="http://schemas.openxmlformats.org/presentationml/2006/main">
+  <p:cSld>
+    <p:spTree>
+      <p:nvGrpSpPr>
+        <p:cNvPr id="1" name=""/>
+        <p:cNvGrpSpPr/>
+        <p:nvPr/>
+      </p:nvGrpSpPr>
+      <p:grpSpPr>
+        <a:xfrm>
+          <a:off x="0" y="0"/>
+          <a:ext cx="0" cy="0"/>
+          <a:chOff x="0" y="0"/>
+          <a:chExt cx="0" cy="0"/>
+        </a:xfrm>
+      </p:grpSpPr>
+      <p:sp>
+        <p:nvSpPr>
+          <p:cNvPr id="2" name="TextBox 1"/>
+          <p:cNvSpPr txBox="1"/>
+          <p:nvPr/>
+        </p:nvSpPr>
+        <p:spPr>
+          <a:xfrm>
+            <a:off x="640080" y="411480"/>
+            <a:ext cx="10911535" cy="640080"/>
+          </a:xfrm>
+          <a:prstGeom prst="rect">
+            <a:avLst/>
+          </a:prstGeom>
+          <a:noFill/>
+        </p:spPr>
+        <p:txBody>
+          <a:bodyPr wrap="square" lIns="0" tIns="0" rIns="0" bIns="0" anchor="t">
             <a:spAutoFit/>
           </a:bodyPr>
           <a:lstStyle/>
@@ -5259,7 +5738,7 @@
           <a:noFill/>
         </p:spPr>
         <p:txBody>
-          <a:bodyPr wrap="square" lIns="0" rIns="0" tIns="0" bIns="0">
+          <a:bodyPr wrap="square" lIns="0" tIns="0" rIns="0" bIns="0">
             <a:spAutoFit/>
           </a:bodyPr>
           <a:lstStyle/>
@@ -5317,10 +5796,16 @@
           <p:cNvGraphicFramePr>
             <a:graphicFrameLocks noGrp="1"/>
           </p:cNvGraphicFramePr>
-          <p:nvPr/>
+          <p:nvPr>
+            <p:extLst>
+              <p:ext uri="{D42A27DB-BD31-4B8C-83A1-F6EECF244321}">
+                <p14:modId xmlns:p14="http://schemas.microsoft.com/office/powerpoint/2010/main" val="1873352944"/>
+              </p:ext>
+            </p:extLst>
+          </p:nvPr>
         </p:nvGraphicFramePr>
         <p:xfrm>
-          <a:off x="1295247.5" y="3931920"/>
+          <a:off x="1295247" y="3093720"/>
           <a:ext cx="9601200" cy="1965960"/>
         </p:xfrm>
         <a:graphic>
@@ -5330,16 +5815,46 @@
                 <a:tableStyleId>{5C22544A-7EE6-4342-B048-85BDC9FD1C3A}</a:tableStyleId>
               </a:tblPr>
               <a:tblGrid>
-                <a:gridCol w="2286000"/>
-                <a:gridCol w="1828800"/>
-                <a:gridCol w="1828800"/>
-                <a:gridCol w="1828800"/>
-                <a:gridCol w="1828800"/>
+                <a:gridCol w="2286000">
+                  <a:extLst>
+                    <a:ext uri="{9D8B030D-6E8A-4147-A177-3AD203B41FA5}">
+                      <a16:colId xmlns:a16="http://schemas.microsoft.com/office/drawing/2014/main" val="20000"/>
+                    </a:ext>
+                  </a:extLst>
+                </a:gridCol>
+                <a:gridCol w="1828800">
+                  <a:extLst>
+                    <a:ext uri="{9D8B030D-6E8A-4147-A177-3AD203B41FA5}">
+                      <a16:colId xmlns:a16="http://schemas.microsoft.com/office/drawing/2014/main" val="20001"/>
+                    </a:ext>
+                  </a:extLst>
+                </a:gridCol>
+                <a:gridCol w="1828800">
+                  <a:extLst>
+                    <a:ext uri="{9D8B030D-6E8A-4147-A177-3AD203B41FA5}">
+                      <a16:colId xmlns:a16="http://schemas.microsoft.com/office/drawing/2014/main" val="20002"/>
+                    </a:ext>
+                  </a:extLst>
+                </a:gridCol>
+                <a:gridCol w="1828800">
+                  <a:extLst>
+                    <a:ext uri="{9D8B030D-6E8A-4147-A177-3AD203B41FA5}">
+                      <a16:colId xmlns:a16="http://schemas.microsoft.com/office/drawing/2014/main" val="20003"/>
+                    </a:ext>
+                  </a:extLst>
+                </a:gridCol>
+                <a:gridCol w="1828800">
+                  <a:extLst>
+                    <a:ext uri="{9D8B030D-6E8A-4147-A177-3AD203B41FA5}">
+                      <a16:colId xmlns:a16="http://schemas.microsoft.com/office/drawing/2014/main" val="20004"/>
+                    </a:ext>
+                  </a:extLst>
+                </a:gridCol>
               </a:tblGrid>
               <a:tr h="457200">
                 <a:tc>
                   <a:txBody>
-                    <a:bodyPr wrap="square"/>
+                    <a:bodyPr/>
                     <a:lstStyle/>
                     <a:p>
                       <a:pPr algn="l"/>
@@ -5354,7 +5869,7 @@
                       </a:r>
                     </a:p>
                   </a:txBody>
-                  <a:tcPr marL="109728" marR="109728" marT="45720" marB="45720" anchor="ctr">
+                  <a:tcPr marL="109728" marR="109728" anchor="ctr">
                     <a:solidFill>
                       <a:srgbClr val="0EA5A4"/>
                     </a:solidFill>
@@ -5362,7 +5877,7 @@
                 </a:tc>
                 <a:tc>
                   <a:txBody>
-                    <a:bodyPr wrap="square"/>
+                    <a:bodyPr/>
                     <a:lstStyle/>
                     <a:p>
                       <a:pPr algn="r"/>
@@ -5377,7 +5892,7 @@
                       </a:r>
                     </a:p>
                   </a:txBody>
-                  <a:tcPr marL="109728" marR="109728" marT="45720" marB="45720" anchor="ctr">
+                  <a:tcPr marL="109728" marR="109728" anchor="ctr">
                     <a:solidFill>
                       <a:srgbClr val="0EA5A4"/>
                     </a:solidFill>
@@ -5385,7 +5900,7 @@
                 </a:tc>
                 <a:tc>
                   <a:txBody>
-                    <a:bodyPr wrap="square"/>
+                    <a:bodyPr/>
                     <a:lstStyle/>
                     <a:p>
                       <a:pPr algn="r"/>
@@ -5400,7 +5915,7 @@
                       </a:r>
                     </a:p>
                   </a:txBody>
-                  <a:tcPr marL="109728" marR="109728" marT="45720" marB="45720" anchor="ctr">
+                  <a:tcPr marL="109728" marR="109728" anchor="ctr">
                     <a:solidFill>
                       <a:srgbClr val="0EA5A4"/>
                     </a:solidFill>
@@ -5408,7 +5923,7 @@
                 </a:tc>
                 <a:tc>
                   <a:txBody>
-                    <a:bodyPr wrap="square"/>
+                    <a:bodyPr/>
                     <a:lstStyle/>
                     <a:p>
                       <a:pPr algn="r"/>
@@ -5423,7 +5938,7 @@
                       </a:r>
                     </a:p>
                   </a:txBody>
-                  <a:tcPr marL="109728" marR="109728" marT="45720" marB="45720" anchor="ctr">
+                  <a:tcPr marL="109728" marR="109728" anchor="ctr">
                     <a:solidFill>
                       <a:srgbClr val="0EA5A4"/>
                     </a:solidFill>
@@ -5431,7 +5946,7 @@
                 </a:tc>
                 <a:tc>
                   <a:txBody>
-                    <a:bodyPr wrap="square"/>
+                    <a:bodyPr/>
                     <a:lstStyle/>
                     <a:p>
                       <a:pPr algn="r"/>
@@ -5446,17 +5961,22 @@
                       </a:r>
                     </a:p>
                   </a:txBody>
-                  <a:tcPr marL="109728" marR="109728" marT="45720" marB="45720" anchor="ctr">
+                  <a:tcPr marL="109728" marR="109728" anchor="ctr">
                     <a:solidFill>
                       <a:srgbClr val="0EA5A4"/>
                     </a:solidFill>
                   </a:tcPr>
                 </a:tc>
+                <a:extLst>
+                  <a:ext uri="{0D108BD9-81ED-4DB2-BD59-A6C34878D82A}">
+                    <a16:rowId xmlns:a16="http://schemas.microsoft.com/office/drawing/2014/main" val="10000"/>
+                  </a:ext>
+                </a:extLst>
               </a:tr>
               <a:tr h="502920">
                 <a:tc>
                   <a:txBody>
-                    <a:bodyPr wrap="square"/>
+                    <a:bodyPr/>
                     <a:lstStyle/>
                     <a:p>
                       <a:pPr algn="l"/>
@@ -5471,7 +5991,7 @@
                       </a:r>
                     </a:p>
                   </a:txBody>
-                  <a:tcPr marL="109728" marR="109728" marT="45720" marB="45720" anchor="ctr">
+                  <a:tcPr marL="109728" marR="109728" anchor="ctr">
                     <a:solidFill>
                       <a:srgbClr val="FFFFFF"/>
                     </a:solidFill>
@@ -5479,7 +5999,7 @@
                 </a:tc>
                 <a:tc>
                   <a:txBody>
-                    <a:bodyPr wrap="square"/>
+                    <a:bodyPr/>
                     <a:lstStyle/>
                     <a:p>
                       <a:pPr algn="r"/>
@@ -5494,7 +6014,7 @@
                       </a:r>
                     </a:p>
                   </a:txBody>
-                  <a:tcPr marL="109728" marR="109728" marT="45720" marB="45720" anchor="ctr">
+                  <a:tcPr marL="109728" marR="109728" anchor="ctr">
                     <a:solidFill>
                       <a:srgbClr val="FFFFFF"/>
                     </a:solidFill>
@@ -5502,7 +6022,7 @@
                 </a:tc>
                 <a:tc>
                   <a:txBody>
-                    <a:bodyPr wrap="square"/>
+                    <a:bodyPr/>
                     <a:lstStyle/>
                     <a:p>
                       <a:pPr algn="r"/>
@@ -5517,7 +6037,7 @@
                       </a:r>
                     </a:p>
                   </a:txBody>
-                  <a:tcPr marL="109728" marR="109728" marT="45720" marB="45720" anchor="ctr">
+                  <a:tcPr marL="109728" marR="109728" anchor="ctr">
                     <a:solidFill>
                       <a:srgbClr val="FFFFFF"/>
                     </a:solidFill>
@@ -5525,7 +6045,7 @@
                 </a:tc>
                 <a:tc>
                   <a:txBody>
-                    <a:bodyPr wrap="square"/>
+                    <a:bodyPr/>
                     <a:lstStyle/>
                     <a:p>
                       <a:pPr algn="r"/>
@@ -5540,7 +6060,7 @@
                       </a:r>
                     </a:p>
                   </a:txBody>
-                  <a:tcPr marL="109728" marR="109728" marT="45720" marB="45720" anchor="ctr">
+                  <a:tcPr marL="109728" marR="109728" anchor="ctr">
                     <a:solidFill>
                       <a:srgbClr val="FFFFFF"/>
                     </a:solidFill>
@@ -5548,7 +6068,7 @@
                 </a:tc>
                 <a:tc>
                   <a:txBody>
-                    <a:bodyPr wrap="square"/>
+                    <a:bodyPr/>
                     <a:lstStyle/>
                     <a:p>
                       <a:pPr algn="r"/>
@@ -5563,17 +6083,22 @@
                       </a:r>
                     </a:p>
                   </a:txBody>
-                  <a:tcPr marL="109728" marR="109728" marT="45720" marB="45720" anchor="ctr">
+                  <a:tcPr marL="109728" marR="109728" anchor="ctr">
                     <a:solidFill>
                       <a:srgbClr val="FFFFFF"/>
                     </a:solidFill>
                   </a:tcPr>
                 </a:tc>
+                <a:extLst>
+                  <a:ext uri="{0D108BD9-81ED-4DB2-BD59-A6C34878D82A}">
+                    <a16:rowId xmlns:a16="http://schemas.microsoft.com/office/drawing/2014/main" val="10001"/>
+                  </a:ext>
+                </a:extLst>
               </a:tr>
               <a:tr h="502920">
                 <a:tc>
                   <a:txBody>
-                    <a:bodyPr wrap="square"/>
+                    <a:bodyPr/>
                     <a:lstStyle/>
                     <a:p>
                       <a:pPr algn="l"/>
@@ -5588,7 +6113,7 @@
                       </a:r>
                     </a:p>
                   </a:txBody>
-                  <a:tcPr marL="109728" marR="109728" marT="45720" marB="45720" anchor="ctr">
+                  <a:tcPr marL="109728" marR="109728" anchor="ctr">
                     <a:solidFill>
                       <a:srgbClr val="E5E7EB"/>
                     </a:solidFill>
@@ -5596,7 +6121,7 @@
                 </a:tc>
                 <a:tc>
                   <a:txBody>
-                    <a:bodyPr wrap="square"/>
+                    <a:bodyPr/>
                     <a:lstStyle/>
                     <a:p>
                       <a:pPr algn="r"/>
@@ -5611,7 +6136,7 @@
                       </a:r>
                     </a:p>
                   </a:txBody>
-                  <a:tcPr marL="109728" marR="109728" marT="45720" marB="45720" anchor="ctr">
+                  <a:tcPr marL="109728" marR="109728" anchor="ctr">
                     <a:solidFill>
                       <a:srgbClr val="E5E7EB"/>
                     </a:solidFill>
@@ -5619,7 +6144,7 @@
                 </a:tc>
                 <a:tc>
                   <a:txBody>
-                    <a:bodyPr wrap="square"/>
+                    <a:bodyPr/>
                     <a:lstStyle/>
                     <a:p>
                       <a:pPr algn="r"/>
@@ -5634,7 +6159,7 @@
                       </a:r>
                     </a:p>
                   </a:txBody>
-                  <a:tcPr marL="109728" marR="109728" marT="45720" marB="45720" anchor="ctr">
+                  <a:tcPr marL="109728" marR="109728" anchor="ctr">
                     <a:solidFill>
                       <a:srgbClr val="E5E7EB"/>
                     </a:solidFill>
@@ -5642,7 +6167,7 @@
                 </a:tc>
                 <a:tc>
                   <a:txBody>
-                    <a:bodyPr wrap="square"/>
+                    <a:bodyPr/>
                     <a:lstStyle/>
                     <a:p>
                       <a:pPr algn="r"/>
@@ -5657,7 +6182,7 @@
                       </a:r>
                     </a:p>
                   </a:txBody>
-                  <a:tcPr marL="109728" marR="109728" marT="45720" marB="45720" anchor="ctr">
+                  <a:tcPr marL="109728" marR="109728" anchor="ctr">
                     <a:solidFill>
                       <a:srgbClr val="E5E7EB"/>
                     </a:solidFill>
@@ -5665,7 +6190,7 @@
                 </a:tc>
                 <a:tc>
                   <a:txBody>
-                    <a:bodyPr wrap="square"/>
+                    <a:bodyPr/>
                     <a:lstStyle/>
                     <a:p>
                       <a:pPr algn="r"/>
@@ -5680,17 +6205,22 @@
                       </a:r>
                     </a:p>
                   </a:txBody>
-                  <a:tcPr marL="109728" marR="109728" marT="45720" marB="45720" anchor="ctr">
+                  <a:tcPr marL="109728" marR="109728" anchor="ctr">
                     <a:solidFill>
                       <a:srgbClr val="E5E7EB"/>
                     </a:solidFill>
                   </a:tcPr>
                 </a:tc>
+                <a:extLst>
+                  <a:ext uri="{0D108BD9-81ED-4DB2-BD59-A6C34878D82A}">
+                    <a16:rowId xmlns:a16="http://schemas.microsoft.com/office/drawing/2014/main" val="10002"/>
+                  </a:ext>
+                </a:extLst>
               </a:tr>
               <a:tr h="502920">
                 <a:tc>
                   <a:txBody>
-                    <a:bodyPr wrap="square"/>
+                    <a:bodyPr/>
                     <a:lstStyle/>
                     <a:p>
                       <a:pPr algn="l"/>
@@ -5705,7 +6235,7 @@
                       </a:r>
                     </a:p>
                   </a:txBody>
-                  <a:tcPr marL="109728" marR="109728" marT="45720" marB="45720" anchor="ctr">
+                  <a:tcPr marL="109728" marR="109728" anchor="ctr">
                     <a:solidFill>
                       <a:srgbClr val="FFFFFF"/>
                     </a:solidFill>
@@ -5713,7 +6243,7 @@
                 </a:tc>
                 <a:tc>
                   <a:txBody>
-                    <a:bodyPr wrap="square"/>
+                    <a:bodyPr/>
                     <a:lstStyle/>
                     <a:p>
                       <a:pPr algn="r"/>
@@ -5728,7 +6258,7 @@
                       </a:r>
                     </a:p>
                   </a:txBody>
-                  <a:tcPr marL="109728" marR="109728" marT="45720" marB="45720" anchor="ctr">
+                  <a:tcPr marL="109728" marR="109728" anchor="ctr">
                     <a:solidFill>
                       <a:srgbClr val="FFFFFF"/>
                     </a:solidFill>
@@ -5736,7 +6266,7 @@
                 </a:tc>
                 <a:tc>
                   <a:txBody>
-                    <a:bodyPr wrap="square"/>
+                    <a:bodyPr/>
                     <a:lstStyle/>
                     <a:p>
                       <a:pPr algn="r"/>
@@ -5751,7 +6281,7 @@
                       </a:r>
                     </a:p>
                   </a:txBody>
-                  <a:tcPr marL="109728" marR="109728" marT="45720" marB="45720" anchor="ctr">
+                  <a:tcPr marL="109728" marR="109728" anchor="ctr">
                     <a:solidFill>
                       <a:srgbClr val="FFFFFF"/>
                     </a:solidFill>
@@ -5759,7 +6289,7 @@
                 </a:tc>
                 <a:tc>
                   <a:txBody>
-                    <a:bodyPr wrap="square"/>
+                    <a:bodyPr/>
                     <a:lstStyle/>
                     <a:p>
                       <a:pPr algn="r"/>
@@ -5774,7 +6304,7 @@
                       </a:r>
                     </a:p>
                   </a:txBody>
-                  <a:tcPr marL="109728" marR="109728" marT="45720" marB="45720" anchor="ctr">
+                  <a:tcPr marL="109728" marR="109728" anchor="ctr">
                     <a:solidFill>
                       <a:srgbClr val="FFFFFF"/>
                     </a:solidFill>
@@ -5782,12 +6312,12 @@
                 </a:tc>
                 <a:tc>
                   <a:txBody>
-                    <a:bodyPr wrap="square"/>
+                    <a:bodyPr/>
                     <a:lstStyle/>
                     <a:p>
                       <a:pPr algn="r"/>
                       <a:r>
-                        <a:rPr sz="1400" b="0">
+                        <a:rPr sz="1400" b="0" dirty="0">
                           <a:solidFill>
                             <a:srgbClr val="475569"/>
                           </a:solidFill>
@@ -5797,12 +6327,17 @@
                       </a:r>
                     </a:p>
                   </a:txBody>
-                  <a:tcPr marL="109728" marR="109728" marT="45720" marB="45720" anchor="ctr">
+                  <a:tcPr marL="109728" marR="109728" anchor="ctr">
                     <a:solidFill>
                       <a:srgbClr val="FFFFFF"/>
                     </a:solidFill>
                   </a:tcPr>
                 </a:tc>
+                <a:extLst>
+                  <a:ext uri="{0D108BD9-81ED-4DB2-BD59-A6C34878D82A}">
+                    <a16:rowId xmlns:a16="http://schemas.microsoft.com/office/drawing/2014/main" val="10003"/>
+                  </a:ext>
+                </a:extLst>
               </a:tr>
             </a:tbl>
           </a:graphicData>
@@ -5825,7 +6360,7 @@
           <a:noFill/>
         </p:spPr>
         <p:txBody>
-          <a:bodyPr wrap="square" lIns="0" rIns="0" tIns="0" bIns="0" anchor="t">
+          <a:bodyPr wrap="square" lIns="0" tIns="0" rIns="0" bIns="0" anchor="t">
             <a:spAutoFit/>
           </a:bodyPr>
           <a:lstStyle/>
@@ -5843,6 +6378,36 @@
           </a:p>
         </p:txBody>
       </p:sp>
+      <p:pic>
+        <p:nvPicPr>
+          <p:cNvPr id="6" name="Picture 5" descr="logo.png">
+            <a:extLst>
+              <a:ext uri="{FF2B5EF4-FFF2-40B4-BE49-F238E27FC236}">
+                <a16:creationId xmlns:a16="http://schemas.microsoft.com/office/drawing/2014/main" id="{3B55CCA3-1885-C0A5-4996-0D12AD5553F2}"/>
+              </a:ext>
+            </a:extLst>
+          </p:cNvPr>
+          <p:cNvPicPr>
+            <a:picLocks noChangeAspect="1"/>
+          </p:cNvPicPr>
+          <p:nvPr/>
+        </p:nvPicPr>
+        <p:blipFill>
+          <a:blip r:embed="rId3"/>
+          <a:stretch>
+            <a:fillRect/>
+          </a:stretch>
+        </p:blipFill>
+        <p:spPr>
+          <a:xfrm>
+            <a:off x="640080" y="6126480"/>
+            <a:ext cx="1927859" cy="502920"/>
+          </a:xfrm>
+          <a:prstGeom prst="rect">
+            <a:avLst/>
+          </a:prstGeom>
+        </p:spPr>
+      </p:pic>
     </p:spTree>
   </p:cSld>
   <p:clrMapOvr>
@@ -5851,8 +6416,8 @@
 </p:sld>
 </file>
 
-<file path=ppt/slides/slide6.xml><?xml version="1.0" encoding="utf-8"?>
-<p:sld xmlns:a="http://schemas.openxmlformats.org/drawingml/2006/main" xmlns:p="http://schemas.openxmlformats.org/presentationml/2006/main" xmlns:r="http://schemas.openxmlformats.org/officeDocument/2006/relationships">
+<file path=ppt/slides/slide8.xml><?xml version="1.0" encoding="utf-8"?>
+<p:sld xmlns:a="http://schemas.openxmlformats.org/drawingml/2006/main" xmlns:r="http://schemas.openxmlformats.org/officeDocument/2006/relationships" xmlns:p="http://schemas.openxmlformats.org/presentationml/2006/main">
   <p:cSld>
     <p:spTree>
       <p:nvGrpSpPr>
@@ -5860,7 +6425,14 @@
         <p:cNvGrpSpPr/>
         <p:nvPr/>
       </p:nvGrpSpPr>
-      <p:grpSpPr/>
+      <p:grpSpPr>
+        <a:xfrm>
+          <a:off x="0" y="0"/>
+          <a:ext cx="0" cy="0"/>
+          <a:chOff x="0" y="0"/>
+          <a:chExt cx="0" cy="0"/>
+        </a:xfrm>
+      </p:grpSpPr>
       <p:sp>
         <p:nvSpPr>
           <p:cNvPr id="2" name="TextBox 1"/>
@@ -5878,7 +6450,7 @@
           <a:noFill/>
         </p:spPr>
         <p:txBody>
-          <a:bodyPr wrap="square" lIns="0" rIns="0" tIns="0" bIns="0" anchor="t">
+          <a:bodyPr wrap="square" lIns="0" tIns="0" rIns="0" bIns="0" anchor="t">
             <a:spAutoFit/>
           </a:bodyPr>
           <a:lstStyle/>
@@ -5913,7 +6485,7 @@
           <a:noFill/>
         </p:spPr>
         <p:txBody>
-          <a:bodyPr wrap="square" lIns="0" rIns="0" tIns="0" bIns="0">
+          <a:bodyPr wrap="square" lIns="0" tIns="0" rIns="0" bIns="0">
             <a:spAutoFit/>
           </a:bodyPr>
           <a:lstStyle/>
@@ -5998,7 +6570,7 @@
         </p:nvSpPr>
         <p:spPr>
           <a:xfrm>
-            <a:off x="640080" y="6080760"/>
+            <a:off x="640080" y="5757454"/>
             <a:ext cx="10911535" cy="365760"/>
           </a:xfrm>
           <a:prstGeom prst="rect">
@@ -6007,7 +6579,7 @@
           <a:noFill/>
         </p:spPr>
         <p:txBody>
-          <a:bodyPr wrap="square" lIns="0" rIns="0" tIns="0" bIns="0" anchor="t">
+          <a:bodyPr wrap="square" lIns="0" tIns="0" rIns="0" bIns="0" anchor="t">
             <a:spAutoFit/>
           </a:bodyPr>
           <a:lstStyle/>
@@ -6077,7 +6649,7 @@
           <a:noFill/>
         </p:spPr>
         <p:txBody>
-          <a:bodyPr wrap="square" lIns="0" rIns="0" tIns="0" bIns="0" anchor="t">
+          <a:bodyPr wrap="square" lIns="0" tIns="0" rIns="0" bIns="0" anchor="t">
             <a:spAutoFit/>
           </a:bodyPr>
           <a:lstStyle/>
@@ -6095,6 +6667,36 @@
           </a:p>
         </p:txBody>
       </p:sp>
+      <p:pic>
+        <p:nvPicPr>
+          <p:cNvPr id="8" name="Picture 7" descr="logo.png">
+            <a:extLst>
+              <a:ext uri="{FF2B5EF4-FFF2-40B4-BE49-F238E27FC236}">
+                <a16:creationId xmlns:a16="http://schemas.microsoft.com/office/drawing/2014/main" id="{F2C3FC0E-0E19-9722-F788-C4F4145936F6}"/>
+              </a:ext>
+            </a:extLst>
+          </p:cNvPr>
+          <p:cNvPicPr>
+            <a:picLocks noChangeAspect="1"/>
+          </p:cNvPicPr>
+          <p:nvPr/>
+        </p:nvPicPr>
+        <p:blipFill>
+          <a:blip r:embed="rId3"/>
+          <a:stretch>
+            <a:fillRect/>
+          </a:stretch>
+        </p:blipFill>
+        <p:spPr>
+          <a:xfrm>
+            <a:off x="640080" y="6126480"/>
+            <a:ext cx="1927859" cy="502920"/>
+          </a:xfrm>
+          <a:prstGeom prst="rect">
+            <a:avLst/>
+          </a:prstGeom>
+        </p:spPr>
+      </p:pic>
     </p:spTree>
   </p:cSld>
   <p:clrMapOvr>
@@ -6434,44 +7036,44 @@
         <a:sysClr val="window" lastClr="FFFFFF"/>
       </a:lt1>
       <a:dk2>
-        <a:srgbClr val="1F497D"/>
+        <a:srgbClr val="0E2841"/>
       </a:dk2>
       <a:lt2>
-        <a:srgbClr val="EEECE1"/>
+        <a:srgbClr val="E8E8E8"/>
       </a:lt2>
       <a:accent1>
-        <a:srgbClr val="4F81BD"/>
+        <a:srgbClr val="156082"/>
       </a:accent1>
       <a:accent2>
-        <a:srgbClr val="C0504D"/>
+        <a:srgbClr val="E97132"/>
       </a:accent2>
       <a:accent3>
-        <a:srgbClr val="9BBB59"/>
+        <a:srgbClr val="196B24"/>
       </a:accent3>
       <a:accent4>
-        <a:srgbClr val="8064A2"/>
+        <a:srgbClr val="0F9ED5"/>
       </a:accent4>
       <a:accent5>
-        <a:srgbClr val="4BACC6"/>
+        <a:srgbClr val="A02B93"/>
       </a:accent5>
       <a:accent6>
-        <a:srgbClr val="F79646"/>
+        <a:srgbClr val="4EA72E"/>
       </a:accent6>
       <a:hlink>
-        <a:srgbClr val="0000FF"/>
+        <a:srgbClr val="467886"/>
       </a:hlink>
       <a:folHlink>
-        <a:srgbClr val="800080"/>
+        <a:srgbClr val="96607D"/>
       </a:folHlink>
     </a:clrScheme>
     <a:fontScheme name="Office">
       <a:majorFont>
-        <a:latin typeface="Calibri"/>
+        <a:latin typeface="Aptos Display" panose="02110004020202020204"/>
         <a:ea typeface=""/>
         <a:cs typeface=""/>
-        <a:font script="Jpan" typeface="ＭＳ Ｐゴシック"/>
+        <a:font script="Jpan" typeface="游ゴシック Light"/>
         <a:font script="Hang" typeface="맑은 고딕"/>
-        <a:font script="Hans" typeface="宋体"/>
+        <a:font script="Hans" typeface="等线 Light"/>
         <a:font script="Hant" typeface="新細明體"/>
         <a:font script="Arab" typeface="Times New Roman"/>
         <a:font script="Hebr" typeface="Times New Roman"/>
@@ -6499,14 +7101,31 @@
         <a:font script="Viet" typeface="Times New Roman"/>
         <a:font script="Uigh" typeface="Microsoft Uighur"/>
         <a:font script="Geor" typeface="Sylfaen"/>
+        <a:font script="Armn" typeface="Arial"/>
+        <a:font script="Bugi" typeface="Leelawadee UI"/>
+        <a:font script="Bopo" typeface="Microsoft JhengHei"/>
+        <a:font script="Java" typeface="Javanese Text"/>
+        <a:font script="Lisu" typeface="Segoe UI"/>
+        <a:font script="Mymr" typeface="Myanmar Text"/>
+        <a:font script="Nkoo" typeface="Ebrima"/>
+        <a:font script="Olck" typeface="Nirmala UI"/>
+        <a:font script="Osma" typeface="Ebrima"/>
+        <a:font script="Phag" typeface="Phagspa"/>
+        <a:font script="Syrn" typeface="Estrangelo Edessa"/>
+        <a:font script="Syrj" typeface="Estrangelo Edessa"/>
+        <a:font script="Syre" typeface="Estrangelo Edessa"/>
+        <a:font script="Sora" typeface="Nirmala UI"/>
+        <a:font script="Tale" typeface="Microsoft Tai Le"/>
+        <a:font script="Talu" typeface="Microsoft New Tai Lue"/>
+        <a:font script="Tfng" typeface="Ebrima"/>
       </a:majorFont>
       <a:minorFont>
-        <a:latin typeface="Calibri"/>
+        <a:latin typeface="Aptos" panose="02110004020202020204"/>
         <a:ea typeface=""/>
         <a:cs typeface=""/>
-        <a:font script="Jpan" typeface="ＭＳ Ｐゴシック"/>
+        <a:font script="Jpan" typeface="游ゴシック"/>
         <a:font script="Hang" typeface="맑은 고딕"/>
-        <a:font script="Hans" typeface="宋体"/>
+        <a:font script="Hans" typeface="等线"/>
         <a:font script="Hant" typeface="新細明體"/>
         <a:font script="Arab" typeface="Arial"/>
         <a:font script="Hebr" typeface="Arial"/>
@@ -6534,6 +7153,23 @@
         <a:font script="Viet" typeface="Arial"/>
         <a:font script="Uigh" typeface="Microsoft Uighur"/>
         <a:font script="Geor" typeface="Sylfaen"/>
+        <a:font script="Armn" typeface="Arial"/>
+        <a:font script="Bugi" typeface="Leelawadee UI"/>
+        <a:font script="Bopo" typeface="Microsoft JhengHei"/>
+        <a:font script="Java" typeface="Javanese Text"/>
+        <a:font script="Lisu" typeface="Segoe UI"/>
+        <a:font script="Mymr" typeface="Myanmar Text"/>
+        <a:font script="Nkoo" typeface="Ebrima"/>
+        <a:font script="Olck" typeface="Nirmala UI"/>
+        <a:font script="Osma" typeface="Ebrima"/>
+        <a:font script="Phag" typeface="Phagspa"/>
+        <a:font script="Syrn" typeface="Estrangelo Edessa"/>
+        <a:font script="Syrj" typeface="Estrangelo Edessa"/>
+        <a:font script="Syre" typeface="Estrangelo Edessa"/>
+        <a:font script="Sora" typeface="Nirmala UI"/>
+        <a:font script="Tale" typeface="Microsoft Tai Le"/>
+        <a:font script="Talu" typeface="Microsoft New Tai Lue"/>
+        <a:font script="Tfng" typeface="Ebrima"/>
       </a:minorFont>
     </a:fontScheme>
     <a:fmtScheme name="Office">
@@ -6545,180 +7181,136 @@
           <a:gsLst>
             <a:gs pos="0">
               <a:schemeClr val="phClr">
-                <a:tint val="50000"/>
-                <a:satMod val="300000"/>
+                <a:lumMod val="110000"/>
+                <a:satMod val="105000"/>
+                <a:tint val="67000"/>
               </a:schemeClr>
             </a:gs>
-            <a:gs pos="35000">
+            <a:gs pos="50000">
               <a:schemeClr val="phClr">
-                <a:tint val="37000"/>
-                <a:satMod val="300000"/>
+                <a:lumMod val="105000"/>
+                <a:satMod val="103000"/>
+                <a:tint val="73000"/>
               </a:schemeClr>
             </a:gs>
             <a:gs pos="100000">
               <a:schemeClr val="phClr">
-                <a:tint val="15000"/>
-                <a:satMod val="350000"/>
+                <a:lumMod val="105000"/>
+                <a:satMod val="109000"/>
+                <a:tint val="81000"/>
               </a:schemeClr>
             </a:gs>
           </a:gsLst>
-          <a:lin ang="16200000" scaled="1"/>
+          <a:lin ang="5400000" scaled="0"/>
         </a:gradFill>
         <a:gradFill rotWithShape="1">
           <a:gsLst>
             <a:gs pos="0">
               <a:schemeClr val="phClr">
-                <a:tint val="100000"/>
+                <a:satMod val="103000"/>
+                <a:lumMod val="102000"/>
+                <a:tint val="94000"/>
+              </a:schemeClr>
+            </a:gs>
+            <a:gs pos="50000">
+              <a:schemeClr val="phClr">
+                <a:satMod val="110000"/>
+                <a:lumMod val="100000"/>
                 <a:shade val="100000"/>
-                <a:satMod val="130000"/>
               </a:schemeClr>
             </a:gs>
             <a:gs pos="100000">
               <a:schemeClr val="phClr">
-                <a:tint val="50000"/>
-                <a:shade val="100000"/>
-                <a:satMod val="350000"/>
+                <a:lumMod val="99000"/>
+                <a:satMod val="120000"/>
+                <a:shade val="78000"/>
               </a:schemeClr>
             </a:gs>
           </a:gsLst>
-          <a:lin ang="16200000" scaled="0"/>
+          <a:lin ang="5400000" scaled="0"/>
         </a:gradFill>
       </a:fillStyleLst>
       <a:lnStyleLst>
-        <a:ln w="9525" cap="flat" cmpd="sng" algn="ctr">
+        <a:ln w="12700" cap="flat" cmpd="sng" algn="ctr">
           <a:solidFill>
-            <a:schemeClr val="phClr">
-              <a:shade val="95000"/>
-              <a:satMod val="105000"/>
-            </a:schemeClr>
+            <a:schemeClr val="phClr"/>
           </a:solidFill>
           <a:prstDash val="solid"/>
+          <a:miter lim="800000"/>
+        </a:ln>
+        <a:ln w="19050" cap="flat" cmpd="sng" algn="ctr">
+          <a:solidFill>
+            <a:schemeClr val="phClr"/>
+          </a:solidFill>
+          <a:prstDash val="solid"/>
+          <a:miter lim="800000"/>
         </a:ln>
         <a:ln w="25400" cap="flat" cmpd="sng" algn="ctr">
           <a:solidFill>
             <a:schemeClr val="phClr"/>
           </a:solidFill>
           <a:prstDash val="solid"/>
-        </a:ln>
-        <a:ln w="38100" cap="flat" cmpd="sng" algn="ctr">
-          <a:solidFill>
-            <a:schemeClr val="phClr"/>
-          </a:solidFill>
-          <a:prstDash val="solid"/>
+          <a:miter lim="800000"/>
         </a:ln>
       </a:lnStyleLst>
       <a:effectStyleLst>
         <a:effectStyle>
+          <a:effectLst/>
+        </a:effectStyle>
+        <a:effectStyle>
+          <a:effectLst/>
+        </a:effectStyle>
+        <a:effectStyle>
           <a:effectLst>
-            <a:outerShdw blurRad="40000" dist="20000" dir="5400000" rotWithShape="0">
+            <a:outerShdw blurRad="57150" dist="19050" dir="5400000" algn="ctr" rotWithShape="0">
               <a:srgbClr val="000000">
-                <a:alpha val="38000"/>
+                <a:alpha val="63000"/>
               </a:srgbClr>
             </a:outerShdw>
           </a:effectLst>
-        </a:effectStyle>
-        <a:effectStyle>
-          <a:effectLst>
-            <a:outerShdw blurRad="40000" dist="23000" dir="5400000" rotWithShape="0">
-              <a:srgbClr val="000000">
-                <a:alpha val="35000"/>
-              </a:srgbClr>
-            </a:outerShdw>
-          </a:effectLst>
-        </a:effectStyle>
-        <a:effectStyle>
-          <a:effectLst>
-            <a:outerShdw blurRad="40000" dist="23000" dir="5400000" rotWithShape="0">
-              <a:srgbClr val="000000">
-                <a:alpha val="35000"/>
-              </a:srgbClr>
-            </a:outerShdw>
-          </a:effectLst>
-          <a:scene3d>
-            <a:camera prst="orthographicFront">
-              <a:rot lat="0" lon="0" rev="0"/>
-            </a:camera>
-            <a:lightRig rig="threePt" dir="t">
-              <a:rot lat="0" lon="0" rev="1200000"/>
-            </a:lightRig>
-          </a:scene3d>
-          <a:sp3d>
-            <a:bevelT w="63500" h="25400"/>
-          </a:sp3d>
         </a:effectStyle>
       </a:effectStyleLst>
       <a:bgFillStyleLst>
         <a:solidFill>
           <a:schemeClr val="phClr"/>
         </a:solidFill>
+        <a:solidFill>
+          <a:schemeClr val="phClr">
+            <a:tint val="95000"/>
+            <a:satMod val="170000"/>
+          </a:schemeClr>
+        </a:solidFill>
         <a:gradFill rotWithShape="1">
           <a:gsLst>
             <a:gs pos="0">
               <a:schemeClr val="phClr">
-                <a:tint val="40000"/>
-                <a:satMod val="350000"/>
+                <a:tint val="93000"/>
+                <a:satMod val="150000"/>
+                <a:shade val="98000"/>
+                <a:lumMod val="102000"/>
               </a:schemeClr>
             </a:gs>
-            <a:gs pos="40000">
+            <a:gs pos="50000">
               <a:schemeClr val="phClr">
-                <a:tint val="45000"/>
-                <a:shade val="99000"/>
-                <a:satMod val="350000"/>
+                <a:tint val="98000"/>
+                <a:satMod val="130000"/>
+                <a:shade val="90000"/>
+                <a:lumMod val="103000"/>
               </a:schemeClr>
             </a:gs>
             <a:gs pos="100000">
               <a:schemeClr val="phClr">
-                <a:shade val="20000"/>
-                <a:satMod val="255000"/>
+                <a:shade val="63000"/>
+                <a:satMod val="120000"/>
               </a:schemeClr>
             </a:gs>
           </a:gsLst>
-          <a:path path="circle">
-            <a:fillToRect l="50000" t="-80000" r="50000" b="180000"/>
-          </a:path>
-        </a:gradFill>
-        <a:gradFill rotWithShape="1">
-          <a:gsLst>
-            <a:gs pos="0">
-              <a:schemeClr val="phClr">
-                <a:tint val="80000"/>
-                <a:satMod val="300000"/>
-              </a:schemeClr>
-            </a:gs>
-            <a:gs pos="100000">
-              <a:schemeClr val="phClr">
-                <a:shade val="30000"/>
-                <a:satMod val="200000"/>
-              </a:schemeClr>
-            </a:gs>
-          </a:gsLst>
-          <a:path path="circle">
-            <a:fillToRect l="50000" t="50000" r="50000" b="50000"/>
-          </a:path>
+          <a:lin ang="5400000" scaled="0"/>
         </a:gradFill>
       </a:bgFillStyleLst>
     </a:fmtScheme>
   </a:themeElements>
   <a:objectDefaults>
-    <a:spDef>
-      <a:spPr/>
-      <a:bodyPr/>
-      <a:lstStyle/>
-      <a:style>
-        <a:lnRef idx="1">
-          <a:schemeClr val="accent1"/>
-        </a:lnRef>
-        <a:fillRef idx="3">
-          <a:schemeClr val="accent1"/>
-        </a:fillRef>
-        <a:effectRef idx="2">
-          <a:schemeClr val="accent1"/>
-        </a:effectRef>
-        <a:fontRef idx="minor">
-          <a:schemeClr val="lt1"/>
-        </a:fontRef>
-      </a:style>
-    </a:spDef>
     <a:lnDef>
       <a:spPr/>
       <a:bodyPr/>
@@ -6740,5 +7332,10 @@
     </a:lnDef>
   </a:objectDefaults>
   <a:extraClrSchemeLst/>
+  <a:extLst>
+    <a:ext uri="{05A4C25C-085E-4340-85A3-A5531E510DB2}">
+      <thm15:themeFamily xmlns:thm15="http://schemas.microsoft.com/office/thememl/2012/main" name="Office Theme" id="{2E142A2C-CD16-42D6-873A-C26D2A0506FA}" vid="{1BDDFF52-6CD6-40A5-AB3C-68EB2F1E4D0A}"/>
+    </a:ext>
+  </a:extLst>
 </a:theme>
 </file>